--- a/Slides/AP-S 2026 -- HD-7 -- Part2 -- Pattern Reconstruction with AI​.pptx
+++ b/Slides/AP-S 2026 -- HD-7 -- Part2 -- Pattern Reconstruction with AI​.pptx
@@ -26,7 +26,7 @@
     <p:sldId id="2147479324" r:id="rId17"/>
     <p:sldId id="2147479346" r:id="rId18"/>
     <p:sldId id="2147479345" r:id="rId19"/>
-    <p:sldId id="2147479341" r:id="rId20"/>
+    <p:sldId id="2090650669" r:id="rId20"/>
   </p:sldIdLst>
   <p:sldSz cx="12192000" cy="6858000"/>
   <p:notesSz cx="7099300" cy="9385300"/>
@@ -145,7 +145,7 @@
             <p14:sldId id="2147479324"/>
             <p14:sldId id="2147479346"/>
             <p14:sldId id="2147479345"/>
-            <p14:sldId id="2147479341"/>
+            <p14:sldId id="2090650669"/>
           </p14:sldIdLst>
         </p14:section>
       </p14:sectionLst>
@@ -185,10 +185,9 @@
 <file path=ppt/revisionInfo.xml><?xml version="1.0" encoding="utf-8"?>
 <p1510:revInfo xmlns:a="http://schemas.openxmlformats.org/drawingml/2006/main" xmlns:r="http://schemas.openxmlformats.org/officeDocument/2006/relationships" xmlns:p1510="http://schemas.microsoft.com/office/powerpoint/2015/10/main">
   <p1510:revLst>
-    <p1510:client id="{0304AEF8-201C-8E1C-4657-E4205BD58110}" v="548" dt="2026-07-10T13:40:45.924"/>
     <p1510:client id="{243A51C8-5E7F-AD81-7D65-7AEB4D0A4F4B}" v="35" dt="2026-07-11T14:15:04.946"/>
+    <p1510:client id="{45555300-E6EB-4EB9-8ABF-DAF78FC38853}" v="14" dt="2026-07-12T14:06:16.570"/>
     <p1510:client id="{53B91347-CB63-D923-3C2D-E4E588B66E73}" v="14" dt="2026-07-11T14:21:56.893"/>
-    <p1510:client id="{77E0C31D-0C18-1930-84F7-3703432895A2}" v="125" dt="2026-07-10T21:46:48.746"/>
   </p1510:revLst>
 </p1510:revInfo>
 </file>
@@ -196,58 +195,557 @@
 <file path=ppt/changesInfos/changesInfo1.xml><?xml version="1.0" encoding="utf-8"?>
 <pc:chgInfo xmlns:a="http://schemas.openxmlformats.org/drawingml/2006/main" xmlns:r="http://schemas.openxmlformats.org/officeDocument/2006/relationships" xmlns:ac="http://schemas.microsoft.com/office/drawing/2013/main/command" xmlns:pc="http://schemas.microsoft.com/office/powerpoint/2013/main/command">
   <pc:docChgLst>
+    <pc:chgData name="Sudarshan Sivaramakrishnan" userId="S::ssivaram@mathworks.com::de70194d-fdbd-489d-817c-0c0648753bc1" providerId="AD" clId="Web-{53B91347-CB63-D923-3C2D-E4E588B66E73}"/>
+    <pc:docChg chg="delSld delSection modSection">
+      <pc:chgData name="Sudarshan Sivaramakrishnan" userId="S::ssivaram@mathworks.com::de70194d-fdbd-489d-817c-0c0648753bc1" providerId="AD" clId="Web-{53B91347-CB63-D923-3C2D-E4E588B66E73}" dt="2026-07-11T14:21:56.893" v="13"/>
+      <pc:docMkLst>
+        <pc:docMk/>
+      </pc:docMkLst>
+      <pc:sldChg chg="del">
+        <pc:chgData name="Sudarshan Sivaramakrishnan" userId="S::ssivaram@mathworks.com::de70194d-fdbd-489d-817c-0c0648753bc1" providerId="AD" clId="Web-{53B91347-CB63-D923-3C2D-E4E588B66E73}" dt="2026-07-11T14:21:31.220" v="6"/>
+        <pc:sldMkLst>
+          <pc:docMk/>
+          <pc:sldMk cId="4191744665" sldId="298"/>
+        </pc:sldMkLst>
+      </pc:sldChg>
+      <pc:sldChg chg="del">
+        <pc:chgData name="Sudarshan Sivaramakrishnan" userId="S::ssivaram@mathworks.com::de70194d-fdbd-489d-817c-0c0648753bc1" providerId="AD" clId="Web-{53B91347-CB63-D923-3C2D-E4E588B66E73}" dt="2026-07-11T14:20:53.579" v="0"/>
+        <pc:sldMkLst>
+          <pc:docMk/>
+          <pc:sldMk cId="4143862939" sldId="1347"/>
+        </pc:sldMkLst>
+      </pc:sldChg>
+      <pc:sldChg chg="del">
+        <pc:chgData name="Sudarshan Sivaramakrishnan" userId="S::ssivaram@mathworks.com::de70194d-fdbd-489d-817c-0c0648753bc1" providerId="AD" clId="Web-{53B91347-CB63-D923-3C2D-E4E588B66E73}" dt="2026-07-11T14:21:08.001" v="1"/>
+        <pc:sldMkLst>
+          <pc:docMk/>
+          <pc:sldMk cId="2820808393" sldId="2145706540"/>
+        </pc:sldMkLst>
+      </pc:sldChg>
+      <pc:sldChg chg="del">
+        <pc:chgData name="Sudarshan Sivaramakrishnan" userId="S::ssivaram@mathworks.com::de70194d-fdbd-489d-817c-0c0648753bc1" providerId="AD" clId="Web-{53B91347-CB63-D923-3C2D-E4E588B66E73}" dt="2026-07-11T14:21:56.893" v="13"/>
+        <pc:sldMkLst>
+          <pc:docMk/>
+          <pc:sldMk cId="252827436" sldId="2147376758"/>
+        </pc:sldMkLst>
+      </pc:sldChg>
+      <pc:sldChg chg="del">
+        <pc:chgData name="Sudarshan Sivaramakrishnan" userId="S::ssivaram@mathworks.com::de70194d-fdbd-489d-817c-0c0648753bc1" providerId="AD" clId="Web-{53B91347-CB63-D923-3C2D-E4E588B66E73}" dt="2026-07-11T14:21:31.236" v="10"/>
+        <pc:sldMkLst>
+          <pc:docMk/>
+          <pc:sldMk cId="1128881988" sldId="2147376760"/>
+        </pc:sldMkLst>
+      </pc:sldChg>
+      <pc:sldChg chg="del">
+        <pc:chgData name="Sudarshan Sivaramakrishnan" userId="S::ssivaram@mathworks.com::de70194d-fdbd-489d-817c-0c0648753bc1" providerId="AD" clId="Web-{53B91347-CB63-D923-3C2D-E4E588B66E73}" dt="2026-07-11T14:21:31.220" v="7"/>
+        <pc:sldMkLst>
+          <pc:docMk/>
+          <pc:sldMk cId="137036860" sldId="2147479268"/>
+        </pc:sldMkLst>
+      </pc:sldChg>
+      <pc:sldChg chg="del">
+        <pc:chgData name="Sudarshan Sivaramakrishnan" userId="S::ssivaram@mathworks.com::de70194d-fdbd-489d-817c-0c0648753bc1" providerId="AD" clId="Web-{53B91347-CB63-D923-3C2D-E4E588B66E73}" dt="2026-07-11T14:21:31.220" v="8"/>
+        <pc:sldMkLst>
+          <pc:docMk/>
+          <pc:sldMk cId="2319082624" sldId="2147479296"/>
+        </pc:sldMkLst>
+      </pc:sldChg>
+      <pc:sldChg chg="del">
+        <pc:chgData name="Sudarshan Sivaramakrishnan" userId="S::ssivaram@mathworks.com::de70194d-fdbd-489d-817c-0c0648753bc1" providerId="AD" clId="Web-{53B91347-CB63-D923-3C2D-E4E588B66E73}" dt="2026-07-11T14:21:31.220" v="9"/>
+        <pc:sldMkLst>
+          <pc:docMk/>
+          <pc:sldMk cId="3917329948" sldId="2147479325"/>
+        </pc:sldMkLst>
+      </pc:sldChg>
+      <pc:sldChg chg="del">
+        <pc:chgData name="Sudarshan Sivaramakrishnan" userId="S::ssivaram@mathworks.com::de70194d-fdbd-489d-817c-0c0648753bc1" providerId="AD" clId="Web-{53B91347-CB63-D923-3C2D-E4E588B66E73}" dt="2026-07-11T14:21:31.205" v="3"/>
+        <pc:sldMkLst>
+          <pc:docMk/>
+          <pc:sldMk cId="200346005" sldId="2147479326"/>
+        </pc:sldMkLst>
+      </pc:sldChg>
+      <pc:sldChg chg="del">
+        <pc:chgData name="Sudarshan Sivaramakrishnan" userId="S::ssivaram@mathworks.com::de70194d-fdbd-489d-817c-0c0648753bc1" providerId="AD" clId="Web-{53B91347-CB63-D923-3C2D-E4E588B66E73}" dt="2026-07-11T14:21:31.220" v="4"/>
+        <pc:sldMkLst>
+          <pc:docMk/>
+          <pc:sldMk cId="1455500157" sldId="2147479343"/>
+        </pc:sldMkLst>
+      </pc:sldChg>
+      <pc:sldChg chg="del">
+        <pc:chgData name="Sudarshan Sivaramakrishnan" userId="S::ssivaram@mathworks.com::de70194d-fdbd-489d-817c-0c0648753bc1" providerId="AD" clId="Web-{53B91347-CB63-D923-3C2D-E4E588B66E73}" dt="2026-07-11T14:21:31.220" v="5"/>
+        <pc:sldMkLst>
+          <pc:docMk/>
+          <pc:sldMk cId="1510197360" sldId="2147479344"/>
+        </pc:sldMkLst>
+      </pc:sldChg>
+    </pc:docChg>
+  </pc:docChgLst>
+  <pc:docChgLst>
+    <pc:chgData name="Sekhar Sekharan" userId="518baa86-29dc-48c7-8fb2-d35a916cb510" providerId="ADAL" clId="{AEBB8E91-64A1-4D9B-AA4C-D40DB5207DB8}"/>
+    <pc:docChg chg="undo custSel addSld delSld modSld modSection">
+      <pc:chgData name="Sekhar Sekharan" userId="518baa86-29dc-48c7-8fb2-d35a916cb510" providerId="ADAL" clId="{AEBB8E91-64A1-4D9B-AA4C-D40DB5207DB8}" dt="2026-07-12T14:12:07.463" v="219" actId="478"/>
+      <pc:docMkLst>
+        <pc:docMk/>
+      </pc:docMkLst>
+      <pc:sldChg chg="addSp delSp modSp add mod delAnim modAnim">
+        <pc:chgData name="Sekhar Sekharan" userId="518baa86-29dc-48c7-8fb2-d35a916cb510" providerId="ADAL" clId="{AEBB8E91-64A1-4D9B-AA4C-D40DB5207DB8}" dt="2026-07-12T14:12:07.463" v="219" actId="478"/>
+        <pc:sldMkLst>
+          <pc:docMk/>
+          <pc:sldMk cId="4172345208" sldId="2090650669"/>
+        </pc:sldMkLst>
+        <pc:spChg chg="mod">
+          <ac:chgData name="Sekhar Sekharan" userId="518baa86-29dc-48c7-8fb2-d35a916cb510" providerId="ADAL" clId="{AEBB8E91-64A1-4D9B-AA4C-D40DB5207DB8}" dt="2026-07-12T13:54:43.557" v="21" actId="20577"/>
+          <ac:spMkLst>
+            <pc:docMk/>
+            <pc:sldMk cId="4172345208" sldId="2090650669"/>
+            <ac:spMk id="2" creationId="{B434FC57-832F-4007-764D-4CE73F9D6765}"/>
+          </ac:spMkLst>
+        </pc:spChg>
+        <pc:spChg chg="add mod">
+          <ac:chgData name="Sekhar Sekharan" userId="518baa86-29dc-48c7-8fb2-d35a916cb510" providerId="ADAL" clId="{AEBB8E91-64A1-4D9B-AA4C-D40DB5207DB8}" dt="2026-07-12T14:03:14.488" v="135" actId="164"/>
+          <ac:spMkLst>
+            <pc:docMk/>
+            <pc:sldMk cId="4172345208" sldId="2090650669"/>
+            <ac:spMk id="11" creationId="{A5BD2A56-A07F-36ED-EBA7-DD359D4C39ED}"/>
+          </ac:spMkLst>
+        </pc:spChg>
+        <pc:spChg chg="add mod">
+          <ac:chgData name="Sekhar Sekharan" userId="518baa86-29dc-48c7-8fb2-d35a916cb510" providerId="ADAL" clId="{AEBB8E91-64A1-4D9B-AA4C-D40DB5207DB8}" dt="2026-07-12T14:03:14.488" v="135" actId="164"/>
+          <ac:spMkLst>
+            <pc:docMk/>
+            <pc:sldMk cId="4172345208" sldId="2090650669"/>
+            <ac:spMk id="14" creationId="{DB6B4010-5E04-B656-0A3D-27095278EF1E}"/>
+          </ac:spMkLst>
+        </pc:spChg>
+        <pc:spChg chg="add mod">
+          <ac:chgData name="Sekhar Sekharan" userId="518baa86-29dc-48c7-8fb2-d35a916cb510" providerId="ADAL" clId="{AEBB8E91-64A1-4D9B-AA4C-D40DB5207DB8}" dt="2026-07-12T14:03:14.488" v="135" actId="164"/>
+          <ac:spMkLst>
+            <pc:docMk/>
+            <pc:sldMk cId="4172345208" sldId="2090650669"/>
+            <ac:spMk id="15" creationId="{5927E02C-7703-68D6-CCEF-5481CA7AB429}"/>
+          </ac:spMkLst>
+        </pc:spChg>
+        <pc:spChg chg="mod">
+          <ac:chgData name="Sekhar Sekharan" userId="518baa86-29dc-48c7-8fb2-d35a916cb510" providerId="ADAL" clId="{AEBB8E91-64A1-4D9B-AA4C-D40DB5207DB8}" dt="2026-07-12T14:03:25.766" v="137" actId="1076"/>
+          <ac:spMkLst>
+            <pc:docMk/>
+            <pc:sldMk cId="4172345208" sldId="2090650669"/>
+            <ac:spMk id="16" creationId="{B9542408-F35F-0D8E-BE43-E9C5CB1FA114}"/>
+          </ac:spMkLst>
+        </pc:spChg>
+        <pc:spChg chg="mod">
+          <ac:chgData name="Sekhar Sekharan" userId="518baa86-29dc-48c7-8fb2-d35a916cb510" providerId="ADAL" clId="{AEBB8E91-64A1-4D9B-AA4C-D40DB5207DB8}" dt="2026-07-12T14:03:33.312" v="138" actId="1076"/>
+          <ac:spMkLst>
+            <pc:docMk/>
+            <pc:sldMk cId="4172345208" sldId="2090650669"/>
+            <ac:spMk id="17" creationId="{F291963D-8762-9D94-BEDE-D5917F8FF701}"/>
+          </ac:spMkLst>
+        </pc:spChg>
+        <pc:spChg chg="add mod">
+          <ac:chgData name="Sekhar Sekharan" userId="518baa86-29dc-48c7-8fb2-d35a916cb510" providerId="ADAL" clId="{AEBB8E91-64A1-4D9B-AA4C-D40DB5207DB8}" dt="2026-07-12T14:03:14.488" v="135" actId="164"/>
+          <ac:spMkLst>
+            <pc:docMk/>
+            <pc:sldMk cId="4172345208" sldId="2090650669"/>
+            <ac:spMk id="23" creationId="{7F087874-C005-F2AF-9899-9A650C28FDE0}"/>
+          </ac:spMkLst>
+        </pc:spChg>
+        <pc:spChg chg="add mod">
+          <ac:chgData name="Sekhar Sekharan" userId="518baa86-29dc-48c7-8fb2-d35a916cb510" providerId="ADAL" clId="{AEBB8E91-64A1-4D9B-AA4C-D40DB5207DB8}" dt="2026-07-12T14:03:14.488" v="135" actId="164"/>
+          <ac:spMkLst>
+            <pc:docMk/>
+            <pc:sldMk cId="4172345208" sldId="2090650669"/>
+            <ac:spMk id="24" creationId="{3A019DEB-5580-4060-C6C9-8B4DCB4DB751}"/>
+          </ac:spMkLst>
+        </pc:spChg>
+        <pc:spChg chg="add mod">
+          <ac:chgData name="Sekhar Sekharan" userId="518baa86-29dc-48c7-8fb2-d35a916cb510" providerId="ADAL" clId="{AEBB8E91-64A1-4D9B-AA4C-D40DB5207DB8}" dt="2026-07-12T14:00:46.967" v="104"/>
+          <ac:spMkLst>
+            <pc:docMk/>
+            <pc:sldMk cId="4172345208" sldId="2090650669"/>
+            <ac:spMk id="28" creationId="{7B91CA4C-485D-483A-3F51-2C73105A1795}"/>
+          </ac:spMkLst>
+        </pc:spChg>
+        <pc:spChg chg="add del mod">
+          <ac:chgData name="Sekhar Sekharan" userId="518baa86-29dc-48c7-8fb2-d35a916cb510" providerId="ADAL" clId="{AEBB8E91-64A1-4D9B-AA4C-D40DB5207DB8}" dt="2026-07-12T14:00:59.799" v="107" actId="478"/>
+          <ac:spMkLst>
+            <pc:docMk/>
+            <pc:sldMk cId="4172345208" sldId="2090650669"/>
+            <ac:spMk id="31" creationId="{D757E4A1-99C2-472E-13A4-E7894A2D883A}"/>
+          </ac:spMkLst>
+        </pc:spChg>
+        <pc:spChg chg="add mod">
+          <ac:chgData name="Sekhar Sekharan" userId="518baa86-29dc-48c7-8fb2-d35a916cb510" providerId="ADAL" clId="{AEBB8E91-64A1-4D9B-AA4C-D40DB5207DB8}" dt="2026-07-12T14:03:14.488" v="135" actId="164"/>
+          <ac:spMkLst>
+            <pc:docMk/>
+            <pc:sldMk cId="4172345208" sldId="2090650669"/>
+            <ac:spMk id="33" creationId="{A1A79335-4600-7E70-3D7E-76F0E7C4F63C}"/>
+          </ac:spMkLst>
+        </pc:spChg>
+        <pc:spChg chg="add mod">
+          <ac:chgData name="Sekhar Sekharan" userId="518baa86-29dc-48c7-8fb2-d35a916cb510" providerId="ADAL" clId="{AEBB8E91-64A1-4D9B-AA4C-D40DB5207DB8}" dt="2026-07-12T14:06:43.932" v="196" actId="1076"/>
+          <ac:spMkLst>
+            <pc:docMk/>
+            <pc:sldMk cId="4172345208" sldId="2090650669"/>
+            <ac:spMk id="35" creationId="{39C700AC-1A41-6860-1ECE-18AD6F4D9F62}"/>
+          </ac:spMkLst>
+        </pc:spChg>
+        <pc:spChg chg="add del mod">
+          <ac:chgData name="Sekhar Sekharan" userId="518baa86-29dc-48c7-8fb2-d35a916cb510" providerId="ADAL" clId="{AEBB8E91-64A1-4D9B-AA4C-D40DB5207DB8}" dt="2026-07-12T14:12:07.463" v="219" actId="478"/>
+          <ac:spMkLst>
+            <pc:docMk/>
+            <pc:sldMk cId="4172345208" sldId="2090650669"/>
+            <ac:spMk id="36" creationId="{5C61E908-D1C3-1FB0-B025-3DCD894A5222}"/>
+          </ac:spMkLst>
+        </pc:spChg>
+        <pc:spChg chg="add mod">
+          <ac:chgData name="Sekhar Sekharan" userId="518baa86-29dc-48c7-8fb2-d35a916cb510" providerId="ADAL" clId="{AEBB8E91-64A1-4D9B-AA4C-D40DB5207DB8}" dt="2026-07-12T14:06:49.071" v="197" actId="1076"/>
+          <ac:spMkLst>
+            <pc:docMk/>
+            <pc:sldMk cId="4172345208" sldId="2090650669"/>
+            <ac:spMk id="37" creationId="{E3797453-2A96-E87B-D213-CD646E854D0D}"/>
+          </ac:spMkLst>
+        </pc:spChg>
+        <pc:spChg chg="del topLvl">
+          <ac:chgData name="Sekhar Sekharan" userId="518baa86-29dc-48c7-8fb2-d35a916cb510" providerId="ADAL" clId="{AEBB8E91-64A1-4D9B-AA4C-D40DB5207DB8}" dt="2026-07-12T13:55:04.286" v="23" actId="478"/>
+          <ac:spMkLst>
+            <pc:docMk/>
+            <pc:sldMk cId="4172345208" sldId="2090650669"/>
+            <ac:spMk id="59" creationId="{D4E42990-2715-8069-DCCF-BACB14816393}"/>
+          </ac:spMkLst>
+        </pc:spChg>
+        <pc:grpChg chg="add mod">
+          <ac:chgData name="Sekhar Sekharan" userId="518baa86-29dc-48c7-8fb2-d35a916cb510" providerId="ADAL" clId="{AEBB8E91-64A1-4D9B-AA4C-D40DB5207DB8}" dt="2026-07-12T14:05:27.862" v="176" actId="1076"/>
+          <ac:grpSpMkLst>
+            <pc:docMk/>
+            <pc:sldMk cId="4172345208" sldId="2090650669"/>
+            <ac:grpSpMk id="34" creationId="{B439FBC7-3701-AC95-76B2-786DAF9910E8}"/>
+          </ac:grpSpMkLst>
+        </pc:grpChg>
+        <pc:grpChg chg="mod">
+          <ac:chgData name="Sekhar Sekharan" userId="518baa86-29dc-48c7-8fb2-d35a916cb510" providerId="ADAL" clId="{AEBB8E91-64A1-4D9B-AA4C-D40DB5207DB8}" dt="2026-07-12T14:05:31.234" v="177" actId="1076"/>
+          <ac:grpSpMkLst>
+            <pc:docMk/>
+            <pc:sldMk cId="4172345208" sldId="2090650669"/>
+            <ac:grpSpMk id="84" creationId="{5B6C4C19-187E-ACC9-260C-07A345443F83}"/>
+          </ac:grpSpMkLst>
+        </pc:grpChg>
+        <pc:grpChg chg="mod">
+          <ac:chgData name="Sekhar Sekharan" userId="518baa86-29dc-48c7-8fb2-d35a916cb510" providerId="ADAL" clId="{AEBB8E91-64A1-4D9B-AA4C-D40DB5207DB8}" dt="2026-07-12T14:05:14.748" v="175" actId="1076"/>
+          <ac:grpSpMkLst>
+            <pc:docMk/>
+            <pc:sldMk cId="4172345208" sldId="2090650669"/>
+            <ac:grpSpMk id="90" creationId="{A3E8640C-DFF8-B513-2BD0-E2727BB34BA8}"/>
+          </ac:grpSpMkLst>
+        </pc:grpChg>
+        <pc:grpChg chg="del">
+          <ac:chgData name="Sekhar Sekharan" userId="518baa86-29dc-48c7-8fb2-d35a916cb510" providerId="ADAL" clId="{AEBB8E91-64A1-4D9B-AA4C-D40DB5207DB8}" dt="2026-07-12T13:55:04.286" v="23" actId="478"/>
+          <ac:grpSpMkLst>
+            <pc:docMk/>
+            <pc:sldMk cId="4172345208" sldId="2090650669"/>
+            <ac:grpSpMk id="91" creationId="{03595CE5-A9C9-3128-DD36-A81E2C918576}"/>
+          </ac:grpSpMkLst>
+        </pc:grpChg>
+        <pc:picChg chg="del mod">
+          <ac:chgData name="Sekhar Sekharan" userId="518baa86-29dc-48c7-8fb2-d35a916cb510" providerId="ADAL" clId="{AEBB8E91-64A1-4D9B-AA4C-D40DB5207DB8}" dt="2026-07-12T14:06:39.550" v="195" actId="478"/>
+          <ac:picMkLst>
+            <pc:docMk/>
+            <pc:sldMk cId="4172345208" sldId="2090650669"/>
+            <ac:picMk id="83" creationId="{8C0BDBDE-32A2-E298-7DDD-FA175218A0DE}"/>
+          </ac:picMkLst>
+        </pc:picChg>
+        <pc:picChg chg="del">
+          <ac:chgData name="Sekhar Sekharan" userId="518baa86-29dc-48c7-8fb2-d35a916cb510" providerId="ADAL" clId="{AEBB8E91-64A1-4D9B-AA4C-D40DB5207DB8}" dt="2026-07-12T13:54:57.231" v="22" actId="478"/>
+          <ac:picMkLst>
+            <pc:docMk/>
+            <pc:sldMk cId="4172345208" sldId="2090650669"/>
+            <ac:picMk id="88" creationId="{1447ACF4-531F-6750-7EDF-3EE33224074F}"/>
+          </ac:picMkLst>
+        </pc:picChg>
+        <pc:cxnChg chg="del mod">
+          <ac:chgData name="Sekhar Sekharan" userId="518baa86-29dc-48c7-8fb2-d35a916cb510" providerId="ADAL" clId="{AEBB8E91-64A1-4D9B-AA4C-D40DB5207DB8}" dt="2026-07-12T13:57:05.775" v="34" actId="478"/>
+          <ac:cxnSpMkLst>
+            <pc:docMk/>
+            <pc:sldMk cId="4172345208" sldId="2090650669"/>
+            <ac:cxnSpMk id="32" creationId="{0CFE2310-38AD-5DA3-5FF2-AB0F0D134892}"/>
+          </ac:cxnSpMkLst>
+        </pc:cxnChg>
+        <pc:cxnChg chg="add mod">
+          <ac:chgData name="Sekhar Sekharan" userId="518baa86-29dc-48c7-8fb2-d35a916cb510" providerId="ADAL" clId="{AEBB8E91-64A1-4D9B-AA4C-D40DB5207DB8}" dt="2026-07-12T14:11:05.754" v="216" actId="208"/>
+          <ac:cxnSpMkLst>
+            <pc:docMk/>
+            <pc:sldMk cId="4172345208" sldId="2090650669"/>
+            <ac:cxnSpMk id="40" creationId="{902239E8-6443-B8C6-DACA-5A033157736D}"/>
+          </ac:cxnSpMkLst>
+        </pc:cxnChg>
+        <pc:cxnChg chg="add del">
+          <ac:chgData name="Sekhar Sekharan" userId="518baa86-29dc-48c7-8fb2-d35a916cb510" providerId="ADAL" clId="{AEBB8E91-64A1-4D9B-AA4C-D40DB5207DB8}" dt="2026-07-12T14:08:49.943" v="200" actId="11529"/>
+          <ac:cxnSpMkLst>
+            <pc:docMk/>
+            <pc:sldMk cId="4172345208" sldId="2090650669"/>
+            <ac:cxnSpMk id="42" creationId="{345BBC0C-DC27-4FC3-15BB-355554886437}"/>
+          </ac:cxnSpMkLst>
+        </pc:cxnChg>
+        <pc:cxnChg chg="add mod">
+          <ac:chgData name="Sekhar Sekharan" userId="518baa86-29dc-48c7-8fb2-d35a916cb510" providerId="ADAL" clId="{AEBB8E91-64A1-4D9B-AA4C-D40DB5207DB8}" dt="2026-07-12T14:11:05.754" v="216" actId="208"/>
+          <ac:cxnSpMkLst>
+            <pc:docMk/>
+            <pc:sldMk cId="4172345208" sldId="2090650669"/>
+            <ac:cxnSpMk id="44" creationId="{C343D541-0D37-47ED-B29B-17DCEFFD3AAA}"/>
+          </ac:cxnSpMkLst>
+        </pc:cxnChg>
+        <pc:cxnChg chg="mod topLvl">
+          <ac:chgData name="Sekhar Sekharan" userId="518baa86-29dc-48c7-8fb2-d35a916cb510" providerId="ADAL" clId="{AEBB8E91-64A1-4D9B-AA4C-D40DB5207DB8}" dt="2026-07-12T14:05:31.234" v="177" actId="1076"/>
+          <ac:cxnSpMkLst>
+            <pc:docMk/>
+            <pc:sldMk cId="4172345208" sldId="2090650669"/>
+            <ac:cxnSpMk id="46" creationId="{574DB420-7A50-F860-04D1-A2D7D604B918}"/>
+          </ac:cxnSpMkLst>
+        </pc:cxnChg>
+        <pc:cxnChg chg="add mod">
+          <ac:chgData name="Sekhar Sekharan" userId="518baa86-29dc-48c7-8fb2-d35a916cb510" providerId="ADAL" clId="{AEBB8E91-64A1-4D9B-AA4C-D40DB5207DB8}" dt="2026-07-12T14:11:05.754" v="216" actId="208"/>
+          <ac:cxnSpMkLst>
+            <pc:docMk/>
+            <pc:sldMk cId="4172345208" sldId="2090650669"/>
+            <ac:cxnSpMk id="49" creationId="{E557E6BE-5E8A-64DC-3AA9-E2212135C618}"/>
+          </ac:cxnSpMkLst>
+        </pc:cxnChg>
+        <pc:cxnChg chg="add del mod">
+          <ac:chgData name="Sekhar Sekharan" userId="518baa86-29dc-48c7-8fb2-d35a916cb510" providerId="ADAL" clId="{AEBB8E91-64A1-4D9B-AA4C-D40DB5207DB8}" dt="2026-07-12T14:10:05.339" v="211" actId="478"/>
+          <ac:cxnSpMkLst>
+            <pc:docMk/>
+            <pc:sldMk cId="4172345208" sldId="2090650669"/>
+            <ac:cxnSpMk id="55" creationId="{A29C2512-A436-06EA-6516-72159A854368}"/>
+          </ac:cxnSpMkLst>
+        </pc:cxnChg>
+        <pc:cxnChg chg="add mod">
+          <ac:chgData name="Sekhar Sekharan" userId="518baa86-29dc-48c7-8fb2-d35a916cb510" providerId="ADAL" clId="{AEBB8E91-64A1-4D9B-AA4C-D40DB5207DB8}" dt="2026-07-12T14:11:05.754" v="216" actId="208"/>
+          <ac:cxnSpMkLst>
+            <pc:docMk/>
+            <pc:sldMk cId="4172345208" sldId="2090650669"/>
+            <ac:cxnSpMk id="63" creationId="{3D59BC2F-18A0-672D-240B-C8C41E270787}"/>
+          </ac:cxnSpMkLst>
+        </pc:cxnChg>
+        <pc:cxnChg chg="add mod">
+          <ac:chgData name="Sekhar Sekharan" userId="518baa86-29dc-48c7-8fb2-d35a916cb510" providerId="ADAL" clId="{AEBB8E91-64A1-4D9B-AA4C-D40DB5207DB8}" dt="2026-07-12T14:11:42.482" v="218" actId="14100"/>
+          <ac:cxnSpMkLst>
+            <pc:docMk/>
+            <pc:sldMk cId="4172345208" sldId="2090650669"/>
+            <ac:cxnSpMk id="69" creationId="{F9205B8A-C366-F7A5-3EF7-161DD383EED3}"/>
+          </ac:cxnSpMkLst>
+        </pc:cxnChg>
+      </pc:sldChg>
+      <pc:sldChg chg="del">
+        <pc:chgData name="Sekhar Sekharan" userId="518baa86-29dc-48c7-8fb2-d35a916cb510" providerId="ADAL" clId="{AEBB8E91-64A1-4D9B-AA4C-D40DB5207DB8}" dt="2026-07-12T14:03:51.123" v="140" actId="47"/>
+        <pc:sldMkLst>
+          <pc:docMk/>
+          <pc:sldMk cId="2695534885" sldId="2147479341"/>
+        </pc:sldMkLst>
+      </pc:sldChg>
+      <pc:sldChg chg="add del">
+        <pc:chgData name="Sekhar Sekharan" userId="518baa86-29dc-48c7-8fb2-d35a916cb510" providerId="ADAL" clId="{AEBB8E91-64A1-4D9B-AA4C-D40DB5207DB8}" dt="2026-07-12T11:00:05.532" v="1" actId="2696"/>
+        <pc:sldMkLst>
+          <pc:docMk/>
+          <pc:sldMk cId="3426075837" sldId="2147479342"/>
+        </pc:sldMkLst>
+      </pc:sldChg>
+      <pc:sldMasterChg chg="addSldLayout delSldLayout">
+        <pc:chgData name="Sekhar Sekharan" userId="518baa86-29dc-48c7-8fb2-d35a916cb510" providerId="ADAL" clId="{AEBB8E91-64A1-4D9B-AA4C-D40DB5207DB8}" dt="2026-07-12T11:00:05.532" v="1" actId="2696"/>
+        <pc:sldMasterMkLst>
+          <pc:docMk/>
+          <pc:sldMasterMk cId="0" sldId="2147483648"/>
+        </pc:sldMasterMkLst>
+        <pc:sldLayoutChg chg="add del">
+          <pc:chgData name="Sekhar Sekharan" userId="518baa86-29dc-48c7-8fb2-d35a916cb510" providerId="ADAL" clId="{AEBB8E91-64A1-4D9B-AA4C-D40DB5207DB8}" dt="2026-07-12T11:00:05.532" v="1" actId="2696"/>
+          <pc:sldLayoutMkLst>
+            <pc:docMk/>
+            <pc:sldMasterMk cId="0" sldId="2147483648"/>
+            <pc:sldLayoutMk cId="3601848711" sldId="2147483665"/>
+          </pc:sldLayoutMkLst>
+        </pc:sldLayoutChg>
+      </pc:sldMasterChg>
+    </pc:docChg>
+  </pc:docChgLst>
+  <pc:docChgLst>
+    <pc:chgData name="Sudarshan Sivaramakrishnan" userId="S::ssivaram@mathworks.com::de70194d-fdbd-489d-817c-0c0648753bc1" providerId="AD" clId="Web-{0304AEF8-201C-8E1C-4657-E4205BD58110}"/>
+    <pc:docChg chg="addSld delSld modSld modSection">
+      <pc:chgData name="Sudarshan Sivaramakrishnan" userId="S::ssivaram@mathworks.com::de70194d-fdbd-489d-817c-0c0648753bc1" providerId="AD" clId="Web-{0304AEF8-201C-8E1C-4657-E4205BD58110}" dt="2026-07-10T13:40:45.924" v="536"/>
+      <pc:docMkLst>
+        <pc:docMk/>
+      </pc:docMkLst>
+      <pc:sldChg chg="addSp delSp modSp">
+        <pc:chgData name="Sudarshan Sivaramakrishnan" userId="S::ssivaram@mathworks.com::de70194d-fdbd-489d-817c-0c0648753bc1" providerId="AD" clId="Web-{0304AEF8-201C-8E1C-4657-E4205BD58110}" dt="2026-07-10T13:32:18.231" v="520" actId="1076"/>
+        <pc:sldMkLst>
+          <pc:docMk/>
+          <pc:sldMk cId="2895114059" sldId="2147479330"/>
+        </pc:sldMkLst>
+        <pc:spChg chg="mod">
+          <ac:chgData name="Sudarshan Sivaramakrishnan" userId="S::ssivaram@mathworks.com::de70194d-fdbd-489d-817c-0c0648753bc1" providerId="AD" clId="Web-{0304AEF8-201C-8E1C-4657-E4205BD58110}" dt="2026-07-10T13:21:04.667" v="388" actId="1076"/>
+          <ac:spMkLst>
+            <pc:docMk/>
+            <pc:sldMk cId="2895114059" sldId="2147479330"/>
+            <ac:spMk id="16" creationId="{B2074BE4-58A6-E9A4-28DE-018F01E4C0B4}"/>
+          </ac:spMkLst>
+        </pc:spChg>
+        <pc:spChg chg="mod">
+          <ac:chgData name="Sudarshan Sivaramakrishnan" userId="S::ssivaram@mathworks.com::de70194d-fdbd-489d-817c-0c0648753bc1" providerId="AD" clId="Web-{0304AEF8-201C-8E1C-4657-E4205BD58110}" dt="2026-07-10T13:22:14.688" v="403" actId="1076"/>
+          <ac:spMkLst>
+            <pc:docMk/>
+            <pc:sldMk cId="2895114059" sldId="2147479330"/>
+            <ac:spMk id="18" creationId="{E142F0A7-A006-A284-6641-18B61562B3CE}"/>
+          </ac:spMkLst>
+        </pc:spChg>
+        <pc:spChg chg="mod">
+          <ac:chgData name="Sudarshan Sivaramakrishnan" userId="S::ssivaram@mathworks.com::de70194d-fdbd-489d-817c-0c0648753bc1" providerId="AD" clId="Web-{0304AEF8-201C-8E1C-4657-E4205BD58110}" dt="2026-07-10T13:22:40.518" v="409" actId="1076"/>
+          <ac:spMkLst>
+            <pc:docMk/>
+            <pc:sldMk cId="2895114059" sldId="2147479330"/>
+            <ac:spMk id="20" creationId="{FE0F5FAD-27EE-5CB3-C9B9-C215F31D334A}"/>
+          </ac:spMkLst>
+        </pc:spChg>
+        <pc:spChg chg="mod">
+          <ac:chgData name="Sudarshan Sivaramakrishnan" userId="S::ssivaram@mathworks.com::de70194d-fdbd-489d-817c-0c0648753bc1" providerId="AD" clId="Web-{0304AEF8-201C-8E1C-4657-E4205BD58110}" dt="2026-07-10T13:09:28.149" v="323" actId="1076"/>
+          <ac:spMkLst>
+            <pc:docMk/>
+            <pc:sldMk cId="2895114059" sldId="2147479330"/>
+            <ac:spMk id="22" creationId="{C32DCAA1-3D1B-18FD-D8CB-F10699AD8A62}"/>
+          </ac:spMkLst>
+        </pc:spChg>
+        <pc:picChg chg="add mod">
+          <ac:chgData name="Sudarshan Sivaramakrishnan" userId="S::ssivaram@mathworks.com::de70194d-fdbd-489d-817c-0c0648753bc1" providerId="AD" clId="Web-{0304AEF8-201C-8E1C-4657-E4205BD58110}" dt="2026-07-10T13:27:11.647" v="436" actId="14100"/>
+          <ac:picMkLst>
+            <pc:docMk/>
+            <pc:sldMk cId="2895114059" sldId="2147479330"/>
+            <ac:picMk id="5" creationId="{3B57E0A3-C37F-3BAB-649B-3E3CC4BD4803}"/>
+          </ac:picMkLst>
+        </pc:picChg>
+        <pc:picChg chg="add mod">
+          <ac:chgData name="Sudarshan Sivaramakrishnan" userId="S::ssivaram@mathworks.com::de70194d-fdbd-489d-817c-0c0648753bc1" providerId="AD" clId="Web-{0304AEF8-201C-8E1C-4657-E4205BD58110}" dt="2026-07-10T13:27:11.663" v="437" actId="14100"/>
+          <ac:picMkLst>
+            <pc:docMk/>
+            <pc:sldMk cId="2895114059" sldId="2147479330"/>
+            <ac:picMk id="7" creationId="{A39A8599-E9DD-ABA1-EAF8-522085A63B75}"/>
+          </ac:picMkLst>
+        </pc:picChg>
+        <pc:picChg chg="add mod ord">
+          <ac:chgData name="Sudarshan Sivaramakrishnan" userId="S::ssivaram@mathworks.com::de70194d-fdbd-489d-817c-0c0648753bc1" providerId="AD" clId="Web-{0304AEF8-201C-8E1C-4657-E4205BD58110}" dt="2026-07-10T13:32:18.231" v="520" actId="1076"/>
+          <ac:picMkLst>
+            <pc:docMk/>
+            <pc:sldMk cId="2895114059" sldId="2147479330"/>
+            <ac:picMk id="11" creationId="{FF81D380-4F1D-2E00-A5F3-9D977B24EA17}"/>
+          </ac:picMkLst>
+        </pc:picChg>
+      </pc:sldChg>
+      <pc:sldChg chg="modSp">
+        <pc:chgData name="Sudarshan Sivaramakrishnan" userId="S::ssivaram@mathworks.com::de70194d-fdbd-489d-817c-0c0648753bc1" providerId="AD" clId="Web-{0304AEF8-201C-8E1C-4657-E4205BD58110}" dt="2026-07-10T13:40:30.344" v="533" actId="20577"/>
+        <pc:sldMkLst>
+          <pc:docMk/>
+          <pc:sldMk cId="3477293349" sldId="2147479333"/>
+        </pc:sldMkLst>
+        <pc:spChg chg="mod">
+          <ac:chgData name="Sudarshan Sivaramakrishnan" userId="S::ssivaram@mathworks.com::de70194d-fdbd-489d-817c-0c0648753bc1" providerId="AD" clId="Web-{0304AEF8-201C-8E1C-4657-E4205BD58110}" dt="2026-07-10T13:40:30.344" v="533" actId="20577"/>
+          <ac:spMkLst>
+            <pc:docMk/>
+            <pc:sldMk cId="3477293349" sldId="2147479333"/>
+            <ac:spMk id="2" creationId="{E455A333-2A12-B055-047F-85341A77A507}"/>
+          </ac:spMkLst>
+        </pc:spChg>
+        <pc:spChg chg="mod">
+          <ac:chgData name="Sudarshan Sivaramakrishnan" userId="S::ssivaram@mathworks.com::de70194d-fdbd-489d-817c-0c0648753bc1" providerId="AD" clId="Web-{0304AEF8-201C-8E1C-4657-E4205BD58110}" dt="2026-07-10T13:08:24.582" v="303" actId="20577"/>
+          <ac:spMkLst>
+            <pc:docMk/>
+            <pc:sldMk cId="3477293349" sldId="2147479333"/>
+            <ac:spMk id="13" creationId="{D092BF27-E6D9-E662-F7F8-F4C3854EED3C}"/>
+          </ac:spMkLst>
+        </pc:spChg>
+      </pc:sldChg>
+      <pc:sldChg chg="addSp delSp modSp">
+        <pc:chgData name="Sudarshan Sivaramakrishnan" userId="S::ssivaram@mathworks.com::de70194d-fdbd-489d-817c-0c0648753bc1" providerId="AD" clId="Web-{0304AEF8-201C-8E1C-4657-E4205BD58110}" dt="2026-07-10T13:32:14.262" v="519" actId="1076"/>
+        <pc:sldMkLst>
+          <pc:docMk/>
+          <pc:sldMk cId="1186657303" sldId="2147479340"/>
+        </pc:sldMkLst>
+        <pc:spChg chg="add mod ord">
+          <ac:chgData name="Sudarshan Sivaramakrishnan" userId="S::ssivaram@mathworks.com::de70194d-fdbd-489d-817c-0c0648753bc1" providerId="AD" clId="Web-{0304AEF8-201C-8E1C-4657-E4205BD58110}" dt="2026-07-10T13:31:58.371" v="517" actId="20577"/>
+          <ac:spMkLst>
+            <pc:docMk/>
+            <pc:sldMk cId="1186657303" sldId="2147479340"/>
+            <ac:spMk id="4" creationId="{B99616A8-FA27-D323-5131-6655EA093AF0}"/>
+          </ac:spMkLst>
+        </pc:spChg>
+        <pc:spChg chg="ord">
+          <ac:chgData name="Sudarshan Sivaramakrishnan" userId="S::ssivaram@mathworks.com::de70194d-fdbd-489d-817c-0c0648753bc1" providerId="AD" clId="Web-{0304AEF8-201C-8E1C-4657-E4205BD58110}" dt="2026-07-10T13:30:05.722" v="497"/>
+          <ac:spMkLst>
+            <pc:docMk/>
+            <pc:sldMk cId="1186657303" sldId="2147479340"/>
+            <ac:spMk id="7" creationId="{BD98A121-9CC7-9AF4-35FD-E6E964789175}"/>
+          </ac:spMkLst>
+        </pc:spChg>
+        <pc:spChg chg="mod">
+          <ac:chgData name="Sudarshan Sivaramakrishnan" userId="S::ssivaram@mathworks.com::de70194d-fdbd-489d-817c-0c0648753bc1" providerId="AD" clId="Web-{0304AEF8-201C-8E1C-4657-E4205BD58110}" dt="2026-07-10T13:09:38.290" v="329" actId="1076"/>
+          <ac:spMkLst>
+            <pc:docMk/>
+            <pc:sldMk cId="1186657303" sldId="2147479340"/>
+            <ac:spMk id="8" creationId="{48C11938-D1F8-97EE-4EF4-8397001A4FD4}"/>
+          </ac:spMkLst>
+        </pc:spChg>
+        <pc:spChg chg="add del ord">
+          <ac:chgData name="Sudarshan Sivaramakrishnan" userId="S::ssivaram@mathworks.com::de70194d-fdbd-489d-817c-0c0648753bc1" providerId="AD" clId="Web-{0304AEF8-201C-8E1C-4657-E4205BD58110}" dt="2026-07-10T13:30:09.332" v="500"/>
+          <ac:spMkLst>
+            <pc:docMk/>
+            <pc:sldMk cId="1186657303" sldId="2147479340"/>
+            <ac:spMk id="16" creationId="{669411D8-746A-42C6-19AA-FE4996482030}"/>
+          </ac:spMkLst>
+        </pc:spChg>
+        <pc:spChg chg="add del ord">
+          <ac:chgData name="Sudarshan Sivaramakrishnan" userId="S::ssivaram@mathworks.com::de70194d-fdbd-489d-817c-0c0648753bc1" providerId="AD" clId="Web-{0304AEF8-201C-8E1C-4657-E4205BD58110}" dt="2026-07-10T13:30:10.066" v="501"/>
+          <ac:spMkLst>
+            <pc:docMk/>
+            <pc:sldMk cId="1186657303" sldId="2147479340"/>
+            <ac:spMk id="18" creationId="{27905C1F-9245-84F1-51F7-2D407701AB95}"/>
+          </ac:spMkLst>
+        </pc:spChg>
+        <pc:spChg chg="add del mod ord">
+          <ac:chgData name="Sudarshan Sivaramakrishnan" userId="S::ssivaram@mathworks.com::de70194d-fdbd-489d-817c-0c0648753bc1" providerId="AD" clId="Web-{0304AEF8-201C-8E1C-4657-E4205BD58110}" dt="2026-07-10T13:30:10.832" v="502"/>
+          <ac:spMkLst>
+            <pc:docMk/>
+            <pc:sldMk cId="1186657303" sldId="2147479340"/>
+            <ac:spMk id="20" creationId="{1EE059F9-3C71-DF9D-3A03-2F87BEE0615C}"/>
+          </ac:spMkLst>
+        </pc:spChg>
+        <pc:picChg chg="add mod ord">
+          <ac:chgData name="Sudarshan Sivaramakrishnan" userId="S::ssivaram@mathworks.com::de70194d-fdbd-489d-817c-0c0648753bc1" providerId="AD" clId="Web-{0304AEF8-201C-8E1C-4657-E4205BD58110}" dt="2026-07-10T13:32:14.262" v="519" actId="1076"/>
+          <ac:picMkLst>
+            <pc:docMk/>
+            <pc:sldMk cId="1186657303" sldId="2147479340"/>
+            <ac:picMk id="13" creationId="{931C8F71-9D9C-27F7-72D9-B51528CA07D8}"/>
+          </ac:picMkLst>
+        </pc:picChg>
+        <pc:picChg chg="add del">
+          <ac:chgData name="Sudarshan Sivaramakrishnan" userId="S::ssivaram@mathworks.com::de70194d-fdbd-489d-817c-0c0648753bc1" providerId="AD" clId="Web-{0304AEF8-201C-8E1C-4657-E4205BD58110}" dt="2026-07-10T13:29:53.221" v="495"/>
+          <ac:picMkLst>
+            <pc:docMk/>
+            <pc:sldMk cId="1186657303" sldId="2147479340"/>
+            <ac:picMk id="22" creationId="{269E8223-5A94-3651-7BBA-677439F097B1}"/>
+          </ac:picMkLst>
+        </pc:picChg>
+        <pc:picChg chg="add del">
+          <ac:chgData name="Sudarshan Sivaramakrishnan" userId="S::ssivaram@mathworks.com::de70194d-fdbd-489d-817c-0c0648753bc1" providerId="AD" clId="Web-{0304AEF8-201C-8E1C-4657-E4205BD58110}" dt="2026-07-10T13:29:53.221" v="496"/>
+          <ac:picMkLst>
+            <pc:docMk/>
+            <pc:sldMk cId="1186657303" sldId="2147479340"/>
+            <ac:picMk id="24" creationId="{39348A88-FA58-E979-5681-2C379291573E}"/>
+          </ac:picMkLst>
+        </pc:picChg>
+      </pc:sldChg>
+    </pc:docChg>
+  </pc:docChgLst>
+  <pc:docChgLst>
     <pc:chgData name="Sudarshan Sivaramakrishnan" userId="S::ssivaram@mathworks.com::de70194d-fdbd-489d-817c-0c0648753bc1" providerId="AD" clId="Web-{77E0C31D-0C18-1930-84F7-3703432895A2}"/>
     <pc:docChg chg="addSld delSld modSld modSection">
       <pc:chgData name="Sudarshan Sivaramakrishnan" userId="S::ssivaram@mathworks.com::de70194d-fdbd-489d-817c-0c0648753bc1" providerId="AD" clId="Web-{77E0C31D-0C18-1930-84F7-3703432895A2}" dt="2026-07-10T21:46:48.746" v="124" actId="20577"/>
       <pc:docMkLst>
         <pc:docMk/>
       </pc:docMkLst>
-      <pc:sldChg chg="addSp delSp modSp">
-        <pc:chgData name="Sudarshan Sivaramakrishnan" userId="S::ssivaram@mathworks.com::de70194d-fdbd-489d-817c-0c0648753bc1" providerId="AD" clId="Web-{77E0C31D-0C18-1930-84F7-3703432895A2}" dt="2026-07-10T21:29:22.490" v="111" actId="1076"/>
-        <pc:sldMkLst>
-          <pc:docMk/>
-          <pc:sldMk cId="4143862939" sldId="1347"/>
-        </pc:sldMkLst>
-        <pc:spChg chg="mod">
-          <ac:chgData name="Sudarshan Sivaramakrishnan" userId="S::ssivaram@mathworks.com::de70194d-fdbd-489d-817c-0c0648753bc1" providerId="AD" clId="Web-{77E0C31D-0C18-1930-84F7-3703432895A2}" dt="2026-07-10T21:28:23.753" v="85" actId="20577"/>
-          <ac:spMkLst>
-            <pc:docMk/>
-            <pc:sldMk cId="4143862939" sldId="1347"/>
-            <ac:spMk id="64" creationId="{56F79708-3A54-5B46-89C1-DA221468F30F}"/>
-          </ac:spMkLst>
-        </pc:spChg>
-        <pc:picChg chg="add del mod">
-          <ac:chgData name="Sudarshan Sivaramakrishnan" userId="S::ssivaram@mathworks.com::de70194d-fdbd-489d-817c-0c0648753bc1" providerId="AD" clId="Web-{77E0C31D-0C18-1930-84F7-3703432895A2}" dt="2026-07-10T21:29:22.490" v="111" actId="1076"/>
-          <ac:picMkLst>
-            <pc:docMk/>
-            <pc:sldMk cId="4143862939" sldId="1347"/>
-            <ac:picMk id="6" creationId="{B2988EDF-F83B-1E5D-2AE6-4701A01553DE}"/>
-          </ac:picMkLst>
-        </pc:picChg>
-        <pc:picChg chg="add del">
-          <ac:chgData name="Sudarshan Sivaramakrishnan" userId="S::ssivaram@mathworks.com::de70194d-fdbd-489d-817c-0c0648753bc1" providerId="AD" clId="Web-{77E0C31D-0C18-1930-84F7-3703432895A2}" dt="2026-07-10T21:29:05.692" v="103"/>
-          <ac:picMkLst>
-            <pc:docMk/>
-            <pc:sldMk cId="4143862939" sldId="1347"/>
-            <ac:picMk id="25" creationId="{869FFC2A-611A-3695-8BE2-80A4C02DA26C}"/>
-          </ac:picMkLst>
-        </pc:picChg>
-      </pc:sldChg>
-      <pc:sldChg chg="modSp">
-        <pc:chgData name="Sudarshan Sivaramakrishnan" userId="S::ssivaram@mathworks.com::de70194d-fdbd-489d-817c-0c0648753bc1" providerId="AD" clId="Web-{77E0C31D-0C18-1930-84F7-3703432895A2}" dt="2026-07-10T21:26:11.670" v="77" actId="20577"/>
-        <pc:sldMkLst>
-          <pc:docMk/>
-          <pc:sldMk cId="2695534885" sldId="2147479341"/>
-        </pc:sldMkLst>
-        <pc:spChg chg="mod">
-          <ac:chgData name="Sudarshan Sivaramakrishnan" userId="S::ssivaram@mathworks.com::de70194d-fdbd-489d-817c-0c0648753bc1" providerId="AD" clId="Web-{77E0C31D-0C18-1930-84F7-3703432895A2}" dt="2026-07-10T21:26:11.670" v="77" actId="20577"/>
-          <ac:spMkLst>
-            <pc:docMk/>
-            <pc:sldMk cId="2695534885" sldId="2147479341"/>
-            <ac:spMk id="2" creationId="{BF1E7ACC-47AC-24FE-65FD-314A1FCD5CCB}"/>
-          </ac:spMkLst>
-        </pc:spChg>
-      </pc:sldChg>
       <pc:sldChg chg="addSp delSp modSp add del replId">
         <pc:chgData name="Sudarshan Sivaramakrishnan" userId="S::ssivaram@mathworks.com::de70194d-fdbd-489d-817c-0c0648753bc1" providerId="AD" clId="Web-{77E0C31D-0C18-1930-84F7-3703432895A2}" dt="2026-07-10T21:29:14.833" v="108" actId="1076"/>
         <pc:sldMkLst>
@@ -262,14 +760,6 @@
             <ac:spMk id="64" creationId="{1C84F14F-1D05-5B1B-47CE-30CFA91987FB}"/>
           </ac:spMkLst>
         </pc:spChg>
-        <pc:picChg chg="add del mod modCrop">
-          <ac:chgData name="Sudarshan Sivaramakrishnan" userId="S::ssivaram@mathworks.com::de70194d-fdbd-489d-817c-0c0648753bc1" providerId="AD" clId="Web-{77E0C31D-0C18-1930-84F7-3703432895A2}" dt="2026-07-10T21:29:01.051" v="100"/>
-          <ac:picMkLst>
-            <pc:docMk/>
-            <pc:sldMk cId="3426075837" sldId="2147479342"/>
-            <ac:picMk id="2" creationId="{BD38284C-24DC-6F85-7363-B9A279ED973D}"/>
-          </ac:picMkLst>
-        </pc:picChg>
         <pc:picChg chg="add mod modCrop">
           <ac:chgData name="Sudarshan Sivaramakrishnan" userId="S::ssivaram@mathworks.com::de70194d-fdbd-489d-817c-0c0648753bc1" providerId="AD" clId="Web-{77E0C31D-0C18-1930-84F7-3703432895A2}" dt="2026-07-10T21:29:14.833" v="108" actId="1076"/>
           <ac:picMkLst>
@@ -278,37 +768,6 @@
             <ac:picMk id="5" creationId="{176B3799-0CEC-D9A5-BA26-116F4D0A4544}"/>
           </ac:picMkLst>
         </pc:picChg>
-        <pc:picChg chg="del mod">
-          <ac:chgData name="Sudarshan Sivaramakrishnan" userId="S::ssivaram@mathworks.com::de70194d-fdbd-489d-817c-0c0648753bc1" providerId="AD" clId="Web-{77E0C31D-0C18-1930-84F7-3703432895A2}" dt="2026-07-10T21:28:50.285" v="92"/>
-          <ac:picMkLst>
-            <pc:docMk/>
-            <pc:sldMk cId="3426075837" sldId="2147479342"/>
-            <ac:picMk id="6" creationId="{0594374E-00FF-CDE4-AD0F-FDF9931E9451}"/>
-          </ac:picMkLst>
-        </pc:picChg>
-        <pc:picChg chg="del">
-          <ac:chgData name="Sudarshan Sivaramakrishnan" userId="S::ssivaram@mathworks.com::de70194d-fdbd-489d-817c-0c0648753bc1" providerId="AD" clId="Web-{77E0C31D-0C18-1930-84F7-3703432895A2}" dt="2026-07-10T21:28:38.832" v="89"/>
-          <ac:picMkLst>
-            <pc:docMk/>
-            <pc:sldMk cId="3426075837" sldId="2147479342"/>
-            <ac:picMk id="25" creationId="{B9A8D451-6866-5BC0-23C1-DB660EDBB2F1}"/>
-          </ac:picMkLst>
-        </pc:picChg>
-      </pc:sldChg>
-      <pc:sldChg chg="modSp new">
-        <pc:chgData name="Sudarshan Sivaramakrishnan" userId="S::ssivaram@mathworks.com::de70194d-fdbd-489d-817c-0c0648753bc1" providerId="AD" clId="Web-{77E0C31D-0C18-1930-84F7-3703432895A2}" dt="2026-07-10T21:46:48.746" v="124" actId="20577"/>
-        <pc:sldMkLst>
-          <pc:docMk/>
-          <pc:sldMk cId="1455500157" sldId="2147479343"/>
-        </pc:sldMkLst>
-        <pc:spChg chg="mod">
-          <ac:chgData name="Sudarshan Sivaramakrishnan" userId="S::ssivaram@mathworks.com::de70194d-fdbd-489d-817c-0c0648753bc1" providerId="AD" clId="Web-{77E0C31D-0C18-1930-84F7-3703432895A2}" dt="2026-07-10T21:46:48.746" v="124" actId="20577"/>
-          <ac:spMkLst>
-            <pc:docMk/>
-            <pc:sldMk cId="1455500157" sldId="2147479343"/>
-            <ac:spMk id="2" creationId="{880F8E95-FC92-C865-9D90-9D3570C5CB7A}"/>
-          </ac:spMkLst>
-        </pc:spChg>
       </pc:sldChg>
     </pc:docChg>
   </pc:docChgLst>
@@ -409,540 +868,6 @@
       </pc:sldChg>
     </pc:docChg>
   </pc:docChgLst>
-  <pc:docChgLst>
-    <pc:chgData name="Sudarshan Sivaramakrishnan" userId="S::ssivaram@mathworks.com::de70194d-fdbd-489d-817c-0c0648753bc1" providerId="AD" clId="Web-{0304AEF8-201C-8E1C-4657-E4205BD58110}"/>
-    <pc:docChg chg="addSld delSld modSld modSection">
-      <pc:chgData name="Sudarshan Sivaramakrishnan" userId="S::ssivaram@mathworks.com::de70194d-fdbd-489d-817c-0c0648753bc1" providerId="AD" clId="Web-{0304AEF8-201C-8E1C-4657-E4205BD58110}" dt="2026-07-10T13:40:45.924" v="536"/>
-      <pc:docMkLst>
-        <pc:docMk/>
-      </pc:docMkLst>
-      <pc:sldChg chg="addSp delSp modSp">
-        <pc:chgData name="Sudarshan Sivaramakrishnan" userId="S::ssivaram@mathworks.com::de70194d-fdbd-489d-817c-0c0648753bc1" providerId="AD" clId="Web-{0304AEF8-201C-8E1C-4657-E4205BD58110}" dt="2026-07-10T13:16:13.881" v="366" actId="20577"/>
-        <pc:sldMkLst>
-          <pc:docMk/>
-          <pc:sldMk cId="4143862939" sldId="1347"/>
-        </pc:sldMkLst>
-        <pc:spChg chg="add del mod">
-          <ac:chgData name="Sudarshan Sivaramakrishnan" userId="S::ssivaram@mathworks.com::de70194d-fdbd-489d-817c-0c0648753bc1" providerId="AD" clId="Web-{0304AEF8-201C-8E1C-4657-E4205BD58110}" dt="2026-07-10T12:13:05.534" v="69"/>
-          <ac:spMkLst>
-            <pc:docMk/>
-            <pc:sldMk cId="4143862939" sldId="1347"/>
-            <ac:spMk id="2" creationId="{4D7BB9C3-951B-1BAB-8005-FFDF3133B5CC}"/>
-          </ac:spMkLst>
-        </pc:spChg>
-        <pc:spChg chg="mod">
-          <ac:chgData name="Sudarshan Sivaramakrishnan" userId="S::ssivaram@mathworks.com::de70194d-fdbd-489d-817c-0c0648753bc1" providerId="AD" clId="Web-{0304AEF8-201C-8E1C-4657-E4205BD58110}" dt="2026-07-10T13:16:13.881" v="366" actId="20577"/>
-          <ac:spMkLst>
-            <pc:docMk/>
-            <pc:sldMk cId="4143862939" sldId="1347"/>
-            <ac:spMk id="64" creationId="{56F79708-3A54-5B46-89C1-DA221468F30F}"/>
-          </ac:spMkLst>
-        </pc:spChg>
-        <pc:picChg chg="add del mod">
-          <ac:chgData name="Sudarshan Sivaramakrishnan" userId="S::ssivaram@mathworks.com::de70194d-fdbd-489d-817c-0c0648753bc1" providerId="AD" clId="Web-{0304AEF8-201C-8E1C-4657-E4205BD58110}" dt="2026-07-10T12:47:30.149" v="114"/>
-          <ac:picMkLst>
-            <pc:docMk/>
-            <pc:sldMk cId="4143862939" sldId="1347"/>
-            <ac:picMk id="5" creationId="{A150C0B1-A7B3-B852-4952-53F553FBA55C}"/>
-          </ac:picMkLst>
-        </pc:picChg>
-        <pc:picChg chg="add mod">
-          <ac:chgData name="Sudarshan Sivaramakrishnan" userId="S::ssivaram@mathworks.com::de70194d-fdbd-489d-817c-0c0648753bc1" providerId="AD" clId="Web-{0304AEF8-201C-8E1C-4657-E4205BD58110}" dt="2026-07-10T13:14:00.825" v="356" actId="1076"/>
-          <ac:picMkLst>
-            <pc:docMk/>
-            <pc:sldMk cId="4143862939" sldId="1347"/>
-            <ac:picMk id="6" creationId="{B2988EDF-F83B-1E5D-2AE6-4701A01553DE}"/>
-          </ac:picMkLst>
-        </pc:picChg>
-        <pc:picChg chg="mod">
-          <ac:chgData name="Sudarshan Sivaramakrishnan" userId="S::ssivaram@mathworks.com::de70194d-fdbd-489d-817c-0c0648753bc1" providerId="AD" clId="Web-{0304AEF8-201C-8E1C-4657-E4205BD58110}" dt="2026-07-10T13:14:21.326" v="359" actId="1076"/>
-          <ac:picMkLst>
-            <pc:docMk/>
-            <pc:sldMk cId="4143862939" sldId="1347"/>
-            <ac:picMk id="25" creationId="{869FFC2A-611A-3695-8BE2-80A4C02DA26C}"/>
-          </ac:picMkLst>
-        </pc:picChg>
-      </pc:sldChg>
-      <pc:sldChg chg="modAnim">
-        <pc:chgData name="Sudarshan Sivaramakrishnan" userId="S::ssivaram@mathworks.com::de70194d-fdbd-489d-817c-0c0648753bc1" providerId="AD" clId="Web-{0304AEF8-201C-8E1C-4657-E4205BD58110}" dt="2026-07-10T13:34:06.114" v="524"/>
-        <pc:sldMkLst>
-          <pc:docMk/>
-          <pc:sldMk cId="2820808393" sldId="2145706540"/>
-        </pc:sldMkLst>
-      </pc:sldChg>
-      <pc:sldChg chg="addSp modSp addAnim modAnim">
-        <pc:chgData name="Sudarshan Sivaramakrishnan" userId="S::ssivaram@mathworks.com::de70194d-fdbd-489d-817c-0c0648753bc1" providerId="AD" clId="Web-{0304AEF8-201C-8E1C-4657-E4205BD58110}" dt="2026-07-10T13:17:41.606" v="371" actId="1076"/>
-        <pc:sldMkLst>
-          <pc:docMk/>
-          <pc:sldMk cId="137036860" sldId="2147479268"/>
-        </pc:sldMkLst>
-        <pc:spChg chg="mod">
-          <ac:chgData name="Sudarshan Sivaramakrishnan" userId="S::ssivaram@mathworks.com::de70194d-fdbd-489d-817c-0c0648753bc1" providerId="AD" clId="Web-{0304AEF8-201C-8E1C-4657-E4205BD58110}" dt="2026-07-10T13:17:10.072" v="368" actId="20577"/>
-          <ac:spMkLst>
-            <pc:docMk/>
-            <pc:sldMk cId="137036860" sldId="2147479268"/>
-            <ac:spMk id="3" creationId="{65B72D9A-A79C-6873-6424-0C1878695376}"/>
-          </ac:spMkLst>
-        </pc:spChg>
-        <pc:spChg chg="mod ord">
-          <ac:chgData name="Sudarshan Sivaramakrishnan" userId="S::ssivaram@mathworks.com::de70194d-fdbd-489d-817c-0c0648753bc1" providerId="AD" clId="Web-{0304AEF8-201C-8E1C-4657-E4205BD58110}" dt="2026-07-10T13:17:41.606" v="371" actId="1076"/>
-          <ac:spMkLst>
-            <pc:docMk/>
-            <pc:sldMk cId="137036860" sldId="2147479268"/>
-            <ac:spMk id="4" creationId="{71C906E8-374A-8028-0C01-2BCADE31D9EC}"/>
-          </ac:spMkLst>
-        </pc:spChg>
-        <pc:spChg chg="mod">
-          <ac:chgData name="Sudarshan Sivaramakrishnan" userId="S::ssivaram@mathworks.com::de70194d-fdbd-489d-817c-0c0648753bc1" providerId="AD" clId="Web-{0304AEF8-201C-8E1C-4657-E4205BD58110}" dt="2026-07-10T12:59:07.699" v="243" actId="14100"/>
-          <ac:spMkLst>
-            <pc:docMk/>
-            <pc:sldMk cId="137036860" sldId="2147479268"/>
-            <ac:spMk id="14" creationId="{E1680105-013C-7245-156F-547E28DD55BF}"/>
-          </ac:spMkLst>
-        </pc:spChg>
-        <pc:picChg chg="add mod ord modCrop">
-          <ac:chgData name="Sudarshan Sivaramakrishnan" userId="S::ssivaram@mathworks.com::de70194d-fdbd-489d-817c-0c0648753bc1" providerId="AD" clId="Web-{0304AEF8-201C-8E1C-4657-E4205BD58110}" dt="2026-07-10T12:59:19.590" v="246" actId="1076"/>
-          <ac:picMkLst>
-            <pc:docMk/>
-            <pc:sldMk cId="137036860" sldId="2147479268"/>
-            <ac:picMk id="6" creationId="{709F79DD-55F3-C53B-983F-3A95F7BEBF0D}"/>
-          </ac:picMkLst>
-        </pc:picChg>
-        <pc:picChg chg="mod">
-          <ac:chgData name="Sudarshan Sivaramakrishnan" userId="S::ssivaram@mathworks.com::de70194d-fdbd-489d-817c-0c0648753bc1" providerId="AD" clId="Web-{0304AEF8-201C-8E1C-4657-E4205BD58110}" dt="2026-07-10T12:53:27.581" v="220" actId="1076"/>
-          <ac:picMkLst>
-            <pc:docMk/>
-            <pc:sldMk cId="137036860" sldId="2147479268"/>
-            <ac:picMk id="11" creationId="{51F2A695-B646-1B93-239F-CDE9F79F1FBC}"/>
-          </ac:picMkLst>
-        </pc:picChg>
-        <pc:picChg chg="mod ord">
-          <ac:chgData name="Sudarshan Sivaramakrishnan" userId="S::ssivaram@mathworks.com::de70194d-fdbd-489d-817c-0c0648753bc1" providerId="AD" clId="Web-{0304AEF8-201C-8E1C-4657-E4205BD58110}" dt="2026-07-10T13:02:36.635" v="265" actId="1076"/>
-          <ac:picMkLst>
-            <pc:docMk/>
-            <pc:sldMk cId="137036860" sldId="2147479268"/>
-            <ac:picMk id="16" creationId="{129ECE12-3944-F0CE-E735-1192F2B31027}"/>
-          </ac:picMkLst>
-        </pc:picChg>
-        <pc:picChg chg="mod">
-          <ac:chgData name="Sudarshan Sivaramakrishnan" userId="S::ssivaram@mathworks.com::de70194d-fdbd-489d-817c-0c0648753bc1" providerId="AD" clId="Web-{0304AEF8-201C-8E1C-4657-E4205BD58110}" dt="2026-07-10T13:04:45.676" v="280" actId="1076"/>
-          <ac:picMkLst>
-            <pc:docMk/>
-            <pc:sldMk cId="137036860" sldId="2147479268"/>
-            <ac:picMk id="20" creationId="{3B0EDB34-7941-AC63-45FC-E82A67A4E18B}"/>
-          </ac:picMkLst>
-        </pc:picChg>
-      </pc:sldChg>
-      <pc:sldChg chg="modSp">
-        <pc:chgData name="Sudarshan Sivaramakrishnan" userId="S::ssivaram@mathworks.com::de70194d-fdbd-489d-817c-0c0648753bc1" providerId="AD" clId="Web-{0304AEF8-201C-8E1C-4657-E4205BD58110}" dt="2026-07-10T13:15:30.550" v="362" actId="1076"/>
-        <pc:sldMkLst>
-          <pc:docMk/>
-          <pc:sldMk cId="3917329948" sldId="2147479325"/>
-        </pc:sldMkLst>
-        <pc:picChg chg="mod">
-          <ac:chgData name="Sudarshan Sivaramakrishnan" userId="S::ssivaram@mathworks.com::de70194d-fdbd-489d-817c-0c0648753bc1" providerId="AD" clId="Web-{0304AEF8-201C-8E1C-4657-E4205BD58110}" dt="2026-07-10T13:15:30.550" v="362" actId="1076"/>
-          <ac:picMkLst>
-            <pc:docMk/>
-            <pc:sldMk cId="3917329948" sldId="2147479325"/>
-            <ac:picMk id="5" creationId="{E16D1363-DA9A-2BA2-0E08-1B4315025530}"/>
-          </ac:picMkLst>
-        </pc:picChg>
-      </pc:sldChg>
-      <pc:sldChg chg="addSp delSp modSp">
-        <pc:chgData name="Sudarshan Sivaramakrishnan" userId="S::ssivaram@mathworks.com::de70194d-fdbd-489d-817c-0c0648753bc1" providerId="AD" clId="Web-{0304AEF8-201C-8E1C-4657-E4205BD58110}" dt="2026-07-10T13:32:18.231" v="520" actId="1076"/>
-        <pc:sldMkLst>
-          <pc:docMk/>
-          <pc:sldMk cId="2895114059" sldId="2147479330"/>
-        </pc:sldMkLst>
-        <pc:spChg chg="mod">
-          <ac:chgData name="Sudarshan Sivaramakrishnan" userId="S::ssivaram@mathworks.com::de70194d-fdbd-489d-817c-0c0648753bc1" providerId="AD" clId="Web-{0304AEF8-201C-8E1C-4657-E4205BD58110}" dt="2026-07-10T13:21:04.667" v="388" actId="1076"/>
-          <ac:spMkLst>
-            <pc:docMk/>
-            <pc:sldMk cId="2895114059" sldId="2147479330"/>
-            <ac:spMk id="16" creationId="{B2074BE4-58A6-E9A4-28DE-018F01E4C0B4}"/>
-          </ac:spMkLst>
-        </pc:spChg>
-        <pc:spChg chg="mod">
-          <ac:chgData name="Sudarshan Sivaramakrishnan" userId="S::ssivaram@mathworks.com::de70194d-fdbd-489d-817c-0c0648753bc1" providerId="AD" clId="Web-{0304AEF8-201C-8E1C-4657-E4205BD58110}" dt="2026-07-10T13:22:14.688" v="403" actId="1076"/>
-          <ac:spMkLst>
-            <pc:docMk/>
-            <pc:sldMk cId="2895114059" sldId="2147479330"/>
-            <ac:spMk id="18" creationId="{E142F0A7-A006-A284-6641-18B61562B3CE}"/>
-          </ac:spMkLst>
-        </pc:spChg>
-        <pc:spChg chg="mod">
-          <ac:chgData name="Sudarshan Sivaramakrishnan" userId="S::ssivaram@mathworks.com::de70194d-fdbd-489d-817c-0c0648753bc1" providerId="AD" clId="Web-{0304AEF8-201C-8E1C-4657-E4205BD58110}" dt="2026-07-10T13:22:40.518" v="409" actId="1076"/>
-          <ac:spMkLst>
-            <pc:docMk/>
-            <pc:sldMk cId="2895114059" sldId="2147479330"/>
-            <ac:spMk id="20" creationId="{FE0F5FAD-27EE-5CB3-C9B9-C215F31D334A}"/>
-          </ac:spMkLst>
-        </pc:spChg>
-        <pc:spChg chg="mod">
-          <ac:chgData name="Sudarshan Sivaramakrishnan" userId="S::ssivaram@mathworks.com::de70194d-fdbd-489d-817c-0c0648753bc1" providerId="AD" clId="Web-{0304AEF8-201C-8E1C-4657-E4205BD58110}" dt="2026-07-10T13:09:28.149" v="323" actId="1076"/>
-          <ac:spMkLst>
-            <pc:docMk/>
-            <pc:sldMk cId="2895114059" sldId="2147479330"/>
-            <ac:spMk id="22" creationId="{C32DCAA1-3D1B-18FD-D8CB-F10699AD8A62}"/>
-          </ac:spMkLst>
-        </pc:spChg>
-        <pc:picChg chg="add mod">
-          <ac:chgData name="Sudarshan Sivaramakrishnan" userId="S::ssivaram@mathworks.com::de70194d-fdbd-489d-817c-0c0648753bc1" providerId="AD" clId="Web-{0304AEF8-201C-8E1C-4657-E4205BD58110}" dt="2026-07-10T13:27:11.647" v="436" actId="14100"/>
-          <ac:picMkLst>
-            <pc:docMk/>
-            <pc:sldMk cId="2895114059" sldId="2147479330"/>
-            <ac:picMk id="5" creationId="{3B57E0A3-C37F-3BAB-649B-3E3CC4BD4803}"/>
-          </ac:picMkLst>
-        </pc:picChg>
-        <pc:picChg chg="add mod">
-          <ac:chgData name="Sudarshan Sivaramakrishnan" userId="S::ssivaram@mathworks.com::de70194d-fdbd-489d-817c-0c0648753bc1" providerId="AD" clId="Web-{0304AEF8-201C-8E1C-4657-E4205BD58110}" dt="2026-07-10T13:27:11.663" v="437" actId="14100"/>
-          <ac:picMkLst>
-            <pc:docMk/>
-            <pc:sldMk cId="2895114059" sldId="2147479330"/>
-            <ac:picMk id="7" creationId="{A39A8599-E9DD-ABA1-EAF8-522085A63B75}"/>
-          </ac:picMkLst>
-        </pc:picChg>
-        <pc:picChg chg="del mod">
-          <ac:chgData name="Sudarshan Sivaramakrishnan" userId="S::ssivaram@mathworks.com::de70194d-fdbd-489d-817c-0c0648753bc1" providerId="AD" clId="Web-{0304AEF8-201C-8E1C-4657-E4205BD58110}" dt="2026-07-10T13:21:10.199" v="390"/>
-          <ac:picMkLst>
-            <pc:docMk/>
-            <pc:sldMk cId="2895114059" sldId="2147479330"/>
-            <ac:picMk id="8" creationId="{70F0406F-3B0F-8BDF-D160-70E542029A92}"/>
-          </ac:picMkLst>
-        </pc:picChg>
-        <pc:picChg chg="add del mod">
-          <ac:chgData name="Sudarshan Sivaramakrishnan" userId="S::ssivaram@mathworks.com::de70194d-fdbd-489d-817c-0c0648753bc1" providerId="AD" clId="Web-{0304AEF8-201C-8E1C-4657-E4205BD58110}" dt="2026-07-10T13:25:06.919" v="420"/>
-          <ac:picMkLst>
-            <pc:docMk/>
-            <pc:sldMk cId="2895114059" sldId="2147479330"/>
-            <ac:picMk id="10" creationId="{7C35629A-A984-441B-A937-024296C6FAFB}"/>
-          </ac:picMkLst>
-        </pc:picChg>
-        <pc:picChg chg="add mod ord">
-          <ac:chgData name="Sudarshan Sivaramakrishnan" userId="S::ssivaram@mathworks.com::de70194d-fdbd-489d-817c-0c0648753bc1" providerId="AD" clId="Web-{0304AEF8-201C-8E1C-4657-E4205BD58110}" dt="2026-07-10T13:32:18.231" v="520" actId="1076"/>
-          <ac:picMkLst>
-            <pc:docMk/>
-            <pc:sldMk cId="2895114059" sldId="2147479330"/>
-            <ac:picMk id="11" creationId="{FF81D380-4F1D-2E00-A5F3-9D977B24EA17}"/>
-          </ac:picMkLst>
-        </pc:picChg>
-        <pc:picChg chg="add del">
-          <ac:chgData name="Sudarshan Sivaramakrishnan" userId="S::ssivaram@mathworks.com::de70194d-fdbd-489d-817c-0c0648753bc1" providerId="AD" clId="Web-{0304AEF8-201C-8E1C-4657-E4205BD58110}" dt="2026-07-10T13:26:28.144" v="425"/>
-          <ac:picMkLst>
-            <pc:docMk/>
-            <pc:sldMk cId="2895114059" sldId="2147479330"/>
-            <ac:picMk id="14" creationId="{93ED9E78-9935-2679-B268-5DCFEDE7DCAC}"/>
-          </ac:picMkLst>
-        </pc:picChg>
-      </pc:sldChg>
-      <pc:sldChg chg="modSp">
-        <pc:chgData name="Sudarshan Sivaramakrishnan" userId="S::ssivaram@mathworks.com::de70194d-fdbd-489d-817c-0c0648753bc1" providerId="AD" clId="Web-{0304AEF8-201C-8E1C-4657-E4205BD58110}" dt="2026-07-10T13:40:30.344" v="533" actId="20577"/>
-        <pc:sldMkLst>
-          <pc:docMk/>
-          <pc:sldMk cId="3477293349" sldId="2147479333"/>
-        </pc:sldMkLst>
-        <pc:spChg chg="mod">
-          <ac:chgData name="Sudarshan Sivaramakrishnan" userId="S::ssivaram@mathworks.com::de70194d-fdbd-489d-817c-0c0648753bc1" providerId="AD" clId="Web-{0304AEF8-201C-8E1C-4657-E4205BD58110}" dt="2026-07-10T13:40:30.344" v="533" actId="20577"/>
-          <ac:spMkLst>
-            <pc:docMk/>
-            <pc:sldMk cId="3477293349" sldId="2147479333"/>
-            <ac:spMk id="2" creationId="{E455A333-2A12-B055-047F-85341A77A507}"/>
-          </ac:spMkLst>
-        </pc:spChg>
-        <pc:spChg chg="mod">
-          <ac:chgData name="Sudarshan Sivaramakrishnan" userId="S::ssivaram@mathworks.com::de70194d-fdbd-489d-817c-0c0648753bc1" providerId="AD" clId="Web-{0304AEF8-201C-8E1C-4657-E4205BD58110}" dt="2026-07-10T13:08:24.582" v="303" actId="20577"/>
-          <ac:spMkLst>
-            <pc:docMk/>
-            <pc:sldMk cId="3477293349" sldId="2147479333"/>
-            <ac:spMk id="13" creationId="{D092BF27-E6D9-E662-F7F8-F4C3854EED3C}"/>
-          </ac:spMkLst>
-        </pc:spChg>
-      </pc:sldChg>
-      <pc:sldChg chg="del">
-        <pc:chgData name="Sudarshan Sivaramakrishnan" userId="S::ssivaram@mathworks.com::de70194d-fdbd-489d-817c-0c0648753bc1" providerId="AD" clId="Web-{0304AEF8-201C-8E1C-4657-E4205BD58110}" dt="2026-07-10T13:14:48.734" v="360"/>
-        <pc:sldMkLst>
-          <pc:docMk/>
-          <pc:sldMk cId="3956203055" sldId="2147479334"/>
-        </pc:sldMkLst>
-      </pc:sldChg>
-      <pc:sldChg chg="del">
-        <pc:chgData name="Sudarshan Sivaramakrishnan" userId="S::ssivaram@mathworks.com::de70194d-fdbd-489d-817c-0c0648753bc1" providerId="AD" clId="Web-{0304AEF8-201C-8E1C-4657-E4205BD58110}" dt="2026-07-10T13:38:14.288" v="530"/>
-        <pc:sldMkLst>
-          <pc:docMk/>
-          <pc:sldMk cId="2583050697" sldId="2147479335"/>
-        </pc:sldMkLst>
-      </pc:sldChg>
-      <pc:sldChg chg="del">
-        <pc:chgData name="Sudarshan Sivaramakrishnan" userId="S::ssivaram@mathworks.com::de70194d-fdbd-489d-817c-0c0648753bc1" providerId="AD" clId="Web-{0304AEF8-201C-8E1C-4657-E4205BD58110}" dt="2026-07-10T13:38:14.288" v="526"/>
-        <pc:sldMkLst>
-          <pc:docMk/>
-          <pc:sldMk cId="3580457330" sldId="2147479336"/>
-        </pc:sldMkLst>
-      </pc:sldChg>
-      <pc:sldChg chg="del">
-        <pc:chgData name="Sudarshan Sivaramakrishnan" userId="S::ssivaram@mathworks.com::de70194d-fdbd-489d-817c-0c0648753bc1" providerId="AD" clId="Web-{0304AEF8-201C-8E1C-4657-E4205BD58110}" dt="2026-07-10T13:38:14.288" v="529"/>
-        <pc:sldMkLst>
-          <pc:docMk/>
-          <pc:sldMk cId="1934592233" sldId="2147479337"/>
-        </pc:sldMkLst>
-      </pc:sldChg>
-      <pc:sldChg chg="del">
-        <pc:chgData name="Sudarshan Sivaramakrishnan" userId="S::ssivaram@mathworks.com::de70194d-fdbd-489d-817c-0c0648753bc1" providerId="AD" clId="Web-{0304AEF8-201C-8E1C-4657-E4205BD58110}" dt="2026-07-10T13:38:14.288" v="525"/>
-        <pc:sldMkLst>
-          <pc:docMk/>
-          <pc:sldMk cId="168376995" sldId="2147479338"/>
-        </pc:sldMkLst>
-      </pc:sldChg>
-      <pc:sldChg chg="addSp delSp modSp">
-        <pc:chgData name="Sudarshan Sivaramakrishnan" userId="S::ssivaram@mathworks.com::de70194d-fdbd-489d-817c-0c0648753bc1" providerId="AD" clId="Web-{0304AEF8-201C-8E1C-4657-E4205BD58110}" dt="2026-07-10T13:32:14.262" v="519" actId="1076"/>
-        <pc:sldMkLst>
-          <pc:docMk/>
-          <pc:sldMk cId="1186657303" sldId="2147479340"/>
-        </pc:sldMkLst>
-        <pc:spChg chg="add mod ord">
-          <ac:chgData name="Sudarshan Sivaramakrishnan" userId="S::ssivaram@mathworks.com::de70194d-fdbd-489d-817c-0c0648753bc1" providerId="AD" clId="Web-{0304AEF8-201C-8E1C-4657-E4205BD58110}" dt="2026-07-10T13:31:58.371" v="517" actId="20577"/>
-          <ac:spMkLst>
-            <pc:docMk/>
-            <pc:sldMk cId="1186657303" sldId="2147479340"/>
-            <ac:spMk id="4" creationId="{B99616A8-FA27-D323-5131-6655EA093AF0}"/>
-          </ac:spMkLst>
-        </pc:spChg>
-        <pc:spChg chg="ord">
-          <ac:chgData name="Sudarshan Sivaramakrishnan" userId="S::ssivaram@mathworks.com::de70194d-fdbd-489d-817c-0c0648753bc1" providerId="AD" clId="Web-{0304AEF8-201C-8E1C-4657-E4205BD58110}" dt="2026-07-10T13:30:05.722" v="497"/>
-          <ac:spMkLst>
-            <pc:docMk/>
-            <pc:sldMk cId="1186657303" sldId="2147479340"/>
-            <ac:spMk id="7" creationId="{BD98A121-9CC7-9AF4-35FD-E6E964789175}"/>
-          </ac:spMkLst>
-        </pc:spChg>
-        <pc:spChg chg="mod">
-          <ac:chgData name="Sudarshan Sivaramakrishnan" userId="S::ssivaram@mathworks.com::de70194d-fdbd-489d-817c-0c0648753bc1" providerId="AD" clId="Web-{0304AEF8-201C-8E1C-4657-E4205BD58110}" dt="2026-07-10T13:09:38.290" v="329" actId="1076"/>
-          <ac:spMkLst>
-            <pc:docMk/>
-            <pc:sldMk cId="1186657303" sldId="2147479340"/>
-            <ac:spMk id="8" creationId="{48C11938-D1F8-97EE-4EF4-8397001A4FD4}"/>
-          </ac:spMkLst>
-        </pc:spChg>
-        <pc:spChg chg="add del mod">
-          <ac:chgData name="Sudarshan Sivaramakrishnan" userId="S::ssivaram@mathworks.com::de70194d-fdbd-489d-817c-0c0648753bc1" providerId="AD" clId="Web-{0304AEF8-201C-8E1C-4657-E4205BD58110}" dt="2026-07-10T13:29:07.968" v="474"/>
-          <ac:spMkLst>
-            <pc:docMk/>
-            <pc:sldMk cId="1186657303" sldId="2147479340"/>
-            <ac:spMk id="9" creationId="{AFCB77F2-C5E2-9914-557F-4A41589DA0A5}"/>
-          </ac:spMkLst>
-        </pc:spChg>
-        <pc:spChg chg="add del mod">
-          <ac:chgData name="Sudarshan Sivaramakrishnan" userId="S::ssivaram@mathworks.com::de70194d-fdbd-489d-817c-0c0648753bc1" providerId="AD" clId="Web-{0304AEF8-201C-8E1C-4657-E4205BD58110}" dt="2026-07-10T13:29:07.968" v="473"/>
-          <ac:spMkLst>
-            <pc:docMk/>
-            <pc:sldMk cId="1186657303" sldId="2147479340"/>
-            <ac:spMk id="10" creationId="{22D7A0C0-D320-20D0-491A-837CA6FE9A2F}"/>
-          </ac:spMkLst>
-        </pc:spChg>
-        <pc:spChg chg="add del mod">
-          <ac:chgData name="Sudarshan Sivaramakrishnan" userId="S::ssivaram@mathworks.com::de70194d-fdbd-489d-817c-0c0648753bc1" providerId="AD" clId="Web-{0304AEF8-201C-8E1C-4657-E4205BD58110}" dt="2026-07-10T13:29:07.968" v="472"/>
-          <ac:spMkLst>
-            <pc:docMk/>
-            <pc:sldMk cId="1186657303" sldId="2147479340"/>
-            <ac:spMk id="11" creationId="{2A1CC2B7-9B61-CB24-DEF8-F7BF3F43AAAE}"/>
-          </ac:spMkLst>
-        </pc:spChg>
-        <pc:spChg chg="add del ord">
-          <ac:chgData name="Sudarshan Sivaramakrishnan" userId="S::ssivaram@mathworks.com::de70194d-fdbd-489d-817c-0c0648753bc1" providerId="AD" clId="Web-{0304AEF8-201C-8E1C-4657-E4205BD58110}" dt="2026-07-10T13:30:09.332" v="500"/>
-          <ac:spMkLst>
-            <pc:docMk/>
-            <pc:sldMk cId="1186657303" sldId="2147479340"/>
-            <ac:spMk id="16" creationId="{669411D8-746A-42C6-19AA-FE4996482030}"/>
-          </ac:spMkLst>
-        </pc:spChg>
-        <pc:spChg chg="add del ord">
-          <ac:chgData name="Sudarshan Sivaramakrishnan" userId="S::ssivaram@mathworks.com::de70194d-fdbd-489d-817c-0c0648753bc1" providerId="AD" clId="Web-{0304AEF8-201C-8E1C-4657-E4205BD58110}" dt="2026-07-10T13:30:10.066" v="501"/>
-          <ac:spMkLst>
-            <pc:docMk/>
-            <pc:sldMk cId="1186657303" sldId="2147479340"/>
-            <ac:spMk id="18" creationId="{27905C1F-9245-84F1-51F7-2D407701AB95}"/>
-          </ac:spMkLst>
-        </pc:spChg>
-        <pc:spChg chg="add del mod ord">
-          <ac:chgData name="Sudarshan Sivaramakrishnan" userId="S::ssivaram@mathworks.com::de70194d-fdbd-489d-817c-0c0648753bc1" providerId="AD" clId="Web-{0304AEF8-201C-8E1C-4657-E4205BD58110}" dt="2026-07-10T13:30:10.832" v="502"/>
-          <ac:spMkLst>
-            <pc:docMk/>
-            <pc:sldMk cId="1186657303" sldId="2147479340"/>
-            <ac:spMk id="20" creationId="{1EE059F9-3C71-DF9D-3A03-2F87BEE0615C}"/>
-          </ac:spMkLst>
-        </pc:spChg>
-        <pc:picChg chg="add del">
-          <ac:chgData name="Sudarshan Sivaramakrishnan" userId="S::ssivaram@mathworks.com::de70194d-fdbd-489d-817c-0c0648753bc1" providerId="AD" clId="Web-{0304AEF8-201C-8E1C-4657-E4205BD58110}" dt="2026-07-10T13:26:35.535" v="426"/>
-          <ac:picMkLst>
-            <pc:docMk/>
-            <pc:sldMk cId="1186657303" sldId="2147479340"/>
-            <ac:picMk id="6" creationId="{C484C438-6195-1EEE-0DF0-5EDA6227C006}"/>
-          </ac:picMkLst>
-        </pc:picChg>
-        <pc:picChg chg="add del mod">
-          <ac:chgData name="Sudarshan Sivaramakrishnan" userId="S::ssivaram@mathworks.com::de70194d-fdbd-489d-817c-0c0648753bc1" providerId="AD" clId="Web-{0304AEF8-201C-8E1C-4657-E4205BD58110}" dt="2026-07-10T13:29:08.452" v="475"/>
-          <ac:picMkLst>
-            <pc:docMk/>
-            <pc:sldMk cId="1186657303" sldId="2147479340"/>
-            <ac:picMk id="12" creationId="{589A03C4-A611-2D64-0F7A-BBA3D4519C67}"/>
-          </ac:picMkLst>
-        </pc:picChg>
-        <pc:picChg chg="add mod ord">
-          <ac:chgData name="Sudarshan Sivaramakrishnan" userId="S::ssivaram@mathworks.com::de70194d-fdbd-489d-817c-0c0648753bc1" providerId="AD" clId="Web-{0304AEF8-201C-8E1C-4657-E4205BD58110}" dt="2026-07-10T13:32:14.262" v="519" actId="1076"/>
-          <ac:picMkLst>
-            <pc:docMk/>
-            <pc:sldMk cId="1186657303" sldId="2147479340"/>
-            <ac:picMk id="13" creationId="{931C8F71-9D9C-27F7-72D9-B51528CA07D8}"/>
-          </ac:picMkLst>
-        </pc:picChg>
-        <pc:picChg chg="add del">
-          <ac:chgData name="Sudarshan Sivaramakrishnan" userId="S::ssivaram@mathworks.com::de70194d-fdbd-489d-817c-0c0648753bc1" providerId="AD" clId="Web-{0304AEF8-201C-8E1C-4657-E4205BD58110}" dt="2026-07-10T13:26:35.863" v="427"/>
-          <ac:picMkLst>
-            <pc:docMk/>
-            <pc:sldMk cId="1186657303" sldId="2147479340"/>
-            <ac:picMk id="14" creationId="{3EB846DA-E05B-EFD4-246F-66E6CAB5D4D6}"/>
-          </ac:picMkLst>
-        </pc:picChg>
-        <pc:picChg chg="add del">
-          <ac:chgData name="Sudarshan Sivaramakrishnan" userId="S::ssivaram@mathworks.com::de70194d-fdbd-489d-817c-0c0648753bc1" providerId="AD" clId="Web-{0304AEF8-201C-8E1C-4657-E4205BD58110}" dt="2026-07-10T13:29:53.221" v="495"/>
-          <ac:picMkLst>
-            <pc:docMk/>
-            <pc:sldMk cId="1186657303" sldId="2147479340"/>
-            <ac:picMk id="22" creationId="{269E8223-5A94-3651-7BBA-677439F097B1}"/>
-          </ac:picMkLst>
-        </pc:picChg>
-        <pc:picChg chg="add del">
-          <ac:chgData name="Sudarshan Sivaramakrishnan" userId="S::ssivaram@mathworks.com::de70194d-fdbd-489d-817c-0c0648753bc1" providerId="AD" clId="Web-{0304AEF8-201C-8E1C-4657-E4205BD58110}" dt="2026-07-10T13:29:53.221" v="496"/>
-          <ac:picMkLst>
-            <pc:docMk/>
-            <pc:sldMk cId="1186657303" sldId="2147479340"/>
-            <ac:picMk id="24" creationId="{39348A88-FA58-E979-5681-2C379291573E}"/>
-          </ac:picMkLst>
-        </pc:picChg>
-      </pc:sldChg>
-      <pc:sldChg chg="add del replId">
-        <pc:chgData name="Sudarshan Sivaramakrishnan" userId="S::ssivaram@mathworks.com::de70194d-fdbd-489d-817c-0c0648753bc1" providerId="AD" clId="Web-{0304AEF8-201C-8E1C-4657-E4205BD58110}" dt="2026-07-10T13:40:43.408" v="535"/>
-        <pc:sldMkLst>
-          <pc:docMk/>
-          <pc:sldMk cId="1184703433" sldId="2147479341"/>
-        </pc:sldMkLst>
-      </pc:sldChg>
-      <pc:sldChg chg="del">
-        <pc:chgData name="Sudarshan Sivaramakrishnan" userId="S::ssivaram@mathworks.com::de70194d-fdbd-489d-817c-0c0648753bc1" providerId="AD" clId="Web-{0304AEF8-201C-8E1C-4657-E4205BD58110}" dt="2026-07-10T13:38:14.288" v="528"/>
-        <pc:sldMkLst>
-          <pc:docMk/>
-          <pc:sldMk cId="1402491969" sldId="2147479341"/>
-        </pc:sldMkLst>
-      </pc:sldChg>
-      <pc:sldChg chg="new">
-        <pc:chgData name="Sudarshan Sivaramakrishnan" userId="S::ssivaram@mathworks.com::de70194d-fdbd-489d-817c-0c0648753bc1" providerId="AD" clId="Web-{0304AEF8-201C-8E1C-4657-E4205BD58110}" dt="2026-07-10T13:40:45.924" v="536"/>
-        <pc:sldMkLst>
-          <pc:docMk/>
-          <pc:sldMk cId="2695534885" sldId="2147479341"/>
-        </pc:sldMkLst>
-      </pc:sldChg>
-      <pc:sldChg chg="del">
-        <pc:chgData name="Sudarshan Sivaramakrishnan" userId="S::ssivaram@mathworks.com::de70194d-fdbd-489d-817c-0c0648753bc1" providerId="AD" clId="Web-{0304AEF8-201C-8E1C-4657-E4205BD58110}" dt="2026-07-10T13:38:14.288" v="527"/>
-        <pc:sldMkLst>
-          <pc:docMk/>
-          <pc:sldMk cId="19936455" sldId="2147479342"/>
-        </pc:sldMkLst>
-      </pc:sldChg>
-      <pc:sldChg chg="del">
-        <pc:chgData name="Sudarshan Sivaramakrishnan" userId="S::ssivaram@mathworks.com::de70194d-fdbd-489d-817c-0c0648753bc1" providerId="AD" clId="Web-{0304AEF8-201C-8E1C-4657-E4205BD58110}" dt="2026-07-10T13:38:14.288" v="531"/>
-        <pc:sldMkLst>
-          <pc:docMk/>
-          <pc:sldMk cId="3032769533" sldId="2147479343"/>
-        </pc:sldMkLst>
-      </pc:sldChg>
-    </pc:docChg>
-  </pc:docChgLst>
-  <pc:docChgLst>
-    <pc:chgData name="Sudarshan Sivaramakrishnan" userId="S::ssivaram@mathworks.com::de70194d-fdbd-489d-817c-0c0648753bc1" providerId="AD" clId="Web-{53B91347-CB63-D923-3C2D-E4E588B66E73}"/>
-    <pc:docChg chg="delSld delSection modSection">
-      <pc:chgData name="Sudarshan Sivaramakrishnan" userId="S::ssivaram@mathworks.com::de70194d-fdbd-489d-817c-0c0648753bc1" providerId="AD" clId="Web-{53B91347-CB63-D923-3C2D-E4E588B66E73}" dt="2026-07-11T14:21:56.893" v="13"/>
-      <pc:docMkLst>
-        <pc:docMk/>
-      </pc:docMkLst>
-      <pc:sldChg chg="del">
-        <pc:chgData name="Sudarshan Sivaramakrishnan" userId="S::ssivaram@mathworks.com::de70194d-fdbd-489d-817c-0c0648753bc1" providerId="AD" clId="Web-{53B91347-CB63-D923-3C2D-E4E588B66E73}" dt="2026-07-11T14:21:31.220" v="6"/>
-        <pc:sldMkLst>
-          <pc:docMk/>
-          <pc:sldMk cId="4191744665" sldId="298"/>
-        </pc:sldMkLst>
-      </pc:sldChg>
-      <pc:sldChg chg="del">
-        <pc:chgData name="Sudarshan Sivaramakrishnan" userId="S::ssivaram@mathworks.com::de70194d-fdbd-489d-817c-0c0648753bc1" providerId="AD" clId="Web-{53B91347-CB63-D923-3C2D-E4E588B66E73}" dt="2026-07-11T14:20:53.579" v="0"/>
-        <pc:sldMkLst>
-          <pc:docMk/>
-          <pc:sldMk cId="4143862939" sldId="1347"/>
-        </pc:sldMkLst>
-      </pc:sldChg>
-      <pc:sldChg chg="del">
-        <pc:chgData name="Sudarshan Sivaramakrishnan" userId="S::ssivaram@mathworks.com::de70194d-fdbd-489d-817c-0c0648753bc1" providerId="AD" clId="Web-{53B91347-CB63-D923-3C2D-E4E588B66E73}" dt="2026-07-11T14:21:08.001" v="1"/>
-        <pc:sldMkLst>
-          <pc:docMk/>
-          <pc:sldMk cId="2820808393" sldId="2145706540"/>
-        </pc:sldMkLst>
-      </pc:sldChg>
-      <pc:sldChg chg="del">
-        <pc:chgData name="Sudarshan Sivaramakrishnan" userId="S::ssivaram@mathworks.com::de70194d-fdbd-489d-817c-0c0648753bc1" providerId="AD" clId="Web-{53B91347-CB63-D923-3C2D-E4E588B66E73}" dt="2026-07-11T14:21:56.893" v="13"/>
-        <pc:sldMkLst>
-          <pc:docMk/>
-          <pc:sldMk cId="252827436" sldId="2147376758"/>
-        </pc:sldMkLst>
-      </pc:sldChg>
-      <pc:sldChg chg="del">
-        <pc:chgData name="Sudarshan Sivaramakrishnan" userId="S::ssivaram@mathworks.com::de70194d-fdbd-489d-817c-0c0648753bc1" providerId="AD" clId="Web-{53B91347-CB63-D923-3C2D-E4E588B66E73}" dt="2026-07-11T14:21:31.236" v="10"/>
-        <pc:sldMkLst>
-          <pc:docMk/>
-          <pc:sldMk cId="1128881988" sldId="2147376760"/>
-        </pc:sldMkLst>
-      </pc:sldChg>
-      <pc:sldChg chg="del">
-        <pc:chgData name="Sudarshan Sivaramakrishnan" userId="S::ssivaram@mathworks.com::de70194d-fdbd-489d-817c-0c0648753bc1" providerId="AD" clId="Web-{53B91347-CB63-D923-3C2D-E4E588B66E73}" dt="2026-07-11T14:21:31.220" v="7"/>
-        <pc:sldMkLst>
-          <pc:docMk/>
-          <pc:sldMk cId="137036860" sldId="2147479268"/>
-        </pc:sldMkLst>
-      </pc:sldChg>
-      <pc:sldChg chg="del">
-        <pc:chgData name="Sudarshan Sivaramakrishnan" userId="S::ssivaram@mathworks.com::de70194d-fdbd-489d-817c-0c0648753bc1" providerId="AD" clId="Web-{53B91347-CB63-D923-3C2D-E4E588B66E73}" dt="2026-07-11T14:21:31.220" v="8"/>
-        <pc:sldMkLst>
-          <pc:docMk/>
-          <pc:sldMk cId="2319082624" sldId="2147479296"/>
-        </pc:sldMkLst>
-      </pc:sldChg>
-      <pc:sldChg chg="del">
-        <pc:chgData name="Sudarshan Sivaramakrishnan" userId="S::ssivaram@mathworks.com::de70194d-fdbd-489d-817c-0c0648753bc1" providerId="AD" clId="Web-{53B91347-CB63-D923-3C2D-E4E588B66E73}" dt="2026-07-11T14:21:31.220" v="9"/>
-        <pc:sldMkLst>
-          <pc:docMk/>
-          <pc:sldMk cId="3917329948" sldId="2147479325"/>
-        </pc:sldMkLst>
-      </pc:sldChg>
-      <pc:sldChg chg="del">
-        <pc:chgData name="Sudarshan Sivaramakrishnan" userId="S::ssivaram@mathworks.com::de70194d-fdbd-489d-817c-0c0648753bc1" providerId="AD" clId="Web-{53B91347-CB63-D923-3C2D-E4E588B66E73}" dt="2026-07-11T14:21:31.205" v="3"/>
-        <pc:sldMkLst>
-          <pc:docMk/>
-          <pc:sldMk cId="200346005" sldId="2147479326"/>
-        </pc:sldMkLst>
-      </pc:sldChg>
-      <pc:sldChg chg="del">
-        <pc:chgData name="Sudarshan Sivaramakrishnan" userId="S::ssivaram@mathworks.com::de70194d-fdbd-489d-817c-0c0648753bc1" providerId="AD" clId="Web-{53B91347-CB63-D923-3C2D-E4E588B66E73}" dt="2026-07-11T14:21:31.220" v="4"/>
-        <pc:sldMkLst>
-          <pc:docMk/>
-          <pc:sldMk cId="1455500157" sldId="2147479343"/>
-        </pc:sldMkLst>
-      </pc:sldChg>
-      <pc:sldChg chg="del">
-        <pc:chgData name="Sudarshan Sivaramakrishnan" userId="S::ssivaram@mathworks.com::de70194d-fdbd-489d-817c-0c0648753bc1" providerId="AD" clId="Web-{53B91347-CB63-D923-3C2D-E4E588B66E73}" dt="2026-07-11T14:21:31.220" v="5"/>
-        <pc:sldMkLst>
-          <pc:docMk/>
-          <pc:sldMk cId="1510197360" sldId="2147479344"/>
-        </pc:sldMkLst>
-      </pc:sldChg>
-    </pc:docChg>
-  </pc:docChgLst>
 </pc:chgInfo>
 </file>
 
@@ -1029,7 +954,7 @@
             <a:fld id="{5F993C83-2184-4286-ABE1-941A40B40C8F}" type="datetimeFigureOut">
               <a:rPr lang="en-US" smtClean="0"/>
               <a:pPr/>
-              <a:t>7/11/2026</a:t>
+              <a:t>7/12/2026</a:t>
             </a:fld>
             <a:endParaRPr lang="en-US"/>
           </a:p>
@@ -1196,7 +1121,7 @@
             <a:fld id="{6053241F-7ED4-45AC-844C-15DB0D5F9CCD}" type="datetimeFigureOut">
               <a:rPr lang="en-US" smtClean="0"/>
               <a:pPr/>
-              <a:t>7/11/2026</a:t>
+              <a:t>7/12/2026</a:t>
             </a:fld>
             <a:endParaRPr lang="en-US"/>
           </a:p>
@@ -1690,7 +1615,7 @@
                 <a:tabLst/>
                 <a:defRPr/>
               </a:pPr>
-              <a:t>2</a:t>
+              <a:t>1</a:t>
             </a:fld>
             <a:endParaRPr kumimoji="0" lang="en-US" sz="1200" b="0" i="0" u="none" strike="noStrike" kern="1200" cap="none" spc="0" normalizeH="0" baseline="0" noProof="0">
               <a:ln>
@@ -1793,7 +1718,7 @@
             <a:fld id="{AD73B8C3-A209-4A55-9261-22C2A02B3159}" type="slidenum">
               <a:rPr lang="en-US" smtClean="0"/>
               <a:pPr/>
-              <a:t>19</a:t>
+              <a:t>10</a:t>
             </a:fld>
             <a:endParaRPr lang="en-US"/>
           </a:p>
@@ -1906,7 +1831,7 @@
             <a:fld id="{AD73B8C3-A209-4A55-9261-22C2A02B3159}" type="slidenum">
               <a:rPr lang="en-US" smtClean="0"/>
               <a:pPr/>
-              <a:t>21</a:t>
+              <a:t>12</a:t>
             </a:fld>
             <a:endParaRPr lang="en-US"/>
           </a:p>
@@ -2048,7 +1973,7 @@
             <a:fld id="{AD73B8C3-A209-4A55-9261-22C2A02B3159}" type="slidenum">
               <a:rPr lang="en-US" smtClean="0"/>
               <a:pPr/>
-              <a:t>22</a:t>
+              <a:t>13</a:t>
             </a:fld>
             <a:endParaRPr lang="en-US"/>
           </a:p>
@@ -2058,6 +1983,94 @@
     <p:extLst>
       <p:ext uri="{BB962C8B-B14F-4D97-AF65-F5344CB8AC3E}">
         <p14:creationId xmlns:p14="http://schemas.microsoft.com/office/powerpoint/2010/main" val="3925522341"/>
+      </p:ext>
+    </p:extLst>
+  </p:cSld>
+  <p:clrMapOvr>
+    <a:masterClrMapping/>
+  </p:clrMapOvr>
+</p:notes>
+</file>
+
+<file path=ppt/notesSlides/notesSlide13.xml><?xml version="1.0" encoding="utf-8"?>
+<p:notes xmlns:a="http://schemas.openxmlformats.org/drawingml/2006/main" xmlns:r="http://schemas.openxmlformats.org/officeDocument/2006/relationships" xmlns:p="http://schemas.openxmlformats.org/presentationml/2006/main">
+  <p:cSld>
+    <p:spTree>
+      <p:nvGrpSpPr>
+        <p:cNvPr id="1" name=""/>
+        <p:cNvGrpSpPr/>
+        <p:nvPr/>
+      </p:nvGrpSpPr>
+      <p:grpSpPr>
+        <a:xfrm>
+          <a:off x="0" y="0"/>
+          <a:ext cx="0" cy="0"/>
+          <a:chOff x="0" y="0"/>
+          <a:chExt cx="0" cy="0"/>
+        </a:xfrm>
+      </p:grpSpPr>
+      <p:sp>
+        <p:nvSpPr>
+          <p:cNvPr id="2" name="Slide Image Placeholder 1"/>
+          <p:cNvSpPr>
+            <a:spLocks noGrp="1" noRot="1" noChangeAspect="1"/>
+          </p:cNvSpPr>
+          <p:nvPr>
+            <p:ph type="sldImg"/>
+          </p:nvPr>
+        </p:nvSpPr>
+        <p:spPr/>
+      </p:sp>
+      <p:sp>
+        <p:nvSpPr>
+          <p:cNvPr id="3" name="Notes Placeholder 2"/>
+          <p:cNvSpPr>
+            <a:spLocks noGrp="1"/>
+          </p:cNvSpPr>
+          <p:nvPr>
+            <p:ph type="body" idx="1"/>
+          </p:nvPr>
+        </p:nvSpPr>
+        <p:spPr/>
+        <p:txBody>
+          <a:bodyPr/>
+          <a:lstStyle/>
+          <a:p>
+            <a:r>
+              <a:rPr lang="en-IN"/>
+              <a:t>Formats,  coordinate systems, normalizations</a:t>
+            </a:r>
+          </a:p>
+        </p:txBody>
+      </p:sp>
+      <p:sp>
+        <p:nvSpPr>
+          <p:cNvPr id="4" name="Slide Number Placeholder 3"/>
+          <p:cNvSpPr>
+            <a:spLocks noGrp="1"/>
+          </p:cNvSpPr>
+          <p:nvPr>
+            <p:ph type="sldNum" sz="quarter" idx="5"/>
+          </p:nvPr>
+        </p:nvSpPr>
+        <p:spPr/>
+        <p:txBody>
+          <a:bodyPr/>
+          <a:lstStyle/>
+          <a:p>
+            <a:fld id="{AD73B8C3-A209-4A55-9261-22C2A02B3159}" type="slidenum">
+              <a:rPr lang="en-US" smtClean="0"/>
+              <a:pPr/>
+              <a:t>16</a:t>
+            </a:fld>
+            <a:endParaRPr lang="en-US"/>
+          </a:p>
+        </p:txBody>
+      </p:sp>
+    </p:spTree>
+    <p:extLst>
+      <p:ext uri="{BB962C8B-B14F-4D97-AF65-F5344CB8AC3E}">
+        <p14:creationId xmlns:p14="http://schemas.microsoft.com/office/powerpoint/2010/main" val="3585045373"/>
       </p:ext>
     </p:extLst>
   </p:cSld>
@@ -2161,7 +2174,7 @@
             <a:fld id="{AD73B8C3-A209-4A55-9261-22C2A02B3159}" type="slidenum">
               <a:rPr lang="en-US" smtClean="0"/>
               <a:pPr/>
-              <a:t>11</a:t>
+              <a:t>2</a:t>
             </a:fld>
             <a:endParaRPr lang="en-US"/>
           </a:p>
@@ -2291,7 +2304,7 @@
             <a:fld id="{AD73B8C3-A209-4A55-9261-22C2A02B3159}" type="slidenum">
               <a:rPr lang="en-US" smtClean="0"/>
               <a:pPr/>
-              <a:t>12</a:t>
+              <a:t>3</a:t>
             </a:fld>
             <a:endParaRPr lang="en-US"/>
           </a:p>
@@ -2444,7 +2457,7 @@
             <a:fld id="{AD73B8C3-A209-4A55-9261-22C2A02B3159}" type="slidenum">
               <a:rPr lang="en-US" smtClean="0"/>
               <a:pPr/>
-              <a:t>13</a:t>
+              <a:t>4</a:t>
             </a:fld>
             <a:endParaRPr lang="en-US"/>
           </a:p>
@@ -2576,7 +2589,7 @@
             <a:fld id="{AD73B8C3-A209-4A55-9261-22C2A02B3159}" type="slidenum">
               <a:rPr lang="en-US" smtClean="0"/>
               <a:pPr/>
-              <a:t>14</a:t>
+              <a:t>5</a:t>
             </a:fld>
             <a:endParaRPr lang="en-US"/>
           </a:p>
@@ -2671,7 +2684,7 @@
             <a:fld id="{AD73B8C3-A209-4A55-9261-22C2A02B3159}" type="slidenum">
               <a:rPr lang="en-US" smtClean="0"/>
               <a:pPr/>
-              <a:t>15</a:t>
+              <a:t>6</a:t>
             </a:fld>
             <a:endParaRPr lang="en-US"/>
           </a:p>
@@ -2786,7 +2799,7 @@
             <a:fld id="{AD73B8C3-A209-4A55-9261-22C2A02B3159}" type="slidenum">
               <a:rPr lang="en-US" smtClean="0"/>
               <a:pPr/>
-              <a:t>16</a:t>
+              <a:t>7</a:t>
             </a:fld>
             <a:endParaRPr lang="en-US"/>
           </a:p>
@@ -2905,7 +2918,7 @@
             <a:fld id="{AD73B8C3-A209-4A55-9261-22C2A02B3159}" type="slidenum">
               <a:rPr lang="en-US" smtClean="0"/>
               <a:pPr/>
-              <a:t>17</a:t>
+              <a:t>8</a:t>
             </a:fld>
             <a:endParaRPr lang="en-US"/>
           </a:p>
@@ -3102,7 +3115,7 @@
             <a:fld id="{AD73B8C3-A209-4A55-9261-22C2A02B3159}" type="slidenum">
               <a:rPr lang="en-US" smtClean="0"/>
               <a:pPr/>
-              <a:t>18</a:t>
+              <a:t>9</a:t>
             </a:fld>
             <a:endParaRPr lang="en-US"/>
           </a:p>
@@ -34201,92 +34214,2466 @@
           <p:cNvPr id="2" name="Title 1">
             <a:extLst>
               <a:ext uri="{FF2B5EF4-FFF2-40B4-BE49-F238E27FC236}">
-                <a16:creationId xmlns:a16="http://schemas.microsoft.com/office/drawing/2014/main" id="{BF1E7ACC-47AC-24FE-65FD-314A1FCD5CCB}"/>
+                <a16:creationId xmlns:a16="http://schemas.microsoft.com/office/drawing/2014/main" id="{B434FC57-832F-4007-764D-4CE73F9D6765}"/>
               </a:ext>
             </a:extLst>
           </p:cNvPr>
-          <p:cNvSpPr>
-            <a:spLocks noGrp="1"/>
+          <p:cNvSpPr txBox="1">
+            <a:spLocks/>
           </p:cNvSpPr>
-          <p:nvPr>
-            <p:ph type="title"/>
-          </p:nvPr>
+          <p:nvPr/>
         </p:nvSpPr>
-        <p:spPr/>
+        <p:spPr>
+          <a:xfrm>
+            <a:off x="245398" y="181991"/>
+            <a:ext cx="10769600" cy="990600"/>
+          </a:xfrm>
+          <a:prstGeom prst="rect">
+            <a:avLst/>
+          </a:prstGeom>
+        </p:spPr>
         <p:txBody>
-          <a:bodyPr/>
+          <a:bodyPr lIns="91440" tIns="45720" rIns="91440" bIns="45720" anchor="t"/>
+          <a:lstStyle>
+            <a:lvl1pPr algn="l" defTabSz="916680" rtl="0" eaLnBrk="1" latinLnBrk="0" hangingPunct="1">
+              <a:spcBef>
+                <a:spcPct val="0"/>
+              </a:spcBef>
+              <a:buNone/>
+              <a:defRPr sz="2800" b="1" kern="1200">
+                <a:solidFill>
+                  <a:schemeClr val="tx2"/>
+                </a:solidFill>
+                <a:latin typeface="Arial" pitchFamily="34" charset="0"/>
+                <a:ea typeface="+mj-ea"/>
+                <a:cs typeface="Arial" pitchFamily="34" charset="0"/>
+              </a:defRPr>
+            </a:lvl1pPr>
+          </a:lstStyle>
+          <a:p>
+            <a:r>
+              <a:rPr lang="en-US" b="0" dirty="0">
+                <a:latin typeface="Arial"/>
+                <a:cs typeface="Arial"/>
+              </a:rPr>
+              <a:t>Review and 3p integration workflow: </a:t>
+            </a:r>
+            <a:endParaRPr lang="en-US" b="0" dirty="0"/>
+          </a:p>
+        </p:txBody>
+      </p:sp>
+      <p:grpSp>
+        <p:nvGrpSpPr>
+          <p:cNvPr id="57" name="Group 56">
+            <a:extLst>
+              <a:ext uri="{FF2B5EF4-FFF2-40B4-BE49-F238E27FC236}">
+                <a16:creationId xmlns:a16="http://schemas.microsoft.com/office/drawing/2014/main" id="{5D91C155-B255-E9C0-5076-ECCF4651B0FD}"/>
+              </a:ext>
+            </a:extLst>
+          </p:cNvPr>
+          <p:cNvGrpSpPr/>
+          <p:nvPr/>
+        </p:nvGrpSpPr>
+        <p:grpSpPr>
+          <a:xfrm>
+            <a:off x="446046" y="1223664"/>
+            <a:ext cx="2214550" cy="2433715"/>
+            <a:chOff x="446046" y="1223664"/>
+            <a:chExt cx="2214550" cy="2433715"/>
+          </a:xfrm>
+        </p:grpSpPr>
+        <p:sp>
+          <p:nvSpPr>
+            <p:cNvPr id="5" name="Rectangle 4">
+              <a:extLst>
+                <a:ext uri="{FF2B5EF4-FFF2-40B4-BE49-F238E27FC236}">
+                  <a16:creationId xmlns:a16="http://schemas.microsoft.com/office/drawing/2014/main" id="{6EC3715E-DF05-83B8-1552-A08F61414375}"/>
+                </a:ext>
+              </a:extLst>
+            </p:cNvPr>
+            <p:cNvSpPr/>
+            <p:nvPr/>
+          </p:nvSpPr>
+          <p:spPr>
+            <a:xfrm>
+              <a:off x="476250" y="1543050"/>
+              <a:ext cx="2178050" cy="685800"/>
+            </a:xfrm>
+            <a:prstGeom prst="rect">
+              <a:avLst/>
+            </a:prstGeom>
+            <a:noFill/>
+            <a:ln>
+              <a:solidFill>
+                <a:schemeClr val="tx2"/>
+              </a:solidFill>
+            </a:ln>
+          </p:spPr>
+          <p:style>
+            <a:lnRef idx="2">
+              <a:schemeClr val="accent1">
+                <a:shade val="50000"/>
+              </a:schemeClr>
+            </a:lnRef>
+            <a:fillRef idx="1">
+              <a:schemeClr val="accent1"/>
+            </a:fillRef>
+            <a:effectRef idx="0">
+              <a:schemeClr val="accent1"/>
+            </a:effectRef>
+            <a:fontRef idx="minor">
+              <a:schemeClr val="lt1"/>
+            </a:fontRef>
+          </p:style>
+          <p:txBody>
+            <a:bodyPr rtlCol="0" anchor="ctr"/>
+            <a:lstStyle/>
+            <a:p>
+              <a:pPr algn="ctr"/>
+              <a:endParaRPr lang="en-IN" b="1">
+                <a:latin typeface="Arial" pitchFamily="34" charset="0"/>
+                <a:cs typeface="Arial" pitchFamily="34" charset="0"/>
+              </a:endParaRPr>
+            </a:p>
+          </p:txBody>
+        </p:sp>
+        <p:sp>
+          <p:nvSpPr>
+            <p:cNvPr id="6" name="TextBox 5">
+              <a:extLst>
+                <a:ext uri="{FF2B5EF4-FFF2-40B4-BE49-F238E27FC236}">
+                  <a16:creationId xmlns:a16="http://schemas.microsoft.com/office/drawing/2014/main" id="{D1159C8C-F645-FE21-3771-A20A8E977645}"/>
+                </a:ext>
+              </a:extLst>
+            </p:cNvPr>
+            <p:cNvSpPr txBox="1"/>
+            <p:nvPr/>
+          </p:nvSpPr>
+          <p:spPr>
+            <a:xfrm>
+              <a:off x="857389" y="1223664"/>
+              <a:ext cx="1415772" cy="369332"/>
+            </a:xfrm>
+            <a:prstGeom prst="rect">
+              <a:avLst/>
+            </a:prstGeom>
+            <a:noFill/>
+          </p:spPr>
+          <p:txBody>
+            <a:bodyPr wrap="none" rtlCol="0">
+              <a:spAutoFit/>
+            </a:bodyPr>
+            <a:lstStyle/>
+            <a:p>
+              <a:r>
+                <a:rPr lang="en-IN">
+                  <a:latin typeface="Arial" pitchFamily="34" charset="0"/>
+                  <a:cs typeface="Arial" pitchFamily="34" charset="0"/>
+                </a:rPr>
+                <a:t>Data sheets</a:t>
+              </a:r>
+            </a:p>
+          </p:txBody>
+        </p:sp>
+        <p:sp>
+          <p:nvSpPr>
+            <p:cNvPr id="7" name="Rectangle 6">
+              <a:extLst>
+                <a:ext uri="{FF2B5EF4-FFF2-40B4-BE49-F238E27FC236}">
+                  <a16:creationId xmlns:a16="http://schemas.microsoft.com/office/drawing/2014/main" id="{87610C32-49B9-C809-3168-118CF492955B}"/>
+                </a:ext>
+              </a:extLst>
+            </p:cNvPr>
+            <p:cNvSpPr/>
+            <p:nvPr/>
+          </p:nvSpPr>
+          <p:spPr>
+            <a:xfrm>
+              <a:off x="482546" y="2971579"/>
+              <a:ext cx="2178050" cy="685800"/>
+            </a:xfrm>
+            <a:prstGeom prst="rect">
+              <a:avLst/>
+            </a:prstGeom>
+            <a:noFill/>
+            <a:ln>
+              <a:solidFill>
+                <a:schemeClr val="tx2"/>
+              </a:solidFill>
+            </a:ln>
+          </p:spPr>
+          <p:style>
+            <a:lnRef idx="2">
+              <a:schemeClr val="accent1">
+                <a:shade val="50000"/>
+              </a:schemeClr>
+            </a:lnRef>
+            <a:fillRef idx="1">
+              <a:schemeClr val="accent1"/>
+            </a:fillRef>
+            <a:effectRef idx="0">
+              <a:schemeClr val="accent1"/>
+            </a:effectRef>
+            <a:fontRef idx="minor">
+              <a:schemeClr val="lt1"/>
+            </a:fontRef>
+          </p:style>
+          <p:txBody>
+            <a:bodyPr rtlCol="0" anchor="ctr"/>
+            <a:lstStyle/>
+            <a:p>
+              <a:pPr algn="ctr"/>
+              <a:endParaRPr lang="en-IN" b="1">
+                <a:latin typeface="Arial" pitchFamily="34" charset="0"/>
+                <a:cs typeface="Arial" pitchFamily="34" charset="0"/>
+              </a:endParaRPr>
+            </a:p>
+          </p:txBody>
+        </p:sp>
+        <p:sp>
+          <p:nvSpPr>
+            <p:cNvPr id="8" name="TextBox 7">
+              <a:extLst>
+                <a:ext uri="{FF2B5EF4-FFF2-40B4-BE49-F238E27FC236}">
+                  <a16:creationId xmlns:a16="http://schemas.microsoft.com/office/drawing/2014/main" id="{3F734D8F-8777-60CF-3346-4BC29F5F8AE8}"/>
+                </a:ext>
+              </a:extLst>
+            </p:cNvPr>
+            <p:cNvSpPr txBox="1"/>
+            <p:nvPr/>
+          </p:nvSpPr>
+          <p:spPr>
+            <a:xfrm>
+              <a:off x="784175" y="2676044"/>
+              <a:ext cx="1595309" cy="369332"/>
+            </a:xfrm>
+            <a:prstGeom prst="rect">
+              <a:avLst/>
+            </a:prstGeom>
+            <a:noFill/>
+          </p:spPr>
+          <p:txBody>
+            <a:bodyPr wrap="square" rtlCol="0">
+              <a:spAutoFit/>
+            </a:bodyPr>
+            <a:lstStyle/>
+            <a:p>
+              <a:r>
+                <a:rPr lang="en-IN">
+                  <a:latin typeface="Arial" pitchFamily="34" charset="0"/>
+                  <a:cs typeface="Arial" pitchFamily="34" charset="0"/>
+                </a:rPr>
+                <a:t>Measurement</a:t>
+              </a:r>
+            </a:p>
+          </p:txBody>
+        </p:sp>
+        <p:sp>
+          <p:nvSpPr>
+            <p:cNvPr id="20" name="TextBox 19">
+              <a:extLst>
+                <a:ext uri="{FF2B5EF4-FFF2-40B4-BE49-F238E27FC236}">
+                  <a16:creationId xmlns:a16="http://schemas.microsoft.com/office/drawing/2014/main" id="{442F9887-87FC-4D08-4B44-1EA6870CAD28}"/>
+                </a:ext>
+              </a:extLst>
+            </p:cNvPr>
+            <p:cNvSpPr txBox="1"/>
+            <p:nvPr/>
+          </p:nvSpPr>
+          <p:spPr>
+            <a:xfrm>
+              <a:off x="484471" y="1627309"/>
+              <a:ext cx="2164416" cy="461665"/>
+            </a:xfrm>
+            <a:prstGeom prst="rect">
+              <a:avLst/>
+            </a:prstGeom>
+            <a:noFill/>
+          </p:spPr>
+          <p:txBody>
+            <a:bodyPr wrap="square" rtlCol="0">
+              <a:spAutoFit/>
+            </a:bodyPr>
+            <a:lstStyle/>
+            <a:p>
+              <a:r>
+                <a:rPr lang="en-IN" sz="1200">
+                  <a:solidFill>
+                    <a:schemeClr val="tx2"/>
+                  </a:solidFill>
+                  <a:latin typeface="Arial" pitchFamily="34" charset="0"/>
+                  <a:cs typeface="Arial" pitchFamily="34" charset="0"/>
+                </a:rPr>
+                <a:t>2d pattern slices (magnitude)</a:t>
+              </a:r>
+            </a:p>
+            <a:p>
+              <a:r>
+                <a:rPr lang="en-IN" sz="1200">
+                  <a:solidFill>
+                    <a:schemeClr val="tx2"/>
+                  </a:solidFill>
+                  <a:latin typeface="Arial" pitchFamily="34" charset="0"/>
+                  <a:cs typeface="Arial" pitchFamily="34" charset="0"/>
+                </a:rPr>
+                <a:t>S-parameter touchstone file</a:t>
+              </a:r>
+            </a:p>
+          </p:txBody>
+        </p:sp>
+        <p:sp>
+          <p:nvSpPr>
+            <p:cNvPr id="21" name="TextBox 20">
+              <a:extLst>
+                <a:ext uri="{FF2B5EF4-FFF2-40B4-BE49-F238E27FC236}">
+                  <a16:creationId xmlns:a16="http://schemas.microsoft.com/office/drawing/2014/main" id="{EC34AB53-924E-AA21-3507-5C5ACF0B8067}"/>
+                </a:ext>
+              </a:extLst>
+            </p:cNvPr>
+            <p:cNvSpPr txBox="1"/>
+            <p:nvPr/>
+          </p:nvSpPr>
+          <p:spPr>
+            <a:xfrm>
+              <a:off x="446046" y="3051918"/>
+              <a:ext cx="2178050" cy="461665"/>
+            </a:xfrm>
+            <a:prstGeom prst="rect">
+              <a:avLst/>
+            </a:prstGeom>
+            <a:noFill/>
+          </p:spPr>
+          <p:txBody>
+            <a:bodyPr wrap="square" rtlCol="0">
+              <a:spAutoFit/>
+            </a:bodyPr>
+            <a:lstStyle/>
+            <a:p>
+              <a:r>
+                <a:rPr lang="en-IN" sz="1200">
+                  <a:solidFill>
+                    <a:schemeClr val="tx2"/>
+                  </a:solidFill>
+                  <a:latin typeface="Arial" pitchFamily="34" charset="0"/>
+                  <a:cs typeface="Arial" pitchFamily="34" charset="0"/>
+                </a:rPr>
+                <a:t>2d pattern slices (magnitude)</a:t>
+              </a:r>
+            </a:p>
+            <a:p>
+              <a:r>
+                <a:rPr lang="en-IN" sz="1200">
+                  <a:solidFill>
+                    <a:schemeClr val="tx2"/>
+                  </a:solidFill>
+                  <a:latin typeface="Arial" pitchFamily="34" charset="0"/>
+                  <a:cs typeface="Arial" pitchFamily="34" charset="0"/>
+                </a:rPr>
+                <a:t>S-parameter touchstone file</a:t>
+              </a:r>
+            </a:p>
+          </p:txBody>
+        </p:sp>
+      </p:grpSp>
+      <p:sp>
+        <p:nvSpPr>
+          <p:cNvPr id="60" name="TextBox 59">
+            <a:extLst>
+              <a:ext uri="{FF2B5EF4-FFF2-40B4-BE49-F238E27FC236}">
+                <a16:creationId xmlns:a16="http://schemas.microsoft.com/office/drawing/2014/main" id="{13391C90-9E90-8B25-8835-ECEC7A29CEA2}"/>
+              </a:ext>
+            </a:extLst>
+          </p:cNvPr>
+          <p:cNvSpPr txBox="1"/>
+          <p:nvPr/>
+        </p:nvSpPr>
+        <p:spPr>
+          <a:xfrm>
+            <a:off x="909567" y="834994"/>
+            <a:ext cx="3685624" cy="338554"/>
+          </a:xfrm>
+          <a:prstGeom prst="rect">
+            <a:avLst/>
+          </a:prstGeom>
+          <a:noFill/>
+          <a:ln>
+            <a:solidFill>
+              <a:srgbClr val="FF0000"/>
+            </a:solidFill>
+          </a:ln>
+        </p:spPr>
+        <p:txBody>
+          <a:bodyPr wrap="none" rtlCol="0">
+            <a:spAutoFit/>
+          </a:bodyPr>
           <a:lstStyle/>
           <a:p>
             <a:r>
-              <a:rPr lang="en-US" dirty="0">
-                <a:latin typeface="Arial"/>
-                <a:cs typeface="Arial"/>
+              <a:rPr lang="en-IN" sz="1600">
+                <a:solidFill>
+                  <a:srgbClr val="FF0000"/>
+                </a:solidFill>
+                <a:latin typeface="Arial" pitchFamily="34" charset="0"/>
+                <a:cs typeface="Arial" pitchFamily="34" charset="0"/>
               </a:rPr>
-              <a:t>@Sekhar – add slide about connecting </a:t>
+              <a:t>Convert image into 2D slice data (26a)</a:t>
             </a:r>
+          </a:p>
+        </p:txBody>
+      </p:sp>
+      <p:grpSp>
+        <p:nvGrpSpPr>
+          <p:cNvPr id="84" name="Group 83">
+            <a:extLst>
+              <a:ext uri="{FF2B5EF4-FFF2-40B4-BE49-F238E27FC236}">
+                <a16:creationId xmlns:a16="http://schemas.microsoft.com/office/drawing/2014/main" id="{5B6C4C19-187E-ACC9-260C-07A345443F83}"/>
+              </a:ext>
+            </a:extLst>
+          </p:cNvPr>
+          <p:cNvGrpSpPr/>
+          <p:nvPr/>
+        </p:nvGrpSpPr>
+        <p:grpSpPr>
+          <a:xfrm>
+            <a:off x="206078" y="3284751"/>
+            <a:ext cx="10217054" cy="3246831"/>
+            <a:chOff x="498502" y="3123269"/>
+            <a:chExt cx="10217054" cy="3246831"/>
+          </a:xfrm>
+        </p:grpSpPr>
+        <p:sp>
+          <p:nvSpPr>
+            <p:cNvPr id="3" name="Rectangle 2">
+              <a:extLst>
+                <a:ext uri="{FF2B5EF4-FFF2-40B4-BE49-F238E27FC236}">
+                  <a16:creationId xmlns:a16="http://schemas.microsoft.com/office/drawing/2014/main" id="{8EB32620-6514-05B7-1DC4-C00BD8F6C570}"/>
+                </a:ext>
+              </a:extLst>
+            </p:cNvPr>
+            <p:cNvSpPr/>
+            <p:nvPr/>
+          </p:nvSpPr>
+          <p:spPr>
+            <a:xfrm>
+              <a:off x="5070508" y="4012426"/>
+              <a:ext cx="2784329" cy="2332656"/>
+            </a:xfrm>
+            <a:prstGeom prst="rect">
+              <a:avLst/>
+            </a:prstGeom>
+            <a:noFill/>
+            <a:ln>
+              <a:solidFill>
+                <a:schemeClr val="tx2"/>
+              </a:solidFill>
+            </a:ln>
+          </p:spPr>
+          <p:style>
+            <a:lnRef idx="2">
+              <a:schemeClr val="accent1">
+                <a:shade val="50000"/>
+              </a:schemeClr>
+            </a:lnRef>
+            <a:fillRef idx="1">
+              <a:schemeClr val="accent1"/>
+            </a:fillRef>
+            <a:effectRef idx="0">
+              <a:schemeClr val="accent1"/>
+            </a:effectRef>
+            <a:fontRef idx="minor">
+              <a:schemeClr val="lt1"/>
+            </a:fontRef>
+          </p:style>
+          <p:txBody>
+            <a:bodyPr rtlCol="0" anchor="ctr"/>
+            <a:lstStyle/>
+            <a:p>
+              <a:pPr algn="ctr"/>
+              <a:endParaRPr lang="en-IN" b="1">
+                <a:latin typeface="Arial" pitchFamily="34" charset="0"/>
+                <a:cs typeface="Arial" pitchFamily="34" charset="0"/>
+              </a:endParaRPr>
+            </a:p>
+          </p:txBody>
+        </p:sp>
+        <p:sp>
+          <p:nvSpPr>
+            <p:cNvPr id="4" name="TextBox 3">
+              <a:extLst>
+                <a:ext uri="{FF2B5EF4-FFF2-40B4-BE49-F238E27FC236}">
+                  <a16:creationId xmlns:a16="http://schemas.microsoft.com/office/drawing/2014/main" id="{A0C26F59-32DA-172F-BB1A-1C507A41BC09}"/>
+                </a:ext>
+              </a:extLst>
+            </p:cNvPr>
+            <p:cNvSpPr txBox="1"/>
+            <p:nvPr/>
+          </p:nvSpPr>
+          <p:spPr>
+            <a:xfrm>
+              <a:off x="5397540" y="4083987"/>
+              <a:ext cx="2121158" cy="369332"/>
+            </a:xfrm>
+            <a:prstGeom prst="rect">
+              <a:avLst/>
+            </a:prstGeom>
+            <a:noFill/>
+          </p:spPr>
+          <p:txBody>
+            <a:bodyPr wrap="none" rtlCol="0">
+              <a:spAutoFit/>
+            </a:bodyPr>
+            <a:lstStyle/>
+            <a:p>
+              <a:r>
+                <a:rPr lang="en-IN">
+                  <a:latin typeface="Arial" pitchFamily="34" charset="0"/>
+                  <a:cs typeface="Arial" pitchFamily="34" charset="0"/>
+                </a:rPr>
+                <a:t>Measured Antenna</a:t>
+              </a:r>
+            </a:p>
+          </p:txBody>
+        </p:sp>
+        <p:sp>
+          <p:nvSpPr>
+            <p:cNvPr id="9" name="Rectangle 8">
+              <a:extLst>
+                <a:ext uri="{FF2B5EF4-FFF2-40B4-BE49-F238E27FC236}">
+                  <a16:creationId xmlns:a16="http://schemas.microsoft.com/office/drawing/2014/main" id="{6CC6DD36-7485-37FF-A48C-C7933BB97A71}"/>
+                </a:ext>
+              </a:extLst>
+            </p:cNvPr>
+            <p:cNvSpPr/>
+            <p:nvPr/>
+          </p:nvSpPr>
+          <p:spPr>
+            <a:xfrm>
+              <a:off x="498502" y="4382280"/>
+              <a:ext cx="2178050" cy="685800"/>
+            </a:xfrm>
+            <a:prstGeom prst="rect">
+              <a:avLst/>
+            </a:prstGeom>
+            <a:noFill/>
+            <a:ln>
+              <a:solidFill>
+                <a:schemeClr val="tx2"/>
+              </a:solidFill>
+            </a:ln>
+          </p:spPr>
+          <p:style>
+            <a:lnRef idx="2">
+              <a:schemeClr val="accent1">
+                <a:shade val="50000"/>
+              </a:schemeClr>
+            </a:lnRef>
+            <a:fillRef idx="1">
+              <a:schemeClr val="accent1"/>
+            </a:fillRef>
+            <a:effectRef idx="0">
+              <a:schemeClr val="accent1"/>
+            </a:effectRef>
+            <a:fontRef idx="minor">
+              <a:schemeClr val="lt1"/>
+            </a:fontRef>
+          </p:style>
+          <p:txBody>
+            <a:bodyPr rtlCol="0" anchor="ctr"/>
+            <a:lstStyle/>
+            <a:p>
+              <a:pPr algn="ctr"/>
+              <a:endParaRPr lang="en-IN" b="1">
+                <a:latin typeface="Arial" pitchFamily="34" charset="0"/>
+                <a:cs typeface="Arial" pitchFamily="34" charset="0"/>
+              </a:endParaRPr>
+            </a:p>
+          </p:txBody>
+        </p:sp>
+        <p:sp>
+          <p:nvSpPr>
+            <p:cNvPr id="10" name="TextBox 9">
+              <a:extLst>
+                <a:ext uri="{FF2B5EF4-FFF2-40B4-BE49-F238E27FC236}">
+                  <a16:creationId xmlns:a16="http://schemas.microsoft.com/office/drawing/2014/main" id="{59ECD501-5779-226C-0355-75CD4A10A1FD}"/>
+                </a:ext>
+              </a:extLst>
+            </p:cNvPr>
+            <p:cNvSpPr txBox="1"/>
+            <p:nvPr/>
+          </p:nvSpPr>
+          <p:spPr>
+            <a:xfrm>
+              <a:off x="762028" y="4062948"/>
+              <a:ext cx="1659429" cy="369332"/>
+            </a:xfrm>
+            <a:prstGeom prst="rect">
+              <a:avLst/>
+            </a:prstGeom>
+            <a:noFill/>
+          </p:spPr>
+          <p:txBody>
+            <a:bodyPr wrap="none" rtlCol="0">
+              <a:spAutoFit/>
+            </a:bodyPr>
+            <a:lstStyle/>
+            <a:p>
+              <a:r>
+                <a:rPr lang="en-IN">
+                  <a:latin typeface="Arial" pitchFamily="34" charset="0"/>
+                  <a:cs typeface="Arial" pitchFamily="34" charset="0"/>
+                </a:rPr>
+                <a:t>3p simulations</a:t>
+              </a:r>
+            </a:p>
+          </p:txBody>
+        </p:sp>
+        <p:sp>
+          <p:nvSpPr>
+            <p:cNvPr id="16" name="Rectangle 15">
+              <a:extLst>
+                <a:ext uri="{FF2B5EF4-FFF2-40B4-BE49-F238E27FC236}">
+                  <a16:creationId xmlns:a16="http://schemas.microsoft.com/office/drawing/2014/main" id="{B9542408-F35F-0D8E-BE43-E9C5CB1FA114}"/>
+                </a:ext>
+              </a:extLst>
+            </p:cNvPr>
+            <p:cNvSpPr/>
+            <p:nvPr/>
+          </p:nvSpPr>
+          <p:spPr>
+            <a:xfrm>
+              <a:off x="8504304" y="3123269"/>
+              <a:ext cx="2178050" cy="685800"/>
+            </a:xfrm>
+            <a:prstGeom prst="rect">
+              <a:avLst/>
+            </a:prstGeom>
+            <a:noFill/>
+            <a:ln>
+              <a:solidFill>
+                <a:schemeClr val="tx2"/>
+              </a:solidFill>
+            </a:ln>
+          </p:spPr>
+          <p:style>
+            <a:lnRef idx="2">
+              <a:schemeClr val="accent1">
+                <a:shade val="50000"/>
+              </a:schemeClr>
+            </a:lnRef>
+            <a:fillRef idx="1">
+              <a:schemeClr val="accent1"/>
+            </a:fillRef>
+            <a:effectRef idx="0">
+              <a:schemeClr val="accent1"/>
+            </a:effectRef>
+            <a:fontRef idx="minor">
+              <a:schemeClr val="lt1"/>
+            </a:fontRef>
+          </p:style>
+          <p:txBody>
+            <a:bodyPr rtlCol="0" anchor="ctr"/>
+            <a:lstStyle/>
+            <a:p>
+              <a:pPr algn="ctr"/>
+              <a:endParaRPr lang="en-IN" b="1">
+                <a:latin typeface="Arial" pitchFamily="34" charset="0"/>
+                <a:cs typeface="Arial" pitchFamily="34" charset="0"/>
+              </a:endParaRPr>
+            </a:p>
+          </p:txBody>
+        </p:sp>
+        <p:sp>
+          <p:nvSpPr>
+            <p:cNvPr id="17" name="TextBox 16">
+              <a:extLst>
+                <a:ext uri="{FF2B5EF4-FFF2-40B4-BE49-F238E27FC236}">
+                  <a16:creationId xmlns:a16="http://schemas.microsoft.com/office/drawing/2014/main" id="{F291963D-8762-9D94-BEDE-D5917F8FF701}"/>
+                </a:ext>
+              </a:extLst>
+            </p:cNvPr>
+            <p:cNvSpPr txBox="1"/>
+            <p:nvPr/>
+          </p:nvSpPr>
+          <p:spPr>
+            <a:xfrm>
+              <a:off x="8620111" y="3262927"/>
+              <a:ext cx="2095445" cy="369332"/>
+            </a:xfrm>
+            <a:prstGeom prst="rect">
+              <a:avLst/>
+            </a:prstGeom>
+            <a:noFill/>
+          </p:spPr>
+          <p:txBody>
+            <a:bodyPr wrap="none" rtlCol="0">
+              <a:spAutoFit/>
+            </a:bodyPr>
+            <a:lstStyle/>
+            <a:p>
+              <a:r>
+                <a:rPr lang="en-IN" dirty="0">
+                  <a:latin typeface="Arial" pitchFamily="34" charset="0"/>
+                  <a:cs typeface="Arial" pitchFamily="34" charset="0"/>
+                </a:rPr>
+                <a:t>System Simulation</a:t>
+              </a:r>
+            </a:p>
+          </p:txBody>
+        </p:sp>
+        <p:sp>
+          <p:nvSpPr>
+            <p:cNvPr id="22" name="TextBox 21">
+              <a:extLst>
+                <a:ext uri="{FF2B5EF4-FFF2-40B4-BE49-F238E27FC236}">
+                  <a16:creationId xmlns:a16="http://schemas.microsoft.com/office/drawing/2014/main" id="{C26B1198-3B2A-2AA4-CC7E-C4302EC78625}"/>
+                </a:ext>
+              </a:extLst>
+            </p:cNvPr>
+            <p:cNvSpPr txBox="1"/>
+            <p:nvPr/>
+          </p:nvSpPr>
+          <p:spPr>
+            <a:xfrm>
+              <a:off x="518929" y="4492435"/>
+              <a:ext cx="2164416" cy="461665"/>
+            </a:xfrm>
+            <a:prstGeom prst="rect">
+              <a:avLst/>
+            </a:prstGeom>
+            <a:noFill/>
+          </p:spPr>
+          <p:txBody>
+            <a:bodyPr wrap="square" rtlCol="0">
+              <a:spAutoFit/>
+            </a:bodyPr>
+            <a:lstStyle/>
+            <a:p>
+              <a:r>
+                <a:rPr lang="en-IN" sz="1200">
+                  <a:solidFill>
+                    <a:schemeClr val="tx2"/>
+                  </a:solidFill>
+                  <a:latin typeface="Arial" pitchFamily="34" charset="0"/>
+                  <a:cs typeface="Arial" pitchFamily="34" charset="0"/>
+                </a:rPr>
+                <a:t>3d complex pattern data</a:t>
+              </a:r>
+            </a:p>
+            <a:p>
+              <a:r>
+                <a:rPr lang="en-IN" sz="1200">
+                  <a:solidFill>
+                    <a:schemeClr val="tx2"/>
+                  </a:solidFill>
+                  <a:latin typeface="Arial" pitchFamily="34" charset="0"/>
+                  <a:cs typeface="Arial" pitchFamily="34" charset="0"/>
+                </a:rPr>
+                <a:t>S-parameter touchstone file</a:t>
+              </a:r>
+            </a:p>
+          </p:txBody>
+        </p:sp>
+        <p:sp>
+          <p:nvSpPr>
+            <p:cNvPr id="25" name="Rectangle 24">
+              <a:extLst>
+                <a:ext uri="{FF2B5EF4-FFF2-40B4-BE49-F238E27FC236}">
+                  <a16:creationId xmlns:a16="http://schemas.microsoft.com/office/drawing/2014/main" id="{F1AE17E3-423D-C6B2-C84D-604BC1060676}"/>
+                </a:ext>
+              </a:extLst>
+            </p:cNvPr>
+            <p:cNvSpPr/>
+            <p:nvPr/>
+          </p:nvSpPr>
+          <p:spPr>
+            <a:xfrm>
+              <a:off x="499771" y="5684300"/>
+              <a:ext cx="2178050" cy="685800"/>
+            </a:xfrm>
+            <a:prstGeom prst="rect">
+              <a:avLst/>
+            </a:prstGeom>
+            <a:noFill/>
+            <a:ln>
+              <a:solidFill>
+                <a:schemeClr val="tx2"/>
+              </a:solidFill>
+            </a:ln>
+          </p:spPr>
+          <p:style>
+            <a:lnRef idx="2">
+              <a:schemeClr val="accent1">
+                <a:shade val="50000"/>
+              </a:schemeClr>
+            </a:lnRef>
+            <a:fillRef idx="1">
+              <a:schemeClr val="accent1"/>
+            </a:fillRef>
+            <a:effectRef idx="0">
+              <a:schemeClr val="accent1"/>
+            </a:effectRef>
+            <a:fontRef idx="minor">
+              <a:schemeClr val="lt1"/>
+            </a:fontRef>
+          </p:style>
+          <p:txBody>
+            <a:bodyPr rtlCol="0" anchor="ctr"/>
+            <a:lstStyle/>
+            <a:p>
+              <a:pPr algn="ctr"/>
+              <a:endParaRPr lang="en-IN" b="1">
+                <a:latin typeface="Arial" pitchFamily="34" charset="0"/>
+                <a:cs typeface="Arial" pitchFamily="34" charset="0"/>
+              </a:endParaRPr>
+            </a:p>
+          </p:txBody>
+        </p:sp>
+        <p:sp>
+          <p:nvSpPr>
+            <p:cNvPr id="26" name="TextBox 25">
+              <a:extLst>
+                <a:ext uri="{FF2B5EF4-FFF2-40B4-BE49-F238E27FC236}">
+                  <a16:creationId xmlns:a16="http://schemas.microsoft.com/office/drawing/2014/main" id="{2FD367B5-5DC1-51C3-35E7-373F70E8EDDA}"/>
+                </a:ext>
+              </a:extLst>
+            </p:cNvPr>
+            <p:cNvSpPr txBox="1"/>
+            <p:nvPr/>
+          </p:nvSpPr>
+          <p:spPr>
+            <a:xfrm>
+              <a:off x="872959" y="5388765"/>
+              <a:ext cx="1595309" cy="369332"/>
+            </a:xfrm>
+            <a:prstGeom prst="rect">
+              <a:avLst/>
+            </a:prstGeom>
+            <a:noFill/>
+          </p:spPr>
+          <p:txBody>
+            <a:bodyPr wrap="square" rtlCol="0">
+              <a:spAutoFit/>
+            </a:bodyPr>
+            <a:lstStyle/>
+            <a:p>
+              <a:r>
+                <a:rPr lang="en-IN">
+                  <a:latin typeface="Arial" pitchFamily="34" charset="0"/>
+                  <a:cs typeface="Arial" pitchFamily="34" charset="0"/>
+                </a:rPr>
+                <a:t>Measurement</a:t>
+              </a:r>
+            </a:p>
+          </p:txBody>
+        </p:sp>
+        <p:sp>
+          <p:nvSpPr>
+            <p:cNvPr id="27" name="TextBox 26">
+              <a:extLst>
+                <a:ext uri="{FF2B5EF4-FFF2-40B4-BE49-F238E27FC236}">
+                  <a16:creationId xmlns:a16="http://schemas.microsoft.com/office/drawing/2014/main" id="{00D4C5DC-7839-9A99-7706-4C2677732246}"/>
+                </a:ext>
+              </a:extLst>
+            </p:cNvPr>
+            <p:cNvSpPr txBox="1"/>
+            <p:nvPr/>
+          </p:nvSpPr>
+          <p:spPr>
+            <a:xfrm>
+              <a:off x="558683" y="5764637"/>
+              <a:ext cx="2090204" cy="461665"/>
+            </a:xfrm>
+            <a:prstGeom prst="rect">
+              <a:avLst/>
+            </a:prstGeom>
+            <a:noFill/>
+          </p:spPr>
+          <p:txBody>
+            <a:bodyPr wrap="square" rtlCol="0">
+              <a:spAutoFit/>
+            </a:bodyPr>
+            <a:lstStyle/>
+            <a:p>
+              <a:r>
+                <a:rPr lang="en-IN" sz="1200">
+                  <a:solidFill>
+                    <a:schemeClr val="tx2"/>
+                  </a:solidFill>
+                  <a:latin typeface="Arial" pitchFamily="34" charset="0"/>
+                  <a:cs typeface="Arial" pitchFamily="34" charset="0"/>
+                </a:rPr>
+                <a:t>3d complex pattern data </a:t>
+              </a:r>
+            </a:p>
+            <a:p>
+              <a:r>
+                <a:rPr lang="en-IN" sz="1200">
+                  <a:solidFill>
+                    <a:schemeClr val="tx2"/>
+                  </a:solidFill>
+                  <a:latin typeface="Arial" pitchFamily="34" charset="0"/>
+                  <a:cs typeface="Arial" pitchFamily="34" charset="0"/>
+                </a:rPr>
+                <a:t>S-parameter touchstone file</a:t>
+              </a:r>
+            </a:p>
+          </p:txBody>
+        </p:sp>
+        <p:cxnSp>
+          <p:nvCxnSpPr>
+            <p:cNvPr id="29" name="Straight Arrow Connector 28">
+              <a:extLst>
+                <a:ext uri="{FF2B5EF4-FFF2-40B4-BE49-F238E27FC236}">
+                  <a16:creationId xmlns:a16="http://schemas.microsoft.com/office/drawing/2014/main" id="{45006BE6-5B7C-B8DD-4375-4D8BFA7B4AA6}"/>
+                </a:ext>
+              </a:extLst>
+            </p:cNvPr>
+            <p:cNvCxnSpPr>
+              <a:cxnSpLocks/>
+              <a:stCxn id="22" idx="3"/>
+            </p:cNvCxnSpPr>
+            <p:nvPr/>
+          </p:nvCxnSpPr>
+          <p:spPr>
+            <a:xfrm flipV="1">
+              <a:off x="2683345" y="4723267"/>
+              <a:ext cx="2404223" cy="1"/>
+            </a:xfrm>
+            <a:prstGeom prst="straightConnector1">
+              <a:avLst/>
+            </a:prstGeom>
+            <a:ln w="12700">
+              <a:solidFill>
+                <a:schemeClr val="tx2"/>
+              </a:solidFill>
+              <a:tailEnd type="triangle"/>
+            </a:ln>
+          </p:spPr>
+          <p:style>
+            <a:lnRef idx="1">
+              <a:schemeClr val="accent1"/>
+            </a:lnRef>
+            <a:fillRef idx="0">
+              <a:schemeClr val="accent1"/>
+            </a:fillRef>
+            <a:effectRef idx="0">
+              <a:schemeClr val="accent1"/>
+            </a:effectRef>
+            <a:fontRef idx="minor">
+              <a:schemeClr val="tx1"/>
+            </a:fontRef>
+          </p:style>
+        </p:cxnSp>
+        <p:cxnSp>
+          <p:nvCxnSpPr>
+            <p:cNvPr id="30" name="Straight Arrow Connector 29">
+              <a:extLst>
+                <a:ext uri="{FF2B5EF4-FFF2-40B4-BE49-F238E27FC236}">
+                  <a16:creationId xmlns:a16="http://schemas.microsoft.com/office/drawing/2014/main" id="{899C92D8-79D0-9D54-9778-6B07844112F7}"/>
+                </a:ext>
+              </a:extLst>
+            </p:cNvPr>
+            <p:cNvCxnSpPr>
+              <a:cxnSpLocks/>
+            </p:cNvCxnSpPr>
+            <p:nvPr/>
+          </p:nvCxnSpPr>
+          <p:spPr>
+            <a:xfrm>
+              <a:off x="2700575" y="5972946"/>
+              <a:ext cx="2386993" cy="0"/>
+            </a:xfrm>
+            <a:prstGeom prst="straightConnector1">
+              <a:avLst/>
+            </a:prstGeom>
+            <a:ln w="12700">
+              <a:solidFill>
+                <a:schemeClr val="tx2"/>
+              </a:solidFill>
+              <a:tailEnd type="triangle"/>
+            </a:ln>
+          </p:spPr>
+          <p:style>
+            <a:lnRef idx="1">
+              <a:schemeClr val="accent1"/>
+            </a:lnRef>
+            <a:fillRef idx="0">
+              <a:schemeClr val="accent1"/>
+            </a:fillRef>
+            <a:effectRef idx="0">
+              <a:schemeClr val="accent1"/>
+            </a:effectRef>
+            <a:fontRef idx="minor">
+              <a:schemeClr val="tx1"/>
+            </a:fontRef>
+          </p:style>
+        </p:cxnSp>
+        <p:cxnSp>
+          <p:nvCxnSpPr>
+            <p:cNvPr id="51" name="Straight Arrow Connector 50">
+              <a:extLst>
+                <a:ext uri="{FF2B5EF4-FFF2-40B4-BE49-F238E27FC236}">
+                  <a16:creationId xmlns:a16="http://schemas.microsoft.com/office/drawing/2014/main" id="{0A049173-DB95-8F15-B4AF-EF12622EE0BC}"/>
+                </a:ext>
+              </a:extLst>
+            </p:cNvPr>
+            <p:cNvCxnSpPr>
+              <a:cxnSpLocks/>
+              <a:stCxn id="3" idx="3"/>
+              <a:endCxn id="3" idx="3"/>
+            </p:cNvCxnSpPr>
+            <p:nvPr/>
+          </p:nvCxnSpPr>
+          <p:spPr>
+            <a:xfrm>
+              <a:off x="7854837" y="5178754"/>
+              <a:ext cx="0" cy="0"/>
+            </a:xfrm>
+            <a:prstGeom prst="straightConnector1">
+              <a:avLst/>
+            </a:prstGeom>
+            <a:ln w="9525">
+              <a:solidFill>
+                <a:schemeClr val="accent5">
+                  <a:lumMod val="75000"/>
+                </a:schemeClr>
+              </a:solidFill>
+              <a:tailEnd type="triangle"/>
+            </a:ln>
+          </p:spPr>
+          <p:style>
+            <a:lnRef idx="1">
+              <a:schemeClr val="accent1"/>
+            </a:lnRef>
+            <a:fillRef idx="0">
+              <a:schemeClr val="accent1"/>
+            </a:fillRef>
+            <a:effectRef idx="0">
+              <a:schemeClr val="accent1"/>
+            </a:effectRef>
+            <a:fontRef idx="minor">
+              <a:schemeClr val="tx1"/>
+            </a:fontRef>
+          </p:style>
+        </p:cxnSp>
+        <p:pic>
+          <p:nvPicPr>
+            <p:cNvPr id="74" name="Picture 73">
+              <a:extLst>
+                <a:ext uri="{FF2B5EF4-FFF2-40B4-BE49-F238E27FC236}">
+                  <a16:creationId xmlns:a16="http://schemas.microsoft.com/office/drawing/2014/main" id="{8F32028D-10BF-F1EC-95A3-7EEB7312E526}"/>
+                </a:ext>
+              </a:extLst>
+            </p:cNvPr>
+            <p:cNvPicPr>
+              <a:picLocks noChangeAspect="1"/>
+            </p:cNvPicPr>
+            <p:nvPr/>
+          </p:nvPicPr>
+          <p:blipFill>
+            <a:blip r:embed="rId3"/>
+            <a:stretch>
+              <a:fillRect/>
+            </a:stretch>
+          </p:blipFill>
+          <p:spPr>
+            <a:xfrm>
+              <a:off x="2695473" y="4994115"/>
+              <a:ext cx="1589963" cy="707984"/>
+            </a:xfrm>
+            <a:prstGeom prst="rect">
+              <a:avLst/>
+            </a:prstGeom>
+            <a:ln>
+              <a:solidFill>
+                <a:schemeClr val="tx2"/>
+              </a:solidFill>
+            </a:ln>
+          </p:spPr>
+        </p:pic>
+        <p:pic>
+          <p:nvPicPr>
+            <p:cNvPr id="68" name="Picture 67">
+              <a:extLst>
+                <a:ext uri="{FF2B5EF4-FFF2-40B4-BE49-F238E27FC236}">
+                  <a16:creationId xmlns:a16="http://schemas.microsoft.com/office/drawing/2014/main" id="{55CA4139-F865-E21C-1A02-D8DC4F768D73}"/>
+                </a:ext>
+              </a:extLst>
+            </p:cNvPr>
+            <p:cNvPicPr>
+              <a:picLocks noChangeAspect="1"/>
+            </p:cNvPicPr>
+            <p:nvPr/>
+          </p:nvPicPr>
+          <p:blipFill>
+            <a:blip r:embed="rId4"/>
+            <a:stretch>
+              <a:fillRect/>
+            </a:stretch>
+          </p:blipFill>
+          <p:spPr>
+            <a:xfrm>
+              <a:off x="4009657" y="4840247"/>
+              <a:ext cx="886236" cy="976281"/>
+            </a:xfrm>
+            <a:prstGeom prst="rect">
+              <a:avLst/>
+            </a:prstGeom>
+          </p:spPr>
+        </p:pic>
+        <p:pic>
+          <p:nvPicPr>
+            <p:cNvPr id="81" name="Picture 80">
+              <a:extLst>
+                <a:ext uri="{FF2B5EF4-FFF2-40B4-BE49-F238E27FC236}">
+                  <a16:creationId xmlns:a16="http://schemas.microsoft.com/office/drawing/2014/main" id="{479F20E8-23AC-6966-DF94-757AF8BF7FDC}"/>
+                </a:ext>
+              </a:extLst>
+            </p:cNvPr>
+            <p:cNvPicPr>
+              <a:picLocks noChangeAspect="1"/>
+            </p:cNvPicPr>
+            <p:nvPr/>
+          </p:nvPicPr>
+          <p:blipFill>
+            <a:blip r:embed="rId5"/>
+            <a:stretch>
+              <a:fillRect/>
+            </a:stretch>
+          </p:blipFill>
+          <p:spPr>
+            <a:xfrm>
+              <a:off x="5170356" y="4519110"/>
+              <a:ext cx="2640533" cy="1714632"/>
+            </a:xfrm>
+            <a:prstGeom prst="rect">
+              <a:avLst/>
+            </a:prstGeom>
+          </p:spPr>
+        </p:pic>
+      </p:grpSp>
+      <p:sp>
+        <p:nvSpPr>
+          <p:cNvPr id="85" name="TextBox 84">
+            <a:extLst>
+              <a:ext uri="{FF2B5EF4-FFF2-40B4-BE49-F238E27FC236}">
+                <a16:creationId xmlns:a16="http://schemas.microsoft.com/office/drawing/2014/main" id="{65934A3B-AA8C-B4D9-09E0-E531A306E009}"/>
+              </a:ext>
+            </a:extLst>
+          </p:cNvPr>
+          <p:cNvSpPr txBox="1"/>
+          <p:nvPr/>
+        </p:nvSpPr>
+        <p:spPr>
+          <a:xfrm>
+            <a:off x="414267" y="3813144"/>
+            <a:ext cx="2946128" cy="338554"/>
+          </a:xfrm>
+          <a:prstGeom prst="rect">
+            <a:avLst/>
+          </a:prstGeom>
+          <a:noFill/>
+          <a:ln>
+            <a:solidFill>
+              <a:srgbClr val="FF0000"/>
+            </a:solidFill>
+          </a:ln>
+        </p:spPr>
+        <p:txBody>
+          <a:bodyPr wrap="none" rtlCol="0">
+            <a:spAutoFit/>
+          </a:bodyPr>
+          <a:lstStyle/>
+          <a:p>
             <a:r>
-              <a:rPr lang="en-US" err="1">
-                <a:latin typeface="Arial"/>
-                <a:cs typeface="Arial"/>
+              <a:rPr lang="en-IN" sz="1600" dirty="0">
+                <a:solidFill>
+                  <a:srgbClr val="FF0000"/>
+                </a:solidFill>
+                <a:latin typeface="Arial" pitchFamily="34" charset="0"/>
+                <a:cs typeface="Arial" pitchFamily="34" charset="0"/>
               </a:rPr>
-              <a:t>measuredAntenna</a:t>
+              <a:t>Read 3p file formats : ffs (25b)</a:t>
             </a:r>
+          </a:p>
+        </p:txBody>
+      </p:sp>
+      <p:cxnSp>
+        <p:nvCxnSpPr>
+          <p:cNvPr id="46" name="Straight Arrow Connector 45">
+            <a:extLst>
+              <a:ext uri="{FF2B5EF4-FFF2-40B4-BE49-F238E27FC236}">
+                <a16:creationId xmlns:a16="http://schemas.microsoft.com/office/drawing/2014/main" id="{574DB420-7A50-F860-04D1-A2D7D604B918}"/>
+              </a:ext>
+            </a:extLst>
+          </p:cNvPr>
+          <p:cNvCxnSpPr>
+            <a:cxnSpLocks/>
+            <a:stCxn id="18" idx="2"/>
+            <a:endCxn id="3" idx="0"/>
+          </p:cNvCxnSpPr>
+          <p:nvPr/>
+        </p:nvCxnSpPr>
+        <p:spPr>
+          <a:xfrm flipH="1">
+            <a:off x="6170249" y="2081481"/>
+            <a:ext cx="69655" cy="2092427"/>
+          </a:xfrm>
+          <a:prstGeom prst="straightConnector1">
+            <a:avLst/>
+          </a:prstGeom>
+          <a:ln w="12700">
+            <a:solidFill>
+              <a:srgbClr val="FF0000"/>
+            </a:solidFill>
+            <a:tailEnd type="triangle"/>
+          </a:ln>
+        </p:spPr>
+        <p:style>
+          <a:lnRef idx="1">
+            <a:schemeClr val="accent1"/>
+          </a:lnRef>
+          <a:fillRef idx="0">
+            <a:schemeClr val="accent1"/>
+          </a:fillRef>
+          <a:effectRef idx="0">
+            <a:schemeClr val="accent1"/>
+          </a:effectRef>
+          <a:fontRef idx="minor">
+            <a:schemeClr val="tx1"/>
+          </a:fontRef>
+        </p:style>
+      </p:cxnSp>
+      <p:grpSp>
+        <p:nvGrpSpPr>
+          <p:cNvPr id="90" name="Group 89">
+            <a:extLst>
+              <a:ext uri="{FF2B5EF4-FFF2-40B4-BE49-F238E27FC236}">
+                <a16:creationId xmlns:a16="http://schemas.microsoft.com/office/drawing/2014/main" id="{A3E8640C-DFF8-B513-2BD0-E2727BB34BA8}"/>
+              </a:ext>
+            </a:extLst>
+          </p:cNvPr>
+          <p:cNvGrpSpPr/>
+          <p:nvPr/>
+        </p:nvGrpSpPr>
+        <p:grpSpPr>
+          <a:xfrm>
+            <a:off x="2412949" y="1085842"/>
+            <a:ext cx="6063430" cy="2228637"/>
+            <a:chOff x="2654300" y="1085842"/>
+            <a:chExt cx="6063430" cy="2228637"/>
+          </a:xfrm>
+        </p:grpSpPr>
+        <p:sp>
+          <p:nvSpPr>
+            <p:cNvPr id="18" name="Rectangle 17">
+              <a:extLst>
+                <a:ext uri="{FF2B5EF4-FFF2-40B4-BE49-F238E27FC236}">
+                  <a16:creationId xmlns:a16="http://schemas.microsoft.com/office/drawing/2014/main" id="{8B339B64-6367-850E-616C-8EE79099D8A3}"/>
+                </a:ext>
+              </a:extLst>
+            </p:cNvPr>
+            <p:cNvSpPr/>
+            <p:nvPr/>
+          </p:nvSpPr>
+          <p:spPr>
+            <a:xfrm>
+              <a:off x="5468430" y="1624915"/>
+              <a:ext cx="2025650" cy="456566"/>
+            </a:xfrm>
+            <a:prstGeom prst="rect">
+              <a:avLst/>
+            </a:prstGeom>
+            <a:noFill/>
+            <a:ln>
+              <a:solidFill>
+                <a:schemeClr val="tx2"/>
+              </a:solidFill>
+            </a:ln>
+          </p:spPr>
+          <p:style>
+            <a:lnRef idx="2">
+              <a:schemeClr val="accent1">
+                <a:shade val="50000"/>
+              </a:schemeClr>
+            </a:lnRef>
+            <a:fillRef idx="1">
+              <a:schemeClr val="accent1"/>
+            </a:fillRef>
+            <a:effectRef idx="0">
+              <a:schemeClr val="accent1"/>
+            </a:effectRef>
+            <a:fontRef idx="minor">
+              <a:schemeClr val="lt1"/>
+            </a:fontRef>
+          </p:style>
+          <p:txBody>
+            <a:bodyPr rtlCol="0" anchor="ctr"/>
+            <a:lstStyle/>
+            <a:p>
+              <a:pPr algn="ctr"/>
+              <a:endParaRPr lang="en-IN" b="1">
+                <a:latin typeface="Arial" pitchFamily="34" charset="0"/>
+                <a:cs typeface="Arial" pitchFamily="34" charset="0"/>
+              </a:endParaRPr>
+            </a:p>
+          </p:txBody>
+        </p:sp>
+        <p:sp>
+          <p:nvSpPr>
+            <p:cNvPr id="19" name="TextBox 18">
+              <a:extLst>
+                <a:ext uri="{FF2B5EF4-FFF2-40B4-BE49-F238E27FC236}">
+                  <a16:creationId xmlns:a16="http://schemas.microsoft.com/office/drawing/2014/main" id="{C2CD44EE-0D5E-FE1F-1A4F-B966A8A9E92B}"/>
+                </a:ext>
+              </a:extLst>
+            </p:cNvPr>
+            <p:cNvSpPr txBox="1"/>
+            <p:nvPr/>
+          </p:nvSpPr>
+          <p:spPr>
+            <a:xfrm>
+              <a:off x="5640317" y="1672380"/>
+              <a:ext cx="1802102" cy="369332"/>
+            </a:xfrm>
+            <a:prstGeom prst="rect">
+              <a:avLst/>
+            </a:prstGeom>
+            <a:noFill/>
+          </p:spPr>
+          <p:txBody>
+            <a:bodyPr wrap="square" rtlCol="0">
+              <a:spAutoFit/>
+            </a:bodyPr>
+            <a:lstStyle/>
+            <a:p>
+              <a:r>
+                <a:rPr lang="en-IN" err="1">
+                  <a:latin typeface="Arial" pitchFamily="34" charset="0"/>
+                  <a:cs typeface="Arial" pitchFamily="34" charset="0"/>
+                </a:rPr>
+                <a:t>patternFromAI</a:t>
+              </a:r>
+              <a:endParaRPr lang="en-IN">
+                <a:latin typeface="Arial" pitchFamily="34" charset="0"/>
+                <a:cs typeface="Arial" pitchFamily="34" charset="0"/>
+              </a:endParaRPr>
+            </a:p>
+          </p:txBody>
+        </p:sp>
+        <p:cxnSp>
+          <p:nvCxnSpPr>
+            <p:cNvPr id="38" name="Straight Arrow Connector 37">
+              <a:extLst>
+                <a:ext uri="{FF2B5EF4-FFF2-40B4-BE49-F238E27FC236}">
+                  <a16:creationId xmlns:a16="http://schemas.microsoft.com/office/drawing/2014/main" id="{78AB14AB-AD60-0E10-ED23-A021912859DB}"/>
+                </a:ext>
+              </a:extLst>
+            </p:cNvPr>
+            <p:cNvCxnSpPr>
+              <a:stCxn id="5" idx="3"/>
+              <a:endCxn id="18" idx="1"/>
+            </p:cNvCxnSpPr>
+            <p:nvPr/>
+          </p:nvCxnSpPr>
+          <p:spPr>
+            <a:xfrm flipV="1">
+              <a:off x="2654300" y="1853198"/>
+              <a:ext cx="2814130" cy="32752"/>
+            </a:xfrm>
+            <a:prstGeom prst="straightConnector1">
+              <a:avLst/>
+            </a:prstGeom>
+            <a:ln w="12700">
+              <a:solidFill>
+                <a:schemeClr val="tx2"/>
+              </a:solidFill>
+              <a:tailEnd type="triangle"/>
+            </a:ln>
+          </p:spPr>
+          <p:style>
+            <a:lnRef idx="1">
+              <a:schemeClr val="accent1"/>
+            </a:lnRef>
+            <a:fillRef idx="0">
+              <a:schemeClr val="accent1"/>
+            </a:fillRef>
+            <a:effectRef idx="0">
+              <a:schemeClr val="accent1"/>
+            </a:effectRef>
+            <a:fontRef idx="minor">
+              <a:schemeClr val="tx1"/>
+            </a:fontRef>
+          </p:style>
+        </p:cxnSp>
+        <p:cxnSp>
+          <p:nvCxnSpPr>
+            <p:cNvPr id="48" name="Straight Arrow Connector 47">
+              <a:extLst>
+                <a:ext uri="{FF2B5EF4-FFF2-40B4-BE49-F238E27FC236}">
+                  <a16:creationId xmlns:a16="http://schemas.microsoft.com/office/drawing/2014/main" id="{29783A6E-10F7-0C17-96DE-97D26B8E0F3E}"/>
+                </a:ext>
+              </a:extLst>
+            </p:cNvPr>
+            <p:cNvCxnSpPr>
+              <a:stCxn id="7" idx="3"/>
+              <a:endCxn id="18" idx="1"/>
+            </p:cNvCxnSpPr>
+            <p:nvPr/>
+          </p:nvCxnSpPr>
+          <p:spPr>
+            <a:xfrm flipV="1">
+              <a:off x="2660596" y="1853198"/>
+              <a:ext cx="2807834" cy="1461281"/>
+            </a:xfrm>
+            <a:prstGeom prst="straightConnector1">
+              <a:avLst/>
+            </a:prstGeom>
+            <a:ln w="12700">
+              <a:solidFill>
+                <a:schemeClr val="tx2"/>
+              </a:solidFill>
+              <a:tailEnd type="triangle"/>
+            </a:ln>
+          </p:spPr>
+          <p:style>
+            <a:lnRef idx="1">
+              <a:schemeClr val="accent1"/>
+            </a:lnRef>
+            <a:fillRef idx="0">
+              <a:schemeClr val="accent1"/>
+            </a:fillRef>
+            <a:effectRef idx="0">
+              <a:schemeClr val="accent1"/>
+            </a:effectRef>
+            <a:fontRef idx="minor">
+              <a:schemeClr val="tx1"/>
+            </a:fontRef>
+          </p:style>
+        </p:cxnSp>
+        <p:sp>
+          <p:nvSpPr>
+            <p:cNvPr id="58" name="TextBox 57">
+              <a:extLst>
+                <a:ext uri="{FF2B5EF4-FFF2-40B4-BE49-F238E27FC236}">
+                  <a16:creationId xmlns:a16="http://schemas.microsoft.com/office/drawing/2014/main" id="{B8CE7B3F-C2C5-4EE5-4F3C-DC6EDBAC7A2B}"/>
+                </a:ext>
+              </a:extLst>
+            </p:cNvPr>
+            <p:cNvSpPr txBox="1"/>
+            <p:nvPr/>
+          </p:nvSpPr>
+          <p:spPr>
+            <a:xfrm>
+              <a:off x="5140366" y="1088092"/>
+              <a:ext cx="2489784" cy="338554"/>
+            </a:xfrm>
+            <a:prstGeom prst="rect">
+              <a:avLst/>
+            </a:prstGeom>
+            <a:noFill/>
+          </p:spPr>
+          <p:txBody>
+            <a:bodyPr wrap="none" rtlCol="0">
+              <a:spAutoFit/>
+            </a:bodyPr>
+            <a:lstStyle/>
+            <a:p>
+              <a:r>
+                <a:rPr lang="en-IN" sz="1600">
+                  <a:latin typeface="Arial" pitchFamily="34" charset="0"/>
+                  <a:cs typeface="Arial" pitchFamily="34" charset="0"/>
+                </a:rPr>
+                <a:t>3D pattern reconstruction</a:t>
+              </a:r>
+            </a:p>
+          </p:txBody>
+        </p:sp>
+        <p:pic>
+          <p:nvPicPr>
+            <p:cNvPr id="87" name="Picture 86">
+              <a:extLst>
+                <a:ext uri="{FF2B5EF4-FFF2-40B4-BE49-F238E27FC236}">
+                  <a16:creationId xmlns:a16="http://schemas.microsoft.com/office/drawing/2014/main" id="{42F8AC06-FC26-DB7D-19AF-925DE623CCC5}"/>
+                </a:ext>
+              </a:extLst>
+            </p:cNvPr>
+            <p:cNvPicPr>
+              <a:picLocks noChangeAspect="1"/>
+            </p:cNvPicPr>
+            <p:nvPr/>
+          </p:nvPicPr>
+          <p:blipFill>
+            <a:blip r:embed="rId6"/>
+            <a:stretch>
+              <a:fillRect/>
+            </a:stretch>
+          </p:blipFill>
+          <p:spPr>
+            <a:xfrm>
+              <a:off x="7554002" y="1085842"/>
+              <a:ext cx="1163728" cy="1040384"/>
+            </a:xfrm>
+            <a:prstGeom prst="rect">
+              <a:avLst/>
+            </a:prstGeom>
+          </p:spPr>
+        </p:pic>
+      </p:grpSp>
+      <p:pic>
+        <p:nvPicPr>
+          <p:cNvPr id="56" name="Picture 55">
+            <a:extLst>
+              <a:ext uri="{FF2B5EF4-FFF2-40B4-BE49-F238E27FC236}">
+                <a16:creationId xmlns:a16="http://schemas.microsoft.com/office/drawing/2014/main" id="{EEBFAF46-E2FE-89E8-4195-097FAA650B24}"/>
+              </a:ext>
+            </a:extLst>
+          </p:cNvPr>
+          <p:cNvPicPr>
+            <a:picLocks noChangeAspect="1"/>
+          </p:cNvPicPr>
+          <p:nvPr/>
+        </p:nvPicPr>
+        <p:blipFill>
+          <a:blip r:embed="rId7"/>
+          <a:stretch>
+            <a:fillRect/>
+          </a:stretch>
+        </p:blipFill>
+        <p:spPr>
+          <a:xfrm>
+            <a:off x="1002868" y="1206207"/>
+            <a:ext cx="2820163" cy="2632380"/>
+          </a:xfrm>
+          <a:prstGeom prst="rect">
+            <a:avLst/>
+          </a:prstGeom>
+          <a:ln>
+            <a:solidFill>
+              <a:schemeClr val="tx2"/>
+            </a:solidFill>
+          </a:ln>
+        </p:spPr>
+      </p:pic>
+      <p:grpSp>
+        <p:nvGrpSpPr>
+          <p:cNvPr id="34" name="Group 33">
+            <a:extLst>
+              <a:ext uri="{FF2B5EF4-FFF2-40B4-BE49-F238E27FC236}">
+                <a16:creationId xmlns:a16="http://schemas.microsoft.com/office/drawing/2014/main" id="{B439FBC7-3701-AC95-76B2-786DAF9910E8}"/>
+              </a:ext>
+            </a:extLst>
+          </p:cNvPr>
+          <p:cNvGrpSpPr/>
+          <p:nvPr/>
+        </p:nvGrpSpPr>
+        <p:grpSpPr>
+          <a:xfrm>
+            <a:off x="8228677" y="4245538"/>
+            <a:ext cx="2288707" cy="2548327"/>
+            <a:chOff x="8759032" y="4194524"/>
+            <a:chExt cx="2288707" cy="2548327"/>
+          </a:xfrm>
+        </p:grpSpPr>
+        <p:sp>
+          <p:nvSpPr>
+            <p:cNvPr id="11" name="Rectangle 10">
+              <a:extLst>
+                <a:ext uri="{FF2B5EF4-FFF2-40B4-BE49-F238E27FC236}">
+                  <a16:creationId xmlns:a16="http://schemas.microsoft.com/office/drawing/2014/main" id="{A5BD2A56-A07F-36ED-EBA7-DD359D4C39ED}"/>
+                </a:ext>
+              </a:extLst>
+            </p:cNvPr>
+            <p:cNvSpPr/>
+            <p:nvPr/>
+          </p:nvSpPr>
+          <p:spPr>
+            <a:xfrm>
+              <a:off x="8759032" y="4194524"/>
+              <a:ext cx="2178050" cy="685800"/>
+            </a:xfrm>
+            <a:prstGeom prst="rect">
+              <a:avLst/>
+            </a:prstGeom>
+            <a:noFill/>
+            <a:ln>
+              <a:solidFill>
+                <a:schemeClr val="tx2"/>
+              </a:solidFill>
+            </a:ln>
+          </p:spPr>
+          <p:style>
+            <a:lnRef idx="2">
+              <a:schemeClr val="accent1">
+                <a:shade val="50000"/>
+              </a:schemeClr>
+            </a:lnRef>
+            <a:fillRef idx="1">
+              <a:schemeClr val="accent1"/>
+            </a:fillRef>
+            <a:effectRef idx="0">
+              <a:schemeClr val="accent1"/>
+            </a:effectRef>
+            <a:fontRef idx="minor">
+              <a:schemeClr val="lt1"/>
+            </a:fontRef>
+          </p:style>
+          <p:txBody>
+            <a:bodyPr rtlCol="0" anchor="ctr"/>
+            <a:lstStyle/>
+            <a:p>
+              <a:pPr algn="ctr"/>
+              <a:endParaRPr lang="en-IN" b="1">
+                <a:latin typeface="Arial" pitchFamily="34" charset="0"/>
+                <a:cs typeface="Arial" pitchFamily="34" charset="0"/>
+              </a:endParaRPr>
+            </a:p>
+          </p:txBody>
+        </p:sp>
+        <p:sp>
+          <p:nvSpPr>
+            <p:cNvPr id="14" name="Rectangle 13">
+              <a:extLst>
+                <a:ext uri="{FF2B5EF4-FFF2-40B4-BE49-F238E27FC236}">
+                  <a16:creationId xmlns:a16="http://schemas.microsoft.com/office/drawing/2014/main" id="{DB6B4010-5E04-B656-0A3D-27095278EF1E}"/>
+                </a:ext>
+              </a:extLst>
+            </p:cNvPr>
+            <p:cNvSpPr/>
+            <p:nvPr/>
+          </p:nvSpPr>
+          <p:spPr>
+            <a:xfrm>
+              <a:off x="8792114" y="5056414"/>
+              <a:ext cx="2178050" cy="685800"/>
+            </a:xfrm>
+            <a:prstGeom prst="rect">
+              <a:avLst/>
+            </a:prstGeom>
+            <a:noFill/>
+            <a:ln>
+              <a:solidFill>
+                <a:schemeClr val="tx2"/>
+              </a:solidFill>
+            </a:ln>
+          </p:spPr>
+          <p:style>
+            <a:lnRef idx="2">
+              <a:schemeClr val="accent1">
+                <a:shade val="50000"/>
+              </a:schemeClr>
+            </a:lnRef>
+            <a:fillRef idx="1">
+              <a:schemeClr val="accent1"/>
+            </a:fillRef>
+            <a:effectRef idx="0">
+              <a:schemeClr val="accent1"/>
+            </a:effectRef>
+            <a:fontRef idx="minor">
+              <a:schemeClr val="lt1"/>
+            </a:fontRef>
+          </p:style>
+          <p:txBody>
+            <a:bodyPr rtlCol="0" anchor="ctr"/>
+            <a:lstStyle/>
+            <a:p>
+              <a:pPr algn="ctr"/>
+              <a:endParaRPr lang="en-IN" b="1">
+                <a:latin typeface="Arial" pitchFamily="34" charset="0"/>
+                <a:cs typeface="Arial" pitchFamily="34" charset="0"/>
+              </a:endParaRPr>
+            </a:p>
+          </p:txBody>
+        </p:sp>
+        <p:sp>
+          <p:nvSpPr>
+            <p:cNvPr id="15" name="TextBox 14">
+              <a:extLst>
+                <a:ext uri="{FF2B5EF4-FFF2-40B4-BE49-F238E27FC236}">
+                  <a16:creationId xmlns:a16="http://schemas.microsoft.com/office/drawing/2014/main" id="{5927E02C-7703-68D6-CCEF-5481CA7AB429}"/>
+                </a:ext>
+              </a:extLst>
+            </p:cNvPr>
+            <p:cNvSpPr txBox="1"/>
+            <p:nvPr/>
+          </p:nvSpPr>
+          <p:spPr>
+            <a:xfrm>
+              <a:off x="8982981" y="4344998"/>
+              <a:ext cx="1582484" cy="369332"/>
+            </a:xfrm>
+            <a:prstGeom prst="rect">
+              <a:avLst/>
+            </a:prstGeom>
+            <a:noFill/>
+          </p:spPr>
+          <p:txBody>
+            <a:bodyPr wrap="none" rtlCol="0">
+              <a:spAutoFit/>
+            </a:bodyPr>
+            <a:lstStyle/>
+            <a:p>
+              <a:r>
+                <a:rPr lang="en-IN" dirty="0" err="1">
+                  <a:latin typeface="Arial" pitchFamily="34" charset="0"/>
+                  <a:cs typeface="Arial" pitchFamily="34" charset="0"/>
+                </a:rPr>
+                <a:t>PhasedArray</a:t>
+              </a:r>
+              <a:r>
+                <a:rPr lang="en-IN" dirty="0">
+                  <a:latin typeface="Arial" pitchFamily="34" charset="0"/>
+                  <a:cs typeface="Arial" pitchFamily="34" charset="0"/>
+                </a:rPr>
+                <a:t> </a:t>
+              </a:r>
+            </a:p>
+          </p:txBody>
+        </p:sp>
+        <p:sp>
+          <p:nvSpPr>
+            <p:cNvPr id="23" name="TextBox 22">
+              <a:extLst>
+                <a:ext uri="{FF2B5EF4-FFF2-40B4-BE49-F238E27FC236}">
+                  <a16:creationId xmlns:a16="http://schemas.microsoft.com/office/drawing/2014/main" id="{7F087874-C005-F2AF-9899-9A650C28FDE0}"/>
+                </a:ext>
+              </a:extLst>
+            </p:cNvPr>
+            <p:cNvSpPr txBox="1"/>
+            <p:nvPr/>
+          </p:nvSpPr>
+          <p:spPr>
+            <a:xfrm>
+              <a:off x="9090615" y="5225761"/>
+              <a:ext cx="1415837" cy="369332"/>
+            </a:xfrm>
+            <a:prstGeom prst="rect">
+              <a:avLst/>
+            </a:prstGeom>
+            <a:noFill/>
+          </p:spPr>
+          <p:txBody>
+            <a:bodyPr wrap="none" rtlCol="0">
+              <a:spAutoFit/>
+            </a:bodyPr>
+            <a:lstStyle/>
+            <a:p>
+              <a:r>
+                <a:rPr lang="en-IN" dirty="0">
+                  <a:latin typeface="Arial" pitchFamily="34" charset="0"/>
+                  <a:cs typeface="Arial" pitchFamily="34" charset="0"/>
+                </a:rPr>
+                <a:t>Ray Tracing</a:t>
+              </a:r>
+            </a:p>
+          </p:txBody>
+        </p:sp>
+        <p:sp>
+          <p:nvSpPr>
+            <p:cNvPr id="24" name="Rectangle 23">
+              <a:extLst>
+                <a:ext uri="{FF2B5EF4-FFF2-40B4-BE49-F238E27FC236}">
+                  <a16:creationId xmlns:a16="http://schemas.microsoft.com/office/drawing/2014/main" id="{3A019DEB-5580-4060-C6C9-8B4DCB4DB751}"/>
+                </a:ext>
+              </a:extLst>
+            </p:cNvPr>
+            <p:cNvSpPr/>
+            <p:nvPr/>
+          </p:nvSpPr>
+          <p:spPr>
+            <a:xfrm>
+              <a:off x="8775437" y="6057051"/>
+              <a:ext cx="2178050" cy="685800"/>
+            </a:xfrm>
+            <a:prstGeom prst="rect">
+              <a:avLst/>
+            </a:prstGeom>
+            <a:noFill/>
+            <a:ln>
+              <a:solidFill>
+                <a:schemeClr val="tx2"/>
+              </a:solidFill>
+            </a:ln>
+          </p:spPr>
+          <p:style>
+            <a:lnRef idx="2">
+              <a:schemeClr val="accent1">
+                <a:shade val="50000"/>
+              </a:schemeClr>
+            </a:lnRef>
+            <a:fillRef idx="1">
+              <a:schemeClr val="accent1"/>
+            </a:fillRef>
+            <a:effectRef idx="0">
+              <a:schemeClr val="accent1"/>
+            </a:effectRef>
+            <a:fontRef idx="minor">
+              <a:schemeClr val="lt1"/>
+            </a:fontRef>
+          </p:style>
+          <p:txBody>
+            <a:bodyPr rtlCol="0" anchor="ctr"/>
+            <a:lstStyle/>
+            <a:p>
+              <a:pPr algn="ctr"/>
+              <a:endParaRPr lang="en-IN" b="1">
+                <a:latin typeface="Arial" pitchFamily="34" charset="0"/>
+                <a:cs typeface="Arial" pitchFamily="34" charset="0"/>
+              </a:endParaRPr>
+            </a:p>
+          </p:txBody>
+        </p:sp>
+        <p:sp>
+          <p:nvSpPr>
+            <p:cNvPr id="33" name="TextBox 32">
+              <a:extLst>
+                <a:ext uri="{FF2B5EF4-FFF2-40B4-BE49-F238E27FC236}">
+                  <a16:creationId xmlns:a16="http://schemas.microsoft.com/office/drawing/2014/main" id="{A1A79335-4600-7E70-3D7E-76F0E7C4F63C}"/>
+                </a:ext>
+              </a:extLst>
+            </p:cNvPr>
+            <p:cNvSpPr txBox="1"/>
+            <p:nvPr/>
+          </p:nvSpPr>
+          <p:spPr>
+            <a:xfrm>
+              <a:off x="9246371" y="6176318"/>
+              <a:ext cx="1801368" cy="400110"/>
+            </a:xfrm>
+            <a:prstGeom prst="rect">
+              <a:avLst/>
+            </a:prstGeom>
+            <a:noFill/>
+          </p:spPr>
+          <p:txBody>
+            <a:bodyPr wrap="square" rtlCol="0">
+              <a:spAutoFit/>
+            </a:bodyPr>
+            <a:lstStyle/>
+            <a:p>
+              <a:r>
+                <a:rPr lang="en-US" sz="2000" dirty="0">
+                  <a:latin typeface="Arial" pitchFamily="34" charset="0"/>
+                  <a:cs typeface="Arial" pitchFamily="34" charset="0"/>
+                </a:rPr>
+                <a:t>Satcom </a:t>
+              </a:r>
+            </a:p>
+          </p:txBody>
+        </p:sp>
+      </p:grpSp>
+      <p:sp>
+        <p:nvSpPr>
+          <p:cNvPr id="35" name="TextBox 34">
+            <a:extLst>
+              <a:ext uri="{FF2B5EF4-FFF2-40B4-BE49-F238E27FC236}">
+                <a16:creationId xmlns:a16="http://schemas.microsoft.com/office/drawing/2014/main" id="{39C700AC-1A41-6860-1ECE-18AD6F4D9F62}"/>
+              </a:ext>
+            </a:extLst>
+          </p:cNvPr>
+          <p:cNvSpPr txBox="1"/>
+          <p:nvPr/>
+        </p:nvSpPr>
+        <p:spPr>
+          <a:xfrm>
+            <a:off x="10830750" y="3906915"/>
+            <a:ext cx="2178050" cy="707886"/>
+          </a:xfrm>
+          <a:prstGeom prst="rect">
+            <a:avLst/>
+          </a:prstGeom>
+          <a:noFill/>
+        </p:spPr>
+        <p:txBody>
+          <a:bodyPr wrap="square" rtlCol="0">
+            <a:spAutoFit/>
+          </a:bodyPr>
+          <a:lstStyle/>
+          <a:p>
             <a:r>
-              <a:rPr lang="en-US" dirty="0">
-                <a:latin typeface="Arial"/>
-                <a:cs typeface="Arial"/>
+              <a:rPr lang="en-US" sz="2000" dirty="0">
+                <a:latin typeface="Arial" pitchFamily="34" charset="0"/>
+                <a:cs typeface="Arial" pitchFamily="34" charset="0"/>
               </a:rPr>
-              <a:t> to other </a:t>
+              <a:t>Comms</a:t>
             </a:r>
+          </a:p>
+          <a:p>
             <a:r>
-              <a:rPr lang="en-US">
-                <a:latin typeface="Arial"/>
-                <a:cs typeface="Arial"/>
+              <a:rPr lang="en-US" sz="2000" dirty="0">
+                <a:latin typeface="Arial" pitchFamily="34" charset="0"/>
+                <a:cs typeface="Arial" pitchFamily="34" charset="0"/>
               </a:rPr>
-              <a:t>applications; Sudarshan can augment it with AI-derived pattern</a:t>
+              <a:t>Standards</a:t>
             </a:r>
-            <a:endParaRPr lang="en-US" dirty="0"/>
           </a:p>
         </p:txBody>
       </p:sp>
       <p:sp>
         <p:nvSpPr>
-          <p:cNvPr id="3" name="Content Placeholder 2">
+          <p:cNvPr id="37" name="TextBox 36">
             <a:extLst>
               <a:ext uri="{FF2B5EF4-FFF2-40B4-BE49-F238E27FC236}">
-                <a16:creationId xmlns:a16="http://schemas.microsoft.com/office/drawing/2014/main" id="{252FBFA9-00C2-8FDD-398D-FCFBEE39B8A8}"/>
+                <a16:creationId xmlns:a16="http://schemas.microsoft.com/office/drawing/2014/main" id="{E3797453-2A96-E87B-D213-CD646E854D0D}"/>
               </a:ext>
             </a:extLst>
           </p:cNvPr>
-          <p:cNvSpPr>
-            <a:spLocks noGrp="1"/>
-          </p:cNvSpPr>
-          <p:nvPr>
-            <p:ph idx="1"/>
-          </p:nvPr>
+          <p:cNvSpPr txBox="1"/>
+          <p:nvPr/>
         </p:nvSpPr>
-        <p:spPr/>
+        <p:spPr>
+          <a:xfrm>
+            <a:off x="10896897" y="4749065"/>
+            <a:ext cx="2178050" cy="400110"/>
+          </a:xfrm>
+          <a:prstGeom prst="rect">
+            <a:avLst/>
+          </a:prstGeom>
+          <a:noFill/>
+        </p:spPr>
         <p:txBody>
-          <a:bodyPr vert="horz" lIns="91440" tIns="45720" rIns="91440" bIns="45720" rtlCol="0" anchor="t">
-            <a:noAutofit/>
+          <a:bodyPr wrap="square" rtlCol="0">
+            <a:spAutoFit/>
           </a:bodyPr>
           <a:lstStyle/>
           <a:p>
-            <a:pPr marL="343535" indent="-343535"/>
-            <a:endParaRPr lang="en-US"/>
+            <a:r>
+              <a:rPr lang="en-US" sz="2000" dirty="0">
+                <a:latin typeface="Arial" pitchFamily="34" charset="0"/>
+                <a:cs typeface="Arial" pitchFamily="34" charset="0"/>
+              </a:rPr>
+              <a:t>Radar</a:t>
+            </a:r>
           </a:p>
         </p:txBody>
       </p:sp>
+      <p:cxnSp>
+        <p:nvCxnSpPr>
+          <p:cNvPr id="40" name="Connector: Elbow 39">
+            <a:extLst>
+              <a:ext uri="{FF2B5EF4-FFF2-40B4-BE49-F238E27FC236}">
+                <a16:creationId xmlns:a16="http://schemas.microsoft.com/office/drawing/2014/main" id="{902239E8-6443-B8C6-DACA-5A033157736D}"/>
+              </a:ext>
+            </a:extLst>
+          </p:cNvPr>
+          <p:cNvCxnSpPr/>
+          <p:nvPr/>
+        </p:nvCxnSpPr>
+        <p:spPr>
+          <a:xfrm flipV="1">
+            <a:off x="7562413" y="4680592"/>
+            <a:ext cx="649467" cy="596183"/>
+          </a:xfrm>
+          <a:prstGeom prst="bentConnector3">
+            <a:avLst/>
+          </a:prstGeom>
+          <a:ln w="9525">
+            <a:solidFill>
+              <a:schemeClr val="tx2">
+                <a:lumMod val="75000"/>
+              </a:schemeClr>
+            </a:solidFill>
+            <a:tailEnd type="triangle"/>
+          </a:ln>
+        </p:spPr>
+        <p:style>
+          <a:lnRef idx="1">
+            <a:schemeClr val="accent1"/>
+          </a:lnRef>
+          <a:fillRef idx="0">
+            <a:schemeClr val="accent1"/>
+          </a:fillRef>
+          <a:effectRef idx="0">
+            <a:schemeClr val="accent1"/>
+          </a:effectRef>
+          <a:fontRef idx="minor">
+            <a:schemeClr val="tx1"/>
+          </a:fontRef>
+        </p:style>
+      </p:cxnSp>
+      <p:cxnSp>
+        <p:nvCxnSpPr>
+          <p:cNvPr id="44" name="Connector: Elbow 43">
+            <a:extLst>
+              <a:ext uri="{FF2B5EF4-FFF2-40B4-BE49-F238E27FC236}">
+                <a16:creationId xmlns:a16="http://schemas.microsoft.com/office/drawing/2014/main" id="{C343D541-0D37-47ED-B29B-17DCEFFD3AAA}"/>
+              </a:ext>
+            </a:extLst>
+          </p:cNvPr>
+          <p:cNvCxnSpPr>
+            <a:cxnSpLocks/>
+          </p:cNvCxnSpPr>
+          <p:nvPr/>
+        </p:nvCxnSpPr>
+        <p:spPr>
+          <a:xfrm>
+            <a:off x="7554075" y="5285190"/>
+            <a:ext cx="699346" cy="110092"/>
+          </a:xfrm>
+          <a:prstGeom prst="bentConnector3">
+            <a:avLst/>
+          </a:prstGeom>
+          <a:ln w="9525">
+            <a:solidFill>
+              <a:schemeClr val="tx2">
+                <a:lumMod val="75000"/>
+              </a:schemeClr>
+            </a:solidFill>
+            <a:tailEnd type="triangle"/>
+          </a:ln>
+        </p:spPr>
+        <p:style>
+          <a:lnRef idx="1">
+            <a:schemeClr val="accent1"/>
+          </a:lnRef>
+          <a:fillRef idx="0">
+            <a:schemeClr val="accent1"/>
+          </a:fillRef>
+          <a:effectRef idx="0">
+            <a:schemeClr val="accent1"/>
+          </a:effectRef>
+          <a:fontRef idx="minor">
+            <a:schemeClr val="tx1"/>
+          </a:fontRef>
+        </p:style>
+      </p:cxnSp>
+      <p:cxnSp>
+        <p:nvCxnSpPr>
+          <p:cNvPr id="49" name="Connector: Elbow 48">
+            <a:extLst>
+              <a:ext uri="{FF2B5EF4-FFF2-40B4-BE49-F238E27FC236}">
+                <a16:creationId xmlns:a16="http://schemas.microsoft.com/office/drawing/2014/main" id="{E557E6BE-5E8A-64DC-3AA9-E2212135C618}"/>
+              </a:ext>
+            </a:extLst>
+          </p:cNvPr>
+          <p:cNvCxnSpPr>
+            <a:cxnSpLocks/>
+            <a:endCxn id="24" idx="1"/>
+          </p:cNvCxnSpPr>
+          <p:nvPr/>
+        </p:nvCxnSpPr>
+        <p:spPr>
+          <a:xfrm rot="16200000" flipH="1">
+            <a:off x="7552846" y="5758728"/>
+            <a:ext cx="1055683" cy="328790"/>
+          </a:xfrm>
+          <a:prstGeom prst="bentConnector2">
+            <a:avLst/>
+          </a:prstGeom>
+          <a:ln w="9525">
+            <a:solidFill>
+              <a:schemeClr val="tx2">
+                <a:lumMod val="75000"/>
+              </a:schemeClr>
+            </a:solidFill>
+            <a:tailEnd type="triangle"/>
+          </a:ln>
+        </p:spPr>
+        <p:style>
+          <a:lnRef idx="1">
+            <a:schemeClr val="accent1"/>
+          </a:lnRef>
+          <a:fillRef idx="0">
+            <a:schemeClr val="accent1"/>
+          </a:fillRef>
+          <a:effectRef idx="0">
+            <a:schemeClr val="accent1"/>
+          </a:effectRef>
+          <a:fontRef idx="minor">
+            <a:schemeClr val="tx1"/>
+          </a:fontRef>
+        </p:style>
+      </p:cxnSp>
+      <p:cxnSp>
+        <p:nvCxnSpPr>
+          <p:cNvPr id="63" name="Connector: Elbow 62">
+            <a:extLst>
+              <a:ext uri="{FF2B5EF4-FFF2-40B4-BE49-F238E27FC236}">
+                <a16:creationId xmlns:a16="http://schemas.microsoft.com/office/drawing/2014/main" id="{3D59BC2F-18A0-672D-240B-C8C41E270787}"/>
+              </a:ext>
+            </a:extLst>
+          </p:cNvPr>
+          <p:cNvCxnSpPr>
+            <a:cxnSpLocks/>
+            <a:endCxn id="16" idx="1"/>
+          </p:cNvCxnSpPr>
+          <p:nvPr/>
+        </p:nvCxnSpPr>
+        <p:spPr>
+          <a:xfrm rot="5400000" flipH="1" flipV="1">
+            <a:off x="7235442" y="4253124"/>
+            <a:ext cx="1601911" cy="350966"/>
+          </a:xfrm>
+          <a:prstGeom prst="bentConnector2">
+            <a:avLst/>
+          </a:prstGeom>
+          <a:ln w="9525">
+            <a:solidFill>
+              <a:schemeClr val="tx2">
+                <a:lumMod val="75000"/>
+              </a:schemeClr>
+            </a:solidFill>
+            <a:tailEnd type="triangle"/>
+          </a:ln>
+        </p:spPr>
+        <p:style>
+          <a:lnRef idx="1">
+            <a:schemeClr val="accent1"/>
+          </a:lnRef>
+          <a:fillRef idx="0">
+            <a:schemeClr val="accent1"/>
+          </a:fillRef>
+          <a:effectRef idx="0">
+            <a:schemeClr val="accent1"/>
+          </a:effectRef>
+          <a:fontRef idx="minor">
+            <a:schemeClr val="tx1"/>
+          </a:fontRef>
+        </p:style>
+      </p:cxnSp>
+      <p:cxnSp>
+        <p:nvCxnSpPr>
+          <p:cNvPr id="69" name="Straight Arrow Connector 68">
+            <a:extLst>
+              <a:ext uri="{FF2B5EF4-FFF2-40B4-BE49-F238E27FC236}">
+                <a16:creationId xmlns:a16="http://schemas.microsoft.com/office/drawing/2014/main" id="{F9205B8A-C366-F7A5-3EF7-161DD383EED3}"/>
+              </a:ext>
+            </a:extLst>
+          </p:cNvPr>
+          <p:cNvCxnSpPr>
+            <a:cxnSpLocks/>
+            <a:stCxn id="11" idx="3"/>
+          </p:cNvCxnSpPr>
+          <p:nvPr/>
+        </p:nvCxnSpPr>
+        <p:spPr>
+          <a:xfrm flipV="1">
+            <a:off x="10406727" y="4580678"/>
+            <a:ext cx="424023" cy="7760"/>
+          </a:xfrm>
+          <a:prstGeom prst="straightConnector1">
+            <a:avLst/>
+          </a:prstGeom>
+          <a:ln w="9525">
+            <a:solidFill>
+              <a:schemeClr val="accent5">
+                <a:lumMod val="75000"/>
+              </a:schemeClr>
+            </a:solidFill>
+            <a:tailEnd type="triangle"/>
+          </a:ln>
+        </p:spPr>
+        <p:style>
+          <a:lnRef idx="1">
+            <a:schemeClr val="accent1"/>
+          </a:lnRef>
+          <a:fillRef idx="0">
+            <a:schemeClr val="accent1"/>
+          </a:fillRef>
+          <a:effectRef idx="0">
+            <a:schemeClr val="accent1"/>
+          </a:effectRef>
+          <a:fontRef idx="minor">
+            <a:schemeClr val="tx1"/>
+          </a:fontRef>
+        </p:style>
+      </p:cxnSp>
     </p:spTree>
     <p:extLst>
       <p:ext uri="{BB962C8B-B14F-4D97-AF65-F5344CB8AC3E}">
-        <p14:creationId xmlns:p14="http://schemas.microsoft.com/office/powerpoint/2010/main" val="2695534885"/>
+        <p14:creationId xmlns:p14="http://schemas.microsoft.com/office/powerpoint/2010/main" val="4172345208"/>
       </p:ext>
     </p:extLst>
   </p:cSld>
   <p:clrMapOvr>
     <a:masterClrMapping/>
   </p:clrMapOvr>
+  <p:timing>
+    <p:tnLst>
+      <p:par>
+        <p:cTn id="1" dur="indefinite" restart="never" nodeType="tmRoot">
+          <p:childTnLst>
+            <p:seq concurrent="1" nextAc="seek">
+              <p:cTn id="2" dur="indefinite" nodeType="mainSeq">
+                <p:childTnLst>
+                  <p:par>
+                    <p:cTn id="3" fill="hold">
+                      <p:stCondLst>
+                        <p:cond delay="indefinite"/>
+                      </p:stCondLst>
+                      <p:childTnLst>
+                        <p:par>
+                          <p:cTn id="4" fill="hold">
+                            <p:stCondLst>
+                              <p:cond delay="0"/>
+                            </p:stCondLst>
+                            <p:childTnLst>
+                              <p:par>
+                                <p:cTn id="5" presetID="1" presetClass="entr" presetSubtype="0" fill="hold" nodeType="clickEffect">
+                                  <p:stCondLst>
+                                    <p:cond delay="0"/>
+                                  </p:stCondLst>
+                                  <p:childTnLst>
+                                    <p:set>
+                                      <p:cBhvr>
+                                        <p:cTn id="6" dur="1" fill="hold">
+                                          <p:stCondLst>
+                                            <p:cond delay="0"/>
+                                          </p:stCondLst>
+                                        </p:cTn>
+                                        <p:tgtEl>
+                                          <p:spTgt spid="57"/>
+                                        </p:tgtEl>
+                                        <p:attrNameLst>
+                                          <p:attrName>style.visibility</p:attrName>
+                                        </p:attrNameLst>
+                                      </p:cBhvr>
+                                      <p:to>
+                                        <p:strVal val="visible"/>
+                                      </p:to>
+                                    </p:set>
+                                  </p:childTnLst>
+                                </p:cTn>
+                              </p:par>
+                            </p:childTnLst>
+                          </p:cTn>
+                        </p:par>
+                      </p:childTnLst>
+                    </p:cTn>
+                  </p:par>
+                  <p:par>
+                    <p:cTn id="7" fill="hold">
+                      <p:stCondLst>
+                        <p:cond delay="indefinite"/>
+                      </p:stCondLst>
+                      <p:childTnLst>
+                        <p:par>
+                          <p:cTn id="8" fill="hold">
+                            <p:stCondLst>
+                              <p:cond delay="0"/>
+                            </p:stCondLst>
+                            <p:childTnLst>
+                              <p:par>
+                                <p:cTn id="9" presetID="1" presetClass="entr" presetSubtype="0" fill="hold" nodeType="clickEffect">
+                                  <p:stCondLst>
+                                    <p:cond delay="0"/>
+                                  </p:stCondLst>
+                                  <p:childTnLst>
+                                    <p:set>
+                                      <p:cBhvr>
+                                        <p:cTn id="10" dur="1" fill="hold">
+                                          <p:stCondLst>
+                                            <p:cond delay="0"/>
+                                          </p:stCondLst>
+                                        </p:cTn>
+                                        <p:tgtEl>
+                                          <p:spTgt spid="56"/>
+                                        </p:tgtEl>
+                                        <p:attrNameLst>
+                                          <p:attrName>style.visibility</p:attrName>
+                                        </p:attrNameLst>
+                                      </p:cBhvr>
+                                      <p:to>
+                                        <p:strVal val="visible"/>
+                                      </p:to>
+                                    </p:set>
+                                  </p:childTnLst>
+                                </p:cTn>
+                              </p:par>
+                            </p:childTnLst>
+                          </p:cTn>
+                        </p:par>
+                      </p:childTnLst>
+                    </p:cTn>
+                  </p:par>
+                  <p:par>
+                    <p:cTn id="11" fill="hold">
+                      <p:stCondLst>
+                        <p:cond delay="indefinite"/>
+                      </p:stCondLst>
+                      <p:childTnLst>
+                        <p:par>
+                          <p:cTn id="12" fill="hold">
+                            <p:stCondLst>
+                              <p:cond delay="0"/>
+                            </p:stCondLst>
+                            <p:childTnLst>
+                              <p:par>
+                                <p:cTn id="13" presetID="1" presetClass="entr" presetSubtype="0" fill="hold" nodeType="clickEffect">
+                                  <p:stCondLst>
+                                    <p:cond delay="0"/>
+                                  </p:stCondLst>
+                                  <p:childTnLst>
+                                    <p:set>
+                                      <p:cBhvr>
+                                        <p:cTn id="14" dur="1" fill="hold">
+                                          <p:stCondLst>
+                                            <p:cond delay="0"/>
+                                          </p:stCondLst>
+                                        </p:cTn>
+                                        <p:tgtEl>
+                                          <p:spTgt spid="90"/>
+                                        </p:tgtEl>
+                                        <p:attrNameLst>
+                                          <p:attrName>style.visibility</p:attrName>
+                                        </p:attrNameLst>
+                                      </p:cBhvr>
+                                      <p:to>
+                                        <p:strVal val="visible"/>
+                                      </p:to>
+                                    </p:set>
+                                  </p:childTnLst>
+                                </p:cTn>
+                              </p:par>
+                            </p:childTnLst>
+                          </p:cTn>
+                        </p:par>
+                      </p:childTnLst>
+                    </p:cTn>
+                  </p:par>
+                  <p:par>
+                    <p:cTn id="15" fill="hold">
+                      <p:stCondLst>
+                        <p:cond delay="indefinite"/>
+                      </p:stCondLst>
+                      <p:childTnLst>
+                        <p:par>
+                          <p:cTn id="16" fill="hold">
+                            <p:stCondLst>
+                              <p:cond delay="0"/>
+                            </p:stCondLst>
+                            <p:childTnLst>
+                              <p:par>
+                                <p:cTn id="17" presetID="1" presetClass="entr" presetSubtype="0" fill="hold" grpId="0" nodeType="clickEffect">
+                                  <p:stCondLst>
+                                    <p:cond delay="0"/>
+                                  </p:stCondLst>
+                                  <p:childTnLst>
+                                    <p:set>
+                                      <p:cBhvr>
+                                        <p:cTn id="18" dur="1" fill="hold">
+                                          <p:stCondLst>
+                                            <p:cond delay="0"/>
+                                          </p:stCondLst>
+                                        </p:cTn>
+                                        <p:tgtEl>
+                                          <p:spTgt spid="60"/>
+                                        </p:tgtEl>
+                                        <p:attrNameLst>
+                                          <p:attrName>style.visibility</p:attrName>
+                                        </p:attrNameLst>
+                                      </p:cBhvr>
+                                      <p:to>
+                                        <p:strVal val="visible"/>
+                                      </p:to>
+                                    </p:set>
+                                  </p:childTnLst>
+                                </p:cTn>
+                              </p:par>
+                            </p:childTnLst>
+                          </p:cTn>
+                        </p:par>
+                      </p:childTnLst>
+                    </p:cTn>
+                  </p:par>
+                  <p:par>
+                    <p:cTn id="19" fill="hold">
+                      <p:stCondLst>
+                        <p:cond delay="indefinite"/>
+                      </p:stCondLst>
+                      <p:childTnLst>
+                        <p:par>
+                          <p:cTn id="20" fill="hold">
+                            <p:stCondLst>
+                              <p:cond delay="0"/>
+                            </p:stCondLst>
+                            <p:childTnLst>
+                              <p:par>
+                                <p:cTn id="21" presetID="1" presetClass="entr" presetSubtype="0" fill="hold" grpId="0" nodeType="clickEffect">
+                                  <p:stCondLst>
+                                    <p:cond delay="0"/>
+                                  </p:stCondLst>
+                                  <p:childTnLst>
+                                    <p:set>
+                                      <p:cBhvr>
+                                        <p:cTn id="22" dur="1" fill="hold">
+                                          <p:stCondLst>
+                                            <p:cond delay="0"/>
+                                          </p:stCondLst>
+                                        </p:cTn>
+                                        <p:tgtEl>
+                                          <p:spTgt spid="85"/>
+                                        </p:tgtEl>
+                                        <p:attrNameLst>
+                                          <p:attrName>style.visibility</p:attrName>
+                                        </p:attrNameLst>
+                                      </p:cBhvr>
+                                      <p:to>
+                                        <p:strVal val="visible"/>
+                                      </p:to>
+                                    </p:set>
+                                  </p:childTnLst>
+                                </p:cTn>
+                              </p:par>
+                              <p:par>
+                                <p:cTn id="23" presetID="1" presetClass="exit" presetSubtype="0" fill="hold" nodeType="withEffect">
+                                  <p:stCondLst>
+                                    <p:cond delay="0"/>
+                                  </p:stCondLst>
+                                  <p:childTnLst>
+                                    <p:set>
+                                      <p:cBhvr>
+                                        <p:cTn id="24" dur="1" fill="hold">
+                                          <p:stCondLst>
+                                            <p:cond delay="0"/>
+                                          </p:stCondLst>
+                                        </p:cTn>
+                                        <p:tgtEl>
+                                          <p:spTgt spid="56"/>
+                                        </p:tgtEl>
+                                        <p:attrNameLst>
+                                          <p:attrName>style.visibility</p:attrName>
+                                        </p:attrNameLst>
+                                      </p:cBhvr>
+                                      <p:to>
+                                        <p:strVal val="hidden"/>
+                                      </p:to>
+                                    </p:set>
+                                  </p:childTnLst>
+                                </p:cTn>
+                              </p:par>
+                            </p:childTnLst>
+                          </p:cTn>
+                        </p:par>
+                      </p:childTnLst>
+                    </p:cTn>
+                  </p:par>
+                </p:childTnLst>
+              </p:cTn>
+              <p:prevCondLst>
+                <p:cond evt="onPrev" delay="0">
+                  <p:tgtEl>
+                    <p:sldTgt/>
+                  </p:tgtEl>
+                </p:cond>
+              </p:prevCondLst>
+              <p:nextCondLst>
+                <p:cond evt="onNext" delay="0">
+                  <p:tgtEl>
+                    <p:sldTgt/>
+                  </p:tgtEl>
+                </p:cond>
+              </p:nextCondLst>
+            </p:seq>
+          </p:childTnLst>
+        </p:cTn>
+      </p:par>
+    </p:tnLst>
+    <p:bldLst>
+      <p:bldP spid="60" grpId="0" animBg="1"/>
+      <p:bldP spid="85" grpId="0" animBg="1"/>
+    </p:bldLst>
+  </p:timing>
 </p:sld>
 </file>
 
@@ -41757,28 +44144,6 @@
 </file>
 
 <file path=customXml/item1.xml><?xml version="1.0" encoding="utf-8"?>
-<p:properties xmlns:p="http://schemas.microsoft.com/office/2006/metadata/properties" xmlns:xsi="http://www.w3.org/2001/XMLSchema-instance" xmlns:pc="http://schemas.microsoft.com/office/infopath/2007/PartnerControls">
-  <documentManagement>
-    <lcf76f155ced4ddcb4097134ff3c332f xmlns="a70944c9-f5be-4b0f-89c7-00caf47c665c">
-      <Terms xmlns="http://schemas.microsoft.com/office/infopath/2007/PartnerControls"/>
-    </lcf76f155ced4ddcb4097134ff3c332f>
-    <TaxCatchAll xmlns="19f94994-4311-4823-a682-47492cb9e3e3" xsi:nil="true"/>
-    <_ip_UnifiedCompliancePolicyUIAction xmlns="http://schemas.microsoft.com/sharepoint/v3" xsi:nil="true"/>
-    <_ip_UnifiedCompliancePolicyProperties xmlns="http://schemas.microsoft.com/sharepoint/v3" xsi:nil="true"/>
-  </documentManagement>
-</p:properties>
-</file>
-
-<file path=customXml/item2.xml><?xml version="1.0" encoding="utf-8"?>
-<?mso-contentType ?>
-<FormTemplates xmlns="http://schemas.microsoft.com/sharepoint/v3/contenttype/forms">
-  <Display>DocumentLibraryForm</Display>
-  <Edit>DocumentLibraryForm</Edit>
-  <New>DocumentLibraryForm</New>
-</FormTemplates>
-</file>
-
-<file path=customXml/item3.xml><?xml version="1.0" encoding="utf-8"?>
 <ct:contentTypeSchema xmlns:ct="http://schemas.microsoft.com/office/2006/metadata/contentType" xmlns:ma="http://schemas.microsoft.com/office/2006/metadata/properties/metaAttributes" ct:_="" ma:_="" ma:contentTypeName="Document" ma:contentTypeID="0x010100E23E32C3022BA344AE607CE1B766CD2B" ma:contentTypeVersion="20" ma:contentTypeDescription="Create a new document." ma:contentTypeScope="" ma:versionID="5a5fcfb9cc5c272f01249a47aa4133c0">
   <xsd:schema xmlns:xsd="http://www.w3.org/2001/XMLSchema" xmlns:xs="http://www.w3.org/2001/XMLSchema" xmlns:p="http://schemas.microsoft.com/office/2006/metadata/properties" xmlns:ns1="http://schemas.microsoft.com/sharepoint/v3" xmlns:ns2="a70944c9-f5be-4b0f-89c7-00caf47c665c" xmlns:ns3="19f94994-4311-4823-a682-47492cb9e3e3" targetNamespace="http://schemas.microsoft.com/office/2006/metadata/properties" ma:root="true" ma:fieldsID="a22a3b39221887b161ef847201591c90" ns1:_="" ns2:_="" ns3:_="">
     <xsd:import namespace="http://schemas.microsoft.com/sharepoint/v3"/>
@@ -42038,7 +44403,57 @@
 </ct:contentTypeSchema>
 </file>
 
+<file path=customXml/item2.xml><?xml version="1.0" encoding="utf-8"?>
+<?mso-contentType ?>
+<FormTemplates xmlns="http://schemas.microsoft.com/sharepoint/v3/contenttype/forms">
+  <Display>DocumentLibraryForm</Display>
+  <Edit>DocumentLibraryForm</Edit>
+  <New>DocumentLibraryForm</New>
+</FormTemplates>
+</file>
+
+<file path=customXml/item3.xml><?xml version="1.0" encoding="utf-8"?>
+<p:properties xmlns:p="http://schemas.microsoft.com/office/2006/metadata/properties" xmlns:xsi="http://www.w3.org/2001/XMLSchema-instance" xmlns:pc="http://schemas.microsoft.com/office/infopath/2007/PartnerControls">
+  <documentManagement>
+    <lcf76f155ced4ddcb4097134ff3c332f xmlns="a70944c9-f5be-4b0f-89c7-00caf47c665c">
+      <Terms xmlns="http://schemas.microsoft.com/office/infopath/2007/PartnerControls"/>
+    </lcf76f155ced4ddcb4097134ff3c332f>
+    <TaxCatchAll xmlns="19f94994-4311-4823-a682-47492cb9e3e3" xsi:nil="true"/>
+    <_ip_UnifiedCompliancePolicyUIAction xmlns="http://schemas.microsoft.com/sharepoint/v3" xsi:nil="true"/>
+    <_ip_UnifiedCompliancePolicyProperties xmlns="http://schemas.microsoft.com/sharepoint/v3" xsi:nil="true"/>
+  </documentManagement>
+</p:properties>
+</file>
+
 <file path=customXml/itemProps1.xml><?xml version="1.0" encoding="utf-8"?>
+<ds:datastoreItem xmlns:ds="http://schemas.openxmlformats.org/officeDocument/2006/customXml" ds:itemID="{D1439A1B-61DB-461C-83F7-A0353C9BF2B7}">
+  <ds:schemaRefs>
+    <ds:schemaRef ds:uri="19f94994-4311-4823-a682-47492cb9e3e3"/>
+    <ds:schemaRef ds:uri="a70944c9-f5be-4b0f-89c7-00caf47c665c"/>
+    <ds:schemaRef ds:uri="http://purl.org/dc/elements/1.1/"/>
+    <ds:schemaRef ds:uri="http://purl.org/dc/terms/"/>
+    <ds:schemaRef ds:uri="http://schemas.microsoft.com/internal/obd"/>
+    <ds:schemaRef ds:uri="http://schemas.microsoft.com/office/2006/documentManagement/types"/>
+    <ds:schemaRef ds:uri="http://schemas.microsoft.com/office/2006/metadata/contentType"/>
+    <ds:schemaRef ds:uri="http://schemas.microsoft.com/office/2006/metadata/properties"/>
+    <ds:schemaRef ds:uri="http://schemas.microsoft.com/office/2006/metadata/properties/metaAttributes"/>
+    <ds:schemaRef ds:uri="http://schemas.microsoft.com/office/infopath/2007/PartnerControls"/>
+    <ds:schemaRef ds:uri="http://schemas.microsoft.com/sharepoint/v3"/>
+    <ds:schemaRef ds:uri="http://schemas.openxmlformats.org/package/2006/metadata/core-properties"/>
+    <ds:schemaRef ds:uri="http://www.w3.org/2001/XMLSchema"/>
+  </ds:schemaRefs>
+</ds:datastoreItem>
+</file>
+
+<file path=customXml/itemProps2.xml><?xml version="1.0" encoding="utf-8"?>
+<ds:datastoreItem xmlns:ds="http://schemas.openxmlformats.org/officeDocument/2006/customXml" ds:itemID="{3B61DF2E-245C-45DF-A9A5-EABECEA4295F}">
+  <ds:schemaRefs>
+    <ds:schemaRef ds:uri="http://schemas.microsoft.com/sharepoint/v3/contenttype/forms"/>
+  </ds:schemaRefs>
+</ds:datastoreItem>
+</file>
+
+<file path=customXml/itemProps3.xml><?xml version="1.0" encoding="utf-8"?>
 <ds:datastoreItem xmlns:ds="http://schemas.openxmlformats.org/officeDocument/2006/customXml" ds:itemID="{73B851B7-D313-4E85-A1E0-5976CFE11EC3}">
   <ds:schemaRefs>
     <ds:schemaRef ds:uri="19f94994-4311-4823-a682-47492cb9e3e3"/>
@@ -42056,30 +44471,8 @@
 </ds:datastoreItem>
 </file>
 
-<file path=customXml/itemProps2.xml><?xml version="1.0" encoding="utf-8"?>
-<ds:datastoreItem xmlns:ds="http://schemas.openxmlformats.org/officeDocument/2006/customXml" ds:itemID="{3B61DF2E-245C-45DF-A9A5-EABECEA4295F}">
-  <ds:schemaRefs>
-    <ds:schemaRef ds:uri="http://schemas.microsoft.com/sharepoint/v3/contenttype/forms"/>
-  </ds:schemaRefs>
-</ds:datastoreItem>
-</file>
-
-<file path=customXml/itemProps3.xml><?xml version="1.0" encoding="utf-8"?>
-<ds:datastoreItem xmlns:ds="http://schemas.openxmlformats.org/officeDocument/2006/customXml" ds:itemID="{D1439A1B-61DB-461C-83F7-A0353C9BF2B7}">
-  <ds:schemaRefs>
-    <ds:schemaRef ds:uri="19f94994-4311-4823-a682-47492cb9e3e3"/>
-    <ds:schemaRef ds:uri="a70944c9-f5be-4b0f-89c7-00caf47c665c"/>
-    <ds:schemaRef ds:uri="http://purl.org/dc/elements/1.1/"/>
-    <ds:schemaRef ds:uri="http://purl.org/dc/terms/"/>
-    <ds:schemaRef ds:uri="http://schemas.microsoft.com/internal/obd"/>
-    <ds:schemaRef ds:uri="http://schemas.microsoft.com/office/2006/documentManagement/types"/>
-    <ds:schemaRef ds:uri="http://schemas.microsoft.com/office/2006/metadata/contentType"/>
-    <ds:schemaRef ds:uri="http://schemas.microsoft.com/office/2006/metadata/properties"/>
-    <ds:schemaRef ds:uri="http://schemas.microsoft.com/office/2006/metadata/properties/metaAttributes"/>
-    <ds:schemaRef ds:uri="http://schemas.microsoft.com/office/infopath/2007/PartnerControls"/>
-    <ds:schemaRef ds:uri="http://schemas.microsoft.com/sharepoint/v3"/>
-    <ds:schemaRef ds:uri="http://schemas.openxmlformats.org/package/2006/metadata/core-properties"/>
-    <ds:schemaRef ds:uri="http://www.w3.org/2001/XMLSchema"/>
-  </ds:schemaRefs>
-</ds:datastoreItem>
+<file path=docMetadata/LabelInfo.xml><?xml version="1.0" encoding="utf-8"?>
+<clbl:labelList xmlns:clbl="http://schemas.microsoft.com/office/2020/mipLabelMetadata">
+  <clbl:label id="{99dd3a11-4348-4468-9bdd-e5072b1dc1e6}" enabled="0" method="" siteId="{99dd3a11-4348-4468-9bdd-e5072b1dc1e6}" removed="1"/>
+</clbl:labelList>
 </file>